--- a/Equip_33/Results/2026-06-09_BusinessReport_color_lines.pptx
+++ b/Equip_33/Results/2026-06-09_BusinessReport_color_lines.pptx
@@ -70,8 +70,8 @@
         </p:nvSpPr>
         <p:spPr>
           <a:xfrm>
-            <a:off x="609480" y="273600"/>
-            <a:ext cx="10970280" cy="1142640"/>
+            <a:off x="609480" y="272160"/>
+            <a:ext cx="10969200" cy="1144800"/>
           </a:xfrm>
           <a:prstGeom prst="rect">
             <a:avLst/>
@@ -172,7 +172,7 @@
         <p:txBody>
           <a:bodyPr/>
           <a:p>
-            <a:fld id="{371CF177-3BB1-49B5-9D6B-CD2A10BA2904}" type="slidenum">
+            <a:fld id="{B9D89962-E61F-40AF-AD57-527A84D9FE89}" type="slidenum">
               <a:t>&lt;#&gt;</a:t>
             </a:fld>
           </a:p>
@@ -233,8 +233,8 @@
         </p:nvSpPr>
         <p:spPr>
           <a:xfrm>
-            <a:off x="609480" y="273600"/>
-            <a:ext cx="10970280" cy="1142640"/>
+            <a:off x="609480" y="272160"/>
+            <a:ext cx="10969200" cy="1144800"/>
           </a:xfrm>
           <a:prstGeom prst="rect">
             <a:avLst/>
@@ -338,7 +338,7 @@
         <p:txBody>
           <a:bodyPr/>
           <a:p>
-            <a:fld id="{EE014895-067A-4258-8F4F-738A15934499}" type="slidenum">
+            <a:fld id="{7F168E29-C36A-4152-8571-2576335E4F9B}" type="slidenum">
               <a:t>&lt;#&gt;</a:t>
             </a:fld>
           </a:p>
@@ -421,7 +421,7 @@
         <p:txBody>
           <a:bodyPr/>
           <a:p>
-            <a:fld id="{280CEB34-9C8F-44FF-91DF-55475F11BB61}" type="slidenum">
+            <a:fld id="{80DECA53-83F1-47BA-8868-0BB53D419E06}" type="slidenum">
               <a:t>&lt;#&gt;</a:t>
             </a:fld>
           </a:p>
@@ -482,8 +482,8 @@
         </p:nvSpPr>
         <p:spPr>
           <a:xfrm>
-            <a:off x="609480" y="273600"/>
-            <a:ext cx="10970280" cy="1142640"/>
+            <a:off x="609480" y="272160"/>
+            <a:ext cx="10969200" cy="1144800"/>
           </a:xfrm>
           <a:prstGeom prst="rect">
             <a:avLst/>
@@ -532,7 +532,7 @@
         <p:spPr>
           <a:xfrm>
             <a:off x="3447360" y="5165280"/>
-            <a:ext cx="3192120" cy="387720"/>
+            <a:ext cx="3191040" cy="386640"/>
           </a:xfrm>
           <a:prstGeom prst="rect">
             <a:avLst/>
@@ -604,7 +604,7 @@
         <p:spPr>
           <a:xfrm>
             <a:off x="7227360" y="5165280"/>
-            <a:ext cx="2345400" cy="387720"/>
+            <a:ext cx="2344320" cy="386640"/>
           </a:xfrm>
           <a:prstGeom prst="rect">
             <a:avLst/>
@@ -645,7 +645,7 @@
                 <a:tab algn="l" pos="0"/>
               </a:tabLst>
             </a:pPr>
-            <a:fld id="{E4EE0E61-ED5C-4CEC-B867-F5D93AA862F2}" type="slidenum">
+            <a:fld id="{7BAF651F-4F3F-4579-BDE5-FC4225E04E80}" type="slidenum">
               <a:rPr b="0" lang="es-ES" sz="1400" spc="-1" strike="noStrike">
                 <a:solidFill>
                   <a:srgbClr val="000000"/>
@@ -676,7 +676,7 @@
         <p:spPr>
           <a:xfrm>
             <a:off x="504000" y="5165280"/>
-            <a:ext cx="2345400" cy="387720"/>
+            <a:ext cx="2344320" cy="386640"/>
           </a:xfrm>
           <a:prstGeom prst="rect">
             <a:avLst/>
@@ -986,8 +986,8 @@
         </p:nvSpPr>
         <p:spPr>
           <a:xfrm>
-            <a:off x="609480" y="273600"/>
-            <a:ext cx="10970280" cy="1142640"/>
+            <a:off x="609480" y="272160"/>
+            <a:ext cx="10969200" cy="1144800"/>
           </a:xfrm>
           <a:prstGeom prst="rect">
             <a:avLst/>
@@ -1261,7 +1261,7 @@
         <p:spPr>
           <a:xfrm>
             <a:off x="3447360" y="5165280"/>
-            <a:ext cx="3192120" cy="387720"/>
+            <a:ext cx="3191040" cy="386640"/>
           </a:xfrm>
           <a:prstGeom prst="rect">
             <a:avLst/>
@@ -1333,7 +1333,7 @@
         <p:spPr>
           <a:xfrm>
             <a:off x="7227360" y="5165280"/>
-            <a:ext cx="2345400" cy="387720"/>
+            <a:ext cx="2344320" cy="386640"/>
           </a:xfrm>
           <a:prstGeom prst="rect">
             <a:avLst/>
@@ -1374,7 +1374,7 @@
                 <a:tab algn="l" pos="0"/>
               </a:tabLst>
             </a:pPr>
-            <a:fld id="{7CF6A52C-7CAB-4F35-AA58-E17109E1DA7D}" type="slidenum">
+            <a:fld id="{A3F833DE-81CC-429B-825E-2637BDDE1620}" type="slidenum">
               <a:rPr b="0" lang="es-ES" sz="1400" spc="-1" strike="noStrike">
                 <a:solidFill>
                   <a:srgbClr val="000000"/>
@@ -1405,7 +1405,7 @@
         <p:spPr>
           <a:xfrm>
             <a:off x="504000" y="5165280"/>
-            <a:ext cx="2345400" cy="387720"/>
+            <a:ext cx="2344320" cy="386640"/>
           </a:xfrm>
           <a:prstGeom prst="rect">
             <a:avLst/>
@@ -1491,7 +1491,7 @@
         <p:spPr>
           <a:xfrm>
             <a:off x="3447360" y="5165280"/>
-            <a:ext cx="3192120" cy="387720"/>
+            <a:ext cx="3191040" cy="386640"/>
           </a:xfrm>
           <a:prstGeom prst="rect">
             <a:avLst/>
@@ -1563,7 +1563,7 @@
         <p:spPr>
           <a:xfrm>
             <a:off x="7227360" y="5165280"/>
-            <a:ext cx="2345400" cy="387720"/>
+            <a:ext cx="2344320" cy="386640"/>
           </a:xfrm>
           <a:prstGeom prst="rect">
             <a:avLst/>
@@ -1604,7 +1604,7 @@
                 <a:tab algn="l" pos="0"/>
               </a:tabLst>
             </a:pPr>
-            <a:fld id="{5B874A11-DD0A-4527-918C-729B1E2C55E5}" type="slidenum">
+            <a:fld id="{B34262E9-FE13-44CA-B157-14E312219980}" type="slidenum">
               <a:rPr b="0" lang="es-ES" sz="1400" spc="-1" strike="noStrike">
                 <a:solidFill>
                   <a:srgbClr val="000000"/>
@@ -1635,7 +1635,7 @@
         <p:spPr>
           <a:xfrm>
             <a:off x="504000" y="5165280"/>
-            <a:ext cx="2345400" cy="387720"/>
+            <a:ext cx="2344320" cy="386640"/>
           </a:xfrm>
           <a:prstGeom prst="rect">
             <a:avLst/>
@@ -1728,7 +1728,7 @@
         <p:spPr>
           <a:xfrm>
             <a:off x="5760000" y="164160"/>
-            <a:ext cx="6433920" cy="6352560"/>
+            <a:ext cx="6432840" cy="6351480"/>
           </a:xfrm>
           <a:prstGeom prst="rect">
             <a:avLst/>
@@ -1747,7 +1747,7 @@
         <p:spPr>
           <a:xfrm>
             <a:off x="0" y="0"/>
-            <a:ext cx="12188520" cy="161280"/>
+            <a:ext cx="12187440" cy="160200"/>
           </a:xfrm>
           <a:prstGeom prst="rect">
             <a:avLst/>
@@ -1794,7 +1794,7 @@
         <p:spPr>
           <a:xfrm>
             <a:off x="0" y="6519600"/>
-            <a:ext cx="12188520" cy="353520"/>
+            <a:ext cx="12187440" cy="352440"/>
           </a:xfrm>
           <a:prstGeom prst="rect">
             <a:avLst/>
@@ -1841,7 +1841,7 @@
         <p:spPr>
           <a:xfrm>
             <a:off x="396000" y="2011680"/>
-            <a:ext cx="5902920" cy="1047240"/>
+            <a:ext cx="5901840" cy="1046160"/>
           </a:xfrm>
           <a:prstGeom prst="rect">
             <a:avLst/>
@@ -1918,7 +1918,7 @@
         <p:spPr>
           <a:xfrm>
             <a:off x="432000" y="3744000"/>
-            <a:ext cx="1977120" cy="856800"/>
+            <a:ext cx="1976040" cy="855720"/>
           </a:xfrm>
           <a:prstGeom prst="rect">
             <a:avLst/>
@@ -1971,13 +1971,13 @@
         </p:nvPicPr>
         <p:blipFill>
           <a:blip r:embed="rId2"/>
-          <a:srcRect l="0" t="26241" r="0" b="23016"/>
+          <a:srcRect l="0" t="26247" r="0" b="23016"/>
           <a:stretch/>
         </p:blipFill>
         <p:spPr>
           <a:xfrm>
             <a:off x="216000" y="360360"/>
-            <a:ext cx="1946880" cy="536760"/>
+            <a:ext cx="1945800" cy="535680"/>
           </a:xfrm>
           <a:prstGeom prst="rect">
             <a:avLst/>
@@ -1996,7 +1996,7 @@
         <p:spPr>
           <a:xfrm>
             <a:off x="420120" y="3420000"/>
-            <a:ext cx="3357000" cy="537120"/>
+            <a:ext cx="3355920" cy="536040"/>
           </a:xfrm>
           <a:prstGeom prst="rect">
             <a:avLst/>
@@ -2080,14 +2080,14 @@
       </p:grpSpPr>
       <p:sp>
         <p:nvSpPr>
-          <p:cNvPr id="153" name="Shape 146"/>
+          <p:cNvPr id="154" name="Shape 146"/>
           <p:cNvSpPr/>
           <p:nvPr/>
         </p:nvSpPr>
         <p:spPr>
           <a:xfrm>
             <a:off x="0" y="0"/>
-            <a:ext cx="12188520" cy="161280"/>
+            <a:ext cx="12187440" cy="160200"/>
           </a:xfrm>
           <a:prstGeom prst="rect">
             <a:avLst/>
@@ -2127,14 +2127,14 @@
       </p:sp>
       <p:sp>
         <p:nvSpPr>
-          <p:cNvPr id="154" name="Shape 147"/>
+          <p:cNvPr id="155" name="Shape 147"/>
           <p:cNvSpPr/>
           <p:nvPr/>
         </p:nvSpPr>
         <p:spPr>
           <a:xfrm>
             <a:off x="0" y="6510600"/>
-            <a:ext cx="12188520" cy="362520"/>
+            <a:ext cx="12187440" cy="361440"/>
           </a:xfrm>
           <a:prstGeom prst="rect">
             <a:avLst/>
@@ -2174,19 +2174,19 @@
       </p:sp>
       <p:pic>
         <p:nvPicPr>
-          <p:cNvPr id="155" name="" descr=""/>
+          <p:cNvPr id="156" name="" descr=""/>
           <p:cNvPicPr/>
           <p:nvPr/>
         </p:nvPicPr>
         <p:blipFill>
           <a:blip r:embed="rId1"/>
-          <a:srcRect l="0" t="26241" r="0" b="23016"/>
+          <a:srcRect l="0" t="26247" r="0" b="23016"/>
           <a:stretch/>
         </p:blipFill>
         <p:spPr>
           <a:xfrm>
             <a:off x="10038240" y="288360"/>
-            <a:ext cx="1946880" cy="536760"/>
+            <a:ext cx="1945800" cy="535680"/>
           </a:xfrm>
           <a:prstGeom prst="rect">
             <a:avLst/>
@@ -2198,14 +2198,14 @@
       </p:pic>
       <p:sp>
         <p:nvSpPr>
-          <p:cNvPr id="156" name="Text 88"/>
+          <p:cNvPr id="157" name="Text 88"/>
           <p:cNvSpPr/>
           <p:nvPr/>
         </p:nvSpPr>
         <p:spPr>
           <a:xfrm>
             <a:off x="168120" y="6538320"/>
-            <a:ext cx="2997000" cy="316800"/>
+            <a:ext cx="2995920" cy="315720"/>
           </a:xfrm>
           <a:prstGeom prst="rect">
             <a:avLst/>
@@ -2252,14 +2252,14 @@
       </p:sp>
       <p:sp>
         <p:nvSpPr>
-          <p:cNvPr id="157" name=""/>
+          <p:cNvPr id="158" name=""/>
           <p:cNvSpPr/>
           <p:nvPr/>
         </p:nvSpPr>
         <p:spPr>
           <a:xfrm>
             <a:off x="560880" y="971280"/>
-            <a:ext cx="9474480" cy="285840"/>
+            <a:ext cx="9473400" cy="284760"/>
           </a:xfrm>
           <a:prstGeom prst="rect">
             <a:avLst/>
@@ -2306,14 +2306,14 @@
       </p:sp>
       <p:sp>
         <p:nvSpPr>
-          <p:cNvPr id="158" name="Shape 148"/>
+          <p:cNvPr id="159" name="Shape 148"/>
           <p:cNvSpPr/>
           <p:nvPr/>
         </p:nvSpPr>
         <p:spPr>
           <a:xfrm>
             <a:off x="540000" y="1439280"/>
-            <a:ext cx="10977840" cy="3778560"/>
+            <a:ext cx="10976760" cy="3777480"/>
           </a:xfrm>
           <a:prstGeom prst="roundRect">
             <a:avLst>
@@ -2380,14 +2380,14 @@
       </p:sp>
       <p:sp>
         <p:nvSpPr>
-          <p:cNvPr id="159" name="Shape 149"/>
+          <p:cNvPr id="160" name="Shape 149"/>
           <p:cNvSpPr/>
           <p:nvPr/>
         </p:nvSpPr>
         <p:spPr>
           <a:xfrm>
             <a:off x="540000" y="5472000"/>
-            <a:ext cx="8637840" cy="717840"/>
+            <a:ext cx="8636760" cy="716760"/>
           </a:xfrm>
           <a:prstGeom prst="roundRect">
             <a:avLst>
@@ -2464,7 +2464,7 @@
       </p:sp>
       <p:pic>
         <p:nvPicPr>
-          <p:cNvPr id="160" name="" descr=""/>
+          <p:cNvPr id="161" name="" descr=""/>
           <p:cNvPicPr/>
           <p:nvPr/>
         </p:nvPicPr>
@@ -2475,7 +2475,7 @@
         <p:spPr>
           <a:xfrm>
             <a:off x="1240920" y="1471680"/>
-            <a:ext cx="9484920" cy="3714840"/>
+            <a:ext cx="9483840" cy="3713760"/>
           </a:xfrm>
           <a:prstGeom prst="rect">
             <a:avLst/>
@@ -2487,14 +2487,14 @@
       </p:pic>
       <p:sp>
         <p:nvSpPr>
-          <p:cNvPr id="161" name="Text 42"/>
+          <p:cNvPr id="162" name="Text 42"/>
           <p:cNvSpPr/>
           <p:nvPr/>
         </p:nvSpPr>
         <p:spPr>
           <a:xfrm>
             <a:off x="2742840" y="6538320"/>
-            <a:ext cx="1395720" cy="316800"/>
+            <a:ext cx="1394640" cy="315720"/>
           </a:xfrm>
           <a:prstGeom prst="rect">
             <a:avLst/>
@@ -2541,14 +2541,14 @@
       </p:sp>
       <p:sp>
         <p:nvSpPr>
-          <p:cNvPr id="162" name="Text 87"/>
+          <p:cNvPr id="163" name="Text 87"/>
           <p:cNvSpPr/>
           <p:nvPr/>
         </p:nvSpPr>
         <p:spPr>
           <a:xfrm>
             <a:off x="11412000" y="6538320"/>
-            <a:ext cx="754560" cy="316800"/>
+            <a:ext cx="753480" cy="315720"/>
           </a:xfrm>
           <a:prstGeom prst="rect">
             <a:avLst/>
@@ -2595,14 +2595,14 @@
       </p:sp>
       <p:sp>
         <p:nvSpPr>
-          <p:cNvPr id="163" name="Text 86"/>
+          <p:cNvPr id="164" name="Text 86"/>
           <p:cNvSpPr/>
           <p:nvPr/>
         </p:nvSpPr>
         <p:spPr>
           <a:xfrm>
             <a:off x="540000" y="388800"/>
-            <a:ext cx="6717600" cy="1048320"/>
+            <a:ext cx="6716520" cy="1047240"/>
           </a:xfrm>
           <a:prstGeom prst="rect">
             <a:avLst/>
@@ -2686,14 +2686,14 @@
       </p:grpSpPr>
       <p:sp>
         <p:nvSpPr>
-          <p:cNvPr id="164" name="Shape 150"/>
+          <p:cNvPr id="165" name="Shape 150"/>
           <p:cNvSpPr/>
           <p:nvPr/>
         </p:nvSpPr>
         <p:spPr>
           <a:xfrm>
             <a:off x="0" y="0"/>
-            <a:ext cx="12188520" cy="161280"/>
+            <a:ext cx="12187440" cy="160200"/>
           </a:xfrm>
           <a:prstGeom prst="rect">
             <a:avLst/>
@@ -2733,14 +2733,14 @@
       </p:sp>
       <p:sp>
         <p:nvSpPr>
-          <p:cNvPr id="165" name="Shape 151"/>
+          <p:cNvPr id="166" name="Shape 151"/>
           <p:cNvSpPr/>
           <p:nvPr/>
         </p:nvSpPr>
         <p:spPr>
           <a:xfrm>
             <a:off x="0" y="6510600"/>
-            <a:ext cx="12188520" cy="362520"/>
+            <a:ext cx="12187440" cy="361440"/>
           </a:xfrm>
           <a:prstGeom prst="rect">
             <a:avLst/>
@@ -2780,14 +2780,14 @@
       </p:sp>
       <p:sp>
         <p:nvSpPr>
-          <p:cNvPr id="166" name="Text 89"/>
+          <p:cNvPr id="167" name="Text 89"/>
           <p:cNvSpPr/>
           <p:nvPr/>
         </p:nvSpPr>
         <p:spPr>
           <a:xfrm>
             <a:off x="540000" y="388800"/>
-            <a:ext cx="7017840" cy="1048320"/>
+            <a:ext cx="7016760" cy="1047240"/>
           </a:xfrm>
           <a:prstGeom prst="rect">
             <a:avLst/>
@@ -2840,19 +2840,19 @@
       </p:sp>
       <p:pic>
         <p:nvPicPr>
-          <p:cNvPr id="167" name="" descr=""/>
+          <p:cNvPr id="168" name="" descr=""/>
           <p:cNvPicPr/>
           <p:nvPr/>
         </p:nvPicPr>
         <p:blipFill>
           <a:blip r:embed="rId1"/>
-          <a:srcRect l="0" t="26241" r="0" b="23016"/>
+          <a:srcRect l="0" t="26247" r="0" b="23016"/>
           <a:stretch/>
         </p:blipFill>
         <p:spPr>
           <a:xfrm>
             <a:off x="10038240" y="288360"/>
-            <a:ext cx="1946880" cy="536760"/>
+            <a:ext cx="1945800" cy="535680"/>
           </a:xfrm>
           <a:prstGeom prst="rect">
             <a:avLst/>
@@ -2864,14 +2864,14 @@
       </p:pic>
       <p:sp>
         <p:nvSpPr>
-          <p:cNvPr id="168" name="Shape 152"/>
+          <p:cNvPr id="169" name="Shape 152"/>
           <p:cNvSpPr/>
           <p:nvPr/>
         </p:nvSpPr>
         <p:spPr>
           <a:xfrm>
             <a:off x="612000" y="1936080"/>
-            <a:ext cx="10725120" cy="942120"/>
+            <a:ext cx="10724040" cy="941040"/>
           </a:xfrm>
           <a:prstGeom prst="roundRect">
             <a:avLst>
@@ -2918,7 +2918,7 @@
                 <a:latin typeface="Arial"/>
                 <a:ea typeface="Microsoft YaHei"/>
               </a:rPr>
-              <a:t>- Las ausencias tienen una duración promedio de unas </a:t>
+              <a:t>- Las ausencias tienen una duración mediana de unas </a:t>
             </a:r>
             <a:r>
               <a:rPr b="1" lang="es-ES" sz="1500" spc="-1" strike="noStrike">
@@ -3079,14 +3079,14 @@
       </p:sp>
       <p:sp>
         <p:nvSpPr>
-          <p:cNvPr id="169" name="Text 91"/>
+          <p:cNvPr id="170" name="Text 91"/>
           <p:cNvSpPr/>
           <p:nvPr/>
         </p:nvSpPr>
         <p:spPr>
           <a:xfrm>
             <a:off x="168120" y="6538320"/>
-            <a:ext cx="2997000" cy="316800"/>
+            <a:ext cx="2995920" cy="315720"/>
           </a:xfrm>
           <a:prstGeom prst="rect">
             <a:avLst/>
@@ -3133,14 +3133,14 @@
       </p:sp>
       <p:sp>
         <p:nvSpPr>
-          <p:cNvPr id="170" name=""/>
+          <p:cNvPr id="171" name=""/>
           <p:cNvSpPr/>
           <p:nvPr/>
         </p:nvSpPr>
         <p:spPr>
           <a:xfrm>
             <a:off x="648000" y="1584000"/>
-            <a:ext cx="3237120" cy="313200"/>
+            <a:ext cx="3236040" cy="312120"/>
           </a:xfrm>
           <a:prstGeom prst="rect">
             <a:avLst/>
@@ -3187,14 +3187,14 @@
       </p:sp>
       <p:sp>
         <p:nvSpPr>
-          <p:cNvPr id="171" name=""/>
+          <p:cNvPr id="172" name=""/>
           <p:cNvSpPr/>
           <p:nvPr/>
         </p:nvSpPr>
         <p:spPr>
           <a:xfrm>
             <a:off x="560880" y="971280"/>
-            <a:ext cx="9474480" cy="285840"/>
+            <a:ext cx="9473400" cy="284760"/>
           </a:xfrm>
           <a:prstGeom prst="rect">
             <a:avLst/>
@@ -3247,14 +3247,14 @@
       </p:sp>
       <p:sp>
         <p:nvSpPr>
-          <p:cNvPr id="172" name=""/>
+          <p:cNvPr id="173" name=""/>
           <p:cNvSpPr/>
           <p:nvPr/>
         </p:nvSpPr>
         <p:spPr>
           <a:xfrm rot="21590400">
-            <a:off x="864000" y="1875600"/>
-            <a:ext cx="10468440" cy="1722240"/>
+            <a:off x="862920" y="1875600"/>
+            <a:ext cx="10467360" cy="1721160"/>
           </a:xfrm>
           <a:prstGeom prst="rect">
             <a:avLst/>
@@ -3362,14 +3362,14 @@
       </p:sp>
       <p:sp>
         <p:nvSpPr>
-          <p:cNvPr id="173" name=""/>
+          <p:cNvPr id="174" name=""/>
           <p:cNvSpPr/>
           <p:nvPr/>
         </p:nvSpPr>
         <p:spPr>
           <a:xfrm>
             <a:off x="648000" y="3672000"/>
-            <a:ext cx="3237120" cy="313200"/>
+            <a:ext cx="3236040" cy="312120"/>
           </a:xfrm>
           <a:prstGeom prst="rect">
             <a:avLst/>
@@ -3422,14 +3422,14 @@
       </p:sp>
       <p:sp>
         <p:nvSpPr>
-          <p:cNvPr id="174" name="Shape 153"/>
+          <p:cNvPr id="175" name="Shape 153"/>
           <p:cNvSpPr/>
           <p:nvPr/>
         </p:nvSpPr>
         <p:spPr>
           <a:xfrm>
             <a:off x="612000" y="3995640"/>
-            <a:ext cx="10725120" cy="682560"/>
+            <a:ext cx="10724040" cy="681480"/>
           </a:xfrm>
           <a:prstGeom prst="roundRect">
             <a:avLst>
@@ -3548,14 +3548,14 @@
       </p:sp>
       <p:sp>
         <p:nvSpPr>
-          <p:cNvPr id="175" name="Text 45"/>
+          <p:cNvPr id="176" name="Text 45"/>
           <p:cNvSpPr/>
           <p:nvPr/>
         </p:nvSpPr>
         <p:spPr>
           <a:xfrm>
             <a:off x="2742840" y="6538320"/>
-            <a:ext cx="1395720" cy="316800"/>
+            <a:ext cx="1394640" cy="315720"/>
           </a:xfrm>
           <a:prstGeom prst="rect">
             <a:avLst/>
@@ -3602,14 +3602,14 @@
       </p:sp>
       <p:sp>
         <p:nvSpPr>
-          <p:cNvPr id="176" name="Text 90"/>
+          <p:cNvPr id="177" name="Text 90"/>
           <p:cNvSpPr/>
           <p:nvPr/>
         </p:nvSpPr>
         <p:spPr>
           <a:xfrm>
             <a:off x="11412000" y="6538320"/>
-            <a:ext cx="754560" cy="316800"/>
+            <a:ext cx="753480" cy="315720"/>
           </a:xfrm>
           <a:prstGeom prst="rect">
             <a:avLst/>
@@ -3693,14 +3693,14 @@
       </p:grpSpPr>
       <p:sp>
         <p:nvSpPr>
-          <p:cNvPr id="177" name="Shape 2"/>
+          <p:cNvPr id="178" name="Shape 2"/>
           <p:cNvSpPr/>
           <p:nvPr/>
         </p:nvSpPr>
         <p:spPr>
           <a:xfrm>
             <a:off x="0" y="0"/>
-            <a:ext cx="12188520" cy="161280"/>
+            <a:ext cx="12187440" cy="160200"/>
           </a:xfrm>
           <a:prstGeom prst="rect">
             <a:avLst/>
@@ -3740,14 +3740,14 @@
       </p:sp>
       <p:sp>
         <p:nvSpPr>
-          <p:cNvPr id="178" name="Shape 8"/>
+          <p:cNvPr id="179" name="Shape 8"/>
           <p:cNvSpPr/>
           <p:nvPr/>
         </p:nvSpPr>
         <p:spPr>
           <a:xfrm>
             <a:off x="0" y="6510600"/>
-            <a:ext cx="12188520" cy="362520"/>
+            <a:ext cx="12187440" cy="361440"/>
           </a:xfrm>
           <a:prstGeom prst="rect">
             <a:avLst/>
@@ -3787,14 +3787,14 @@
       </p:sp>
       <p:sp>
         <p:nvSpPr>
-          <p:cNvPr id="179" name="Text 2"/>
+          <p:cNvPr id="180" name="Text 2"/>
           <p:cNvSpPr/>
           <p:nvPr/>
         </p:nvSpPr>
         <p:spPr>
           <a:xfrm>
             <a:off x="540000" y="388800"/>
-            <a:ext cx="7017840" cy="1048320"/>
+            <a:ext cx="7016760" cy="1047240"/>
           </a:xfrm>
           <a:prstGeom prst="rect">
             <a:avLst/>
@@ -3847,19 +3847,19 @@
       </p:sp>
       <p:pic>
         <p:nvPicPr>
-          <p:cNvPr id="180" name="" descr=""/>
+          <p:cNvPr id="181" name="" descr=""/>
           <p:cNvPicPr/>
           <p:nvPr/>
         </p:nvPicPr>
         <p:blipFill>
           <a:blip r:embed="rId1"/>
-          <a:srcRect l="0" t="26241" r="0" b="23016"/>
+          <a:srcRect l="0" t="26247" r="0" b="23016"/>
           <a:stretch/>
         </p:blipFill>
         <p:spPr>
           <a:xfrm>
             <a:off x="10038240" y="288360"/>
-            <a:ext cx="1946880" cy="536760"/>
+            <a:ext cx="1945800" cy="535680"/>
           </a:xfrm>
           <a:prstGeom prst="rect">
             <a:avLst/>
@@ -3871,14 +3871,14 @@
       </p:pic>
       <p:sp>
         <p:nvSpPr>
-          <p:cNvPr id="181" name="Shape 10"/>
+          <p:cNvPr id="182" name="Shape 10"/>
           <p:cNvSpPr/>
           <p:nvPr/>
         </p:nvSpPr>
         <p:spPr>
           <a:xfrm>
             <a:off x="612000" y="1936080"/>
-            <a:ext cx="10725120" cy="1842120"/>
+            <a:ext cx="10724040" cy="1841040"/>
           </a:xfrm>
           <a:prstGeom prst="roundRect">
             <a:avLst>
@@ -4006,7 +4006,7 @@
                 <a:latin typeface="Arial"/>
                 <a:ea typeface="Microsoft YaHei"/>
               </a:rPr>
-              <a:t>- Campañas preventivas de salud, talleres higienen postural y prevención de riesgos laborales. </a:t>
+              <a:t>- Campañas preventivas de salud, talleres higiene postural y prevención de riesgos laborales. </a:t>
             </a:r>
             <a:r>
               <a:rPr b="0" lang="es-ES" sz="1800" spc="-1" strike="noStrike">
@@ -4029,14 +4029,14 @@
       </p:sp>
       <p:sp>
         <p:nvSpPr>
-          <p:cNvPr id="182" name="Text 8"/>
+          <p:cNvPr id="183" name="Text 8"/>
           <p:cNvSpPr/>
           <p:nvPr/>
         </p:nvSpPr>
         <p:spPr>
           <a:xfrm>
             <a:off x="168120" y="6538320"/>
-            <a:ext cx="2997000" cy="316800"/>
+            <a:ext cx="2995920" cy="315720"/>
           </a:xfrm>
           <a:prstGeom prst="rect">
             <a:avLst/>
@@ -4083,14 +4083,14 @@
       </p:sp>
       <p:sp>
         <p:nvSpPr>
-          <p:cNvPr id="183" name=""/>
+          <p:cNvPr id="184" name=""/>
           <p:cNvSpPr/>
           <p:nvPr/>
         </p:nvSpPr>
         <p:spPr>
           <a:xfrm>
             <a:off x="648000" y="1584000"/>
-            <a:ext cx="3237120" cy="313200"/>
+            <a:ext cx="3236040" cy="312120"/>
           </a:xfrm>
           <a:prstGeom prst="rect">
             <a:avLst/>
@@ -4137,14 +4137,14 @@
       </p:sp>
       <p:sp>
         <p:nvSpPr>
-          <p:cNvPr id="184" name=""/>
+          <p:cNvPr id="185" name=""/>
           <p:cNvSpPr/>
           <p:nvPr/>
         </p:nvSpPr>
         <p:spPr>
           <a:xfrm>
             <a:off x="560880" y="971280"/>
-            <a:ext cx="9474480" cy="285840"/>
+            <a:ext cx="9473400" cy="284760"/>
           </a:xfrm>
           <a:prstGeom prst="rect">
             <a:avLst/>
@@ -4197,14 +4197,14 @@
       </p:sp>
       <p:sp>
         <p:nvSpPr>
-          <p:cNvPr id="185" name=""/>
+          <p:cNvPr id="186" name=""/>
           <p:cNvSpPr/>
           <p:nvPr/>
         </p:nvSpPr>
         <p:spPr>
           <a:xfrm rot="21590400">
-            <a:off x="864000" y="1875600"/>
-            <a:ext cx="10468440" cy="1722240"/>
+            <a:off x="862920" y="1875600"/>
+            <a:ext cx="10467360" cy="1721160"/>
           </a:xfrm>
           <a:prstGeom prst="rect">
             <a:avLst/>
@@ -4312,14 +4312,14 @@
       </p:sp>
       <p:sp>
         <p:nvSpPr>
-          <p:cNvPr id="186" name=""/>
+          <p:cNvPr id="187" name=""/>
           <p:cNvSpPr/>
           <p:nvPr/>
         </p:nvSpPr>
         <p:spPr>
           <a:xfrm>
             <a:off x="648000" y="4104000"/>
-            <a:ext cx="3237120" cy="313200"/>
+            <a:ext cx="3236040" cy="312120"/>
           </a:xfrm>
           <a:prstGeom prst="rect">
             <a:avLst/>
@@ -4372,14 +4372,14 @@
       </p:sp>
       <p:sp>
         <p:nvSpPr>
-          <p:cNvPr id="187" name="Shape 11"/>
+          <p:cNvPr id="188" name="Shape 11"/>
           <p:cNvSpPr/>
           <p:nvPr/>
         </p:nvSpPr>
         <p:spPr>
           <a:xfrm>
             <a:off x="612000" y="4427640"/>
-            <a:ext cx="10725120" cy="1222560"/>
+            <a:ext cx="10724040" cy="1221480"/>
           </a:xfrm>
           <a:prstGeom prst="roundRect">
             <a:avLst>
@@ -4506,14 +4506,14 @@
       </p:sp>
       <p:sp>
         <p:nvSpPr>
-          <p:cNvPr id="188" name="Text 93"/>
+          <p:cNvPr id="189" name="Text 93"/>
           <p:cNvSpPr/>
           <p:nvPr/>
         </p:nvSpPr>
         <p:spPr>
           <a:xfrm>
             <a:off x="2742840" y="6538320"/>
-            <a:ext cx="1395720" cy="316800"/>
+            <a:ext cx="1394640" cy="315720"/>
           </a:xfrm>
           <a:prstGeom prst="rect">
             <a:avLst/>
@@ -4560,14 +4560,14 @@
       </p:sp>
       <p:sp>
         <p:nvSpPr>
-          <p:cNvPr id="189" name="Text 5"/>
+          <p:cNvPr id="190" name="Text 5"/>
           <p:cNvSpPr/>
           <p:nvPr/>
         </p:nvSpPr>
         <p:spPr>
           <a:xfrm>
             <a:off x="11412000" y="6538320"/>
-            <a:ext cx="754560" cy="316800"/>
+            <a:ext cx="753480" cy="315720"/>
           </a:xfrm>
           <a:prstGeom prst="rect">
             <a:avLst/>
@@ -4651,14 +4651,14 @@
       </p:grpSpPr>
       <p:sp>
         <p:nvSpPr>
-          <p:cNvPr id="190" name="Shape 9"/>
+          <p:cNvPr id="191" name="Shape 9"/>
           <p:cNvSpPr/>
           <p:nvPr/>
         </p:nvSpPr>
         <p:spPr>
           <a:xfrm>
             <a:off x="0" y="0"/>
-            <a:ext cx="12188520" cy="161280"/>
+            <a:ext cx="12187440" cy="160200"/>
           </a:xfrm>
           <a:prstGeom prst="rect">
             <a:avLst/>
@@ -4698,14 +4698,14 @@
       </p:sp>
       <p:sp>
         <p:nvSpPr>
-          <p:cNvPr id="191" name="Shape 20"/>
+          <p:cNvPr id="192" name="Shape 20"/>
           <p:cNvSpPr/>
           <p:nvPr/>
         </p:nvSpPr>
         <p:spPr>
           <a:xfrm>
             <a:off x="0" y="6510600"/>
-            <a:ext cx="12188520" cy="362520"/>
+            <a:ext cx="12187440" cy="361440"/>
           </a:xfrm>
           <a:prstGeom prst="rect">
             <a:avLst/>
@@ -4745,14 +4745,14 @@
       </p:sp>
       <p:sp>
         <p:nvSpPr>
-          <p:cNvPr id="192" name="Text 1"/>
+          <p:cNvPr id="193" name="Text 1"/>
           <p:cNvSpPr/>
           <p:nvPr/>
         </p:nvSpPr>
         <p:spPr>
           <a:xfrm>
             <a:off x="540000" y="388800"/>
-            <a:ext cx="6717600" cy="1048320"/>
+            <a:ext cx="6716520" cy="1047240"/>
           </a:xfrm>
           <a:prstGeom prst="rect">
             <a:avLst/>
@@ -4805,19 +4805,19 @@
       </p:sp>
       <p:pic>
         <p:nvPicPr>
-          <p:cNvPr id="193" name="" descr=""/>
+          <p:cNvPr id="194" name="" descr=""/>
           <p:cNvPicPr/>
           <p:nvPr/>
         </p:nvPicPr>
         <p:blipFill>
           <a:blip r:embed="rId1"/>
-          <a:srcRect l="0" t="26241" r="0" b="23016"/>
+          <a:srcRect l="0" t="26247" r="0" b="23016"/>
           <a:stretch/>
         </p:blipFill>
         <p:spPr>
           <a:xfrm>
             <a:off x="10038240" y="288360"/>
-            <a:ext cx="1946880" cy="536760"/>
+            <a:ext cx="1945800" cy="535680"/>
           </a:xfrm>
           <a:prstGeom prst="rect">
             <a:avLst/>
@@ -4829,14 +4829,14 @@
       </p:pic>
       <p:sp>
         <p:nvSpPr>
-          <p:cNvPr id="194" name="Shape 21"/>
+          <p:cNvPr id="195" name="Shape 21"/>
           <p:cNvSpPr/>
           <p:nvPr/>
         </p:nvSpPr>
         <p:spPr>
           <a:xfrm>
             <a:off x="612000" y="1756080"/>
-            <a:ext cx="3345120" cy="4361040"/>
+            <a:ext cx="3344040" cy="4359960"/>
           </a:xfrm>
           <a:prstGeom prst="roundRect">
             <a:avLst>
@@ -4903,14 +4903,14 @@
       </p:sp>
       <p:sp>
         <p:nvSpPr>
-          <p:cNvPr id="195" name="Text 15"/>
+          <p:cNvPr id="196" name="Text 15"/>
           <p:cNvSpPr/>
           <p:nvPr/>
         </p:nvSpPr>
         <p:spPr>
           <a:xfrm>
             <a:off x="168120" y="6538320"/>
-            <a:ext cx="2997000" cy="316800"/>
+            <a:ext cx="2995920" cy="315720"/>
           </a:xfrm>
           <a:prstGeom prst="rect">
             <a:avLst/>
@@ -4957,14 +4957,14 @@
       </p:sp>
       <p:sp>
         <p:nvSpPr>
-          <p:cNvPr id="196" name=""/>
+          <p:cNvPr id="197" name=""/>
           <p:cNvSpPr/>
           <p:nvPr/>
         </p:nvSpPr>
         <p:spPr>
           <a:xfrm>
             <a:off x="504000" y="1440000"/>
-            <a:ext cx="3237120" cy="313200"/>
+            <a:ext cx="3236040" cy="312120"/>
           </a:xfrm>
           <a:prstGeom prst="rect">
             <a:avLst/>
@@ -5011,14 +5011,14 @@
       </p:sp>
       <p:sp>
         <p:nvSpPr>
-          <p:cNvPr id="197" name=""/>
+          <p:cNvPr id="198" name=""/>
           <p:cNvSpPr/>
           <p:nvPr/>
         </p:nvSpPr>
         <p:spPr>
           <a:xfrm>
             <a:off x="560880" y="971280"/>
-            <a:ext cx="9474480" cy="285840"/>
+            <a:ext cx="9473400" cy="284760"/>
           </a:xfrm>
           <a:prstGeom prst="rect">
             <a:avLst/>
@@ -5071,14 +5071,14 @@
       </p:sp>
       <p:sp>
         <p:nvSpPr>
-          <p:cNvPr id="198" name=""/>
+          <p:cNvPr id="199" name=""/>
           <p:cNvSpPr/>
           <p:nvPr/>
         </p:nvSpPr>
         <p:spPr>
           <a:xfrm rot="21590400">
             <a:off x="869400" y="1886760"/>
-            <a:ext cx="2553120" cy="3938760"/>
+            <a:ext cx="2552040" cy="3937680"/>
           </a:xfrm>
           <a:prstGeom prst="rect">
             <a:avLst/>
@@ -5537,14 +5537,14 @@
       </p:sp>
       <p:sp>
         <p:nvSpPr>
-          <p:cNvPr id="199" name=""/>
+          <p:cNvPr id="200" name=""/>
           <p:cNvSpPr/>
           <p:nvPr/>
         </p:nvSpPr>
         <p:spPr>
           <a:xfrm>
             <a:off x="4212000" y="1440000"/>
-            <a:ext cx="2373120" cy="313200"/>
+            <a:ext cx="2372040" cy="312120"/>
           </a:xfrm>
           <a:prstGeom prst="rect">
             <a:avLst/>
@@ -5591,14 +5591,14 @@
       </p:sp>
       <p:sp>
         <p:nvSpPr>
-          <p:cNvPr id="200" name="Shape 22"/>
+          <p:cNvPr id="201" name="Shape 22"/>
           <p:cNvSpPr/>
           <p:nvPr/>
         </p:nvSpPr>
         <p:spPr>
           <a:xfrm>
             <a:off x="4320000" y="1756440"/>
-            <a:ext cx="7737120" cy="4361040"/>
+            <a:ext cx="7736040" cy="4359960"/>
           </a:xfrm>
           <a:prstGeom prst="roundRect">
             <a:avLst>
@@ -5665,7 +5665,7 @@
       </p:sp>
       <p:sp>
         <p:nvSpPr>
-          <p:cNvPr id="201" name="forma_edad">
+          <p:cNvPr id="202" name="forma_edad">
             <a:hlinkClick r:id="rId2" action="ppaction://hlinksldjump"/>
           </p:cNvPr>
           <p:cNvSpPr/>
@@ -5674,7 +5674,7 @@
         <p:spPr>
           <a:xfrm>
             <a:off x="4320000" y="1872000"/>
-            <a:ext cx="1077120" cy="357120"/>
+            <a:ext cx="1076040" cy="356040"/>
           </a:xfrm>
           <a:prstGeom prst="roundRect">
             <a:avLst>
@@ -5751,7 +5751,7 @@
       </p:sp>
       <p:pic>
         <p:nvPicPr>
-          <p:cNvPr id="202" name="" descr=""/>
+          <p:cNvPr id="203" name="" descr=""/>
           <p:cNvPicPr/>
           <p:nvPr/>
         </p:nvPicPr>
@@ -5763,7 +5763,7 @@
         <p:spPr>
           <a:xfrm>
             <a:off x="7200000" y="2556000"/>
-            <a:ext cx="2481120" cy="2481120"/>
+            <a:ext cx="2480040" cy="2480040"/>
           </a:xfrm>
           <a:prstGeom prst="rect">
             <a:avLst/>
@@ -5775,7 +5775,7 @@
       </p:pic>
       <p:pic>
         <p:nvPicPr>
-          <p:cNvPr id="203" name="" descr=""/>
+          <p:cNvPr id="204" name="" descr=""/>
           <p:cNvPicPr/>
           <p:nvPr/>
         </p:nvPicPr>
@@ -5786,7 +5786,7 @@
         <p:spPr>
           <a:xfrm>
             <a:off x="-36000" y="5624640"/>
-            <a:ext cx="1383120" cy="852840"/>
+            <a:ext cx="1382040" cy="851760"/>
           </a:xfrm>
           <a:prstGeom prst="rect">
             <a:avLst/>
@@ -5798,7 +5798,7 @@
       </p:pic>
       <p:sp>
         <p:nvSpPr>
-          <p:cNvPr id="204" name="boton_educativo">
+          <p:cNvPr id="205" name="boton_educativo">
             <a:hlinkClick r:id="rId5" action="ppaction://hlinksldjump"/>
           </p:cNvPr>
           <p:cNvSpPr/>
@@ -5807,7 +5807,7 @@
         <p:spPr>
           <a:xfrm>
             <a:off x="4320360" y="2224800"/>
-            <a:ext cx="1076760" cy="357120"/>
+            <a:ext cx="1075680" cy="356040"/>
           </a:xfrm>
           <a:prstGeom prst="roundRect">
             <a:avLst>
@@ -5884,7 +5884,7 @@
       </p:sp>
       <p:sp>
         <p:nvSpPr>
-          <p:cNvPr id="205" name="Shape 34">
+          <p:cNvPr id="206" name="Shape 34">
             <a:hlinkClick r:id="rId6" action="ppaction://hlinksldjump"/>
           </p:cNvPr>
           <p:cNvSpPr/>
@@ -5893,7 +5893,7 @@
         <p:spPr>
           <a:xfrm>
             <a:off x="4320720" y="2577600"/>
-            <a:ext cx="1076400" cy="357120"/>
+            <a:ext cx="1075320" cy="356040"/>
           </a:xfrm>
           <a:prstGeom prst="roundRect">
             <a:avLst>
@@ -5970,7 +5970,7 @@
       </p:sp>
       <p:sp>
         <p:nvSpPr>
-          <p:cNvPr id="206" name="Shape 35">
+          <p:cNvPr id="207" name="Shape 35">
             <a:hlinkClick r:id="rId7" action="ppaction://hlinksldjump"/>
           </p:cNvPr>
           <p:cNvSpPr/>
@@ -5979,7 +5979,7 @@
         <p:spPr>
           <a:xfrm>
             <a:off x="4321080" y="2930400"/>
-            <a:ext cx="1076400" cy="357120"/>
+            <a:ext cx="1075320" cy="356040"/>
           </a:xfrm>
           <a:prstGeom prst="roundRect">
             <a:avLst>
@@ -6056,7 +6056,7 @@
       </p:sp>
       <p:sp>
         <p:nvSpPr>
-          <p:cNvPr id="207" name="Shape 36">
+          <p:cNvPr id="208" name="Shape 36">
             <a:hlinkClick r:id="rId8" action="ppaction://hlinksldjump"/>
           </p:cNvPr>
           <p:cNvSpPr/>
@@ -6065,7 +6065,7 @@
         <p:spPr>
           <a:xfrm>
             <a:off x="4321440" y="3283200"/>
-            <a:ext cx="1076400" cy="565920"/>
+            <a:ext cx="1075320" cy="564840"/>
           </a:xfrm>
           <a:prstGeom prst="roundRect">
             <a:avLst>
@@ -6177,7 +6177,7 @@
       </p:sp>
       <p:sp>
         <p:nvSpPr>
-          <p:cNvPr id="208" name="Shape 37">
+          <p:cNvPr id="209" name="Shape 37">
             <a:hlinkClick r:id="rId9" action="ppaction://hlinksldjump"/>
           </p:cNvPr>
           <p:cNvSpPr/>
@@ -6186,7 +6186,7 @@
         <p:spPr>
           <a:xfrm>
             <a:off x="4321440" y="3859200"/>
-            <a:ext cx="1076400" cy="357120"/>
+            <a:ext cx="1075320" cy="356040"/>
           </a:xfrm>
           <a:prstGeom prst="roundRect">
             <a:avLst>
@@ -6263,7 +6263,7 @@
       </p:sp>
       <p:sp>
         <p:nvSpPr>
-          <p:cNvPr id="209" name="Shape 38">
+          <p:cNvPr id="210" name="Shape 38">
             <a:hlinkClick r:id="rId10" action="ppaction://hlinksldjump"/>
           </p:cNvPr>
           <p:cNvSpPr/>
@@ -6272,7 +6272,7 @@
         <p:spPr>
           <a:xfrm>
             <a:off x="4321800" y="4212000"/>
-            <a:ext cx="1076400" cy="537120"/>
+            <a:ext cx="1075320" cy="536040"/>
           </a:xfrm>
           <a:prstGeom prst="roundRect">
             <a:avLst>
@@ -6349,7 +6349,7 @@
       </p:sp>
       <p:sp>
         <p:nvSpPr>
-          <p:cNvPr id="210" name="Shape 39">
+          <p:cNvPr id="211" name="Shape 39">
             <a:hlinkClick r:id="rId11" action="ppaction://hlinksldjump"/>
           </p:cNvPr>
           <p:cNvSpPr/>
@@ -6358,7 +6358,7 @@
         <p:spPr>
           <a:xfrm>
             <a:off x="4322160" y="4761360"/>
-            <a:ext cx="1076400" cy="537120"/>
+            <a:ext cx="1075320" cy="536040"/>
           </a:xfrm>
           <a:prstGeom prst="roundRect">
             <a:avLst>
@@ -6435,14 +6435,14 @@
       </p:sp>
       <p:sp>
         <p:nvSpPr>
-          <p:cNvPr id="211" name="Text 3"/>
+          <p:cNvPr id="212" name="Text 3"/>
           <p:cNvSpPr/>
           <p:nvPr/>
         </p:nvSpPr>
         <p:spPr>
           <a:xfrm>
             <a:off x="11412000" y="6538320"/>
-            <a:ext cx="754560" cy="316800"/>
+            <a:ext cx="753480" cy="315720"/>
           </a:xfrm>
           <a:prstGeom prst="rect">
             <a:avLst/>
@@ -6489,14 +6489,14 @@
       </p:sp>
       <p:sp>
         <p:nvSpPr>
-          <p:cNvPr id="212" name="Text 92"/>
+          <p:cNvPr id="213" name="Text 92"/>
           <p:cNvSpPr/>
           <p:nvPr/>
         </p:nvSpPr>
         <p:spPr>
           <a:xfrm>
             <a:off x="2742840" y="6538320"/>
-            <a:ext cx="1395720" cy="316800"/>
+            <a:ext cx="1394640" cy="315720"/>
           </a:xfrm>
           <a:prstGeom prst="rect">
             <a:avLst/>
@@ -6580,14 +6580,14 @@
       </p:grpSpPr>
       <p:sp>
         <p:nvSpPr>
-          <p:cNvPr id="213" name="Shape 33"/>
+          <p:cNvPr id="214" name="Shape 33"/>
           <p:cNvSpPr/>
           <p:nvPr/>
         </p:nvSpPr>
         <p:spPr>
           <a:xfrm>
             <a:off x="0" y="0"/>
-            <a:ext cx="12188520" cy="161280"/>
+            <a:ext cx="12187440" cy="160200"/>
           </a:xfrm>
           <a:prstGeom prst="rect">
             <a:avLst/>
@@ -6627,14 +6627,14 @@
       </p:sp>
       <p:sp>
         <p:nvSpPr>
-          <p:cNvPr id="214" name="Shape 40"/>
+          <p:cNvPr id="215" name="Shape 40"/>
           <p:cNvSpPr/>
           <p:nvPr/>
         </p:nvSpPr>
         <p:spPr>
           <a:xfrm>
             <a:off x="0" y="6510600"/>
-            <a:ext cx="12188520" cy="362520"/>
+            <a:ext cx="12187440" cy="361440"/>
           </a:xfrm>
           <a:prstGeom prst="rect">
             <a:avLst/>
@@ -6674,14 +6674,14 @@
       </p:sp>
       <p:sp>
         <p:nvSpPr>
-          <p:cNvPr id="215" name="Text 29"/>
+          <p:cNvPr id="216" name="Text 29"/>
           <p:cNvSpPr/>
           <p:nvPr/>
         </p:nvSpPr>
         <p:spPr>
           <a:xfrm>
             <a:off x="540000" y="388800"/>
-            <a:ext cx="6717600" cy="1048320"/>
+            <a:ext cx="6716520" cy="1047240"/>
           </a:xfrm>
           <a:prstGeom prst="rect">
             <a:avLst/>
@@ -6734,19 +6734,19 @@
       </p:sp>
       <p:pic>
         <p:nvPicPr>
-          <p:cNvPr id="216" name="" descr=""/>
+          <p:cNvPr id="217" name="" descr=""/>
           <p:cNvPicPr/>
           <p:nvPr/>
         </p:nvPicPr>
         <p:blipFill>
           <a:blip r:embed="rId1"/>
-          <a:srcRect l="0" t="26241" r="0" b="23016"/>
+          <a:srcRect l="0" t="26247" r="0" b="23016"/>
           <a:stretch/>
         </p:blipFill>
         <p:spPr>
           <a:xfrm>
             <a:off x="10038240" y="288360"/>
-            <a:ext cx="1946880" cy="536760"/>
+            <a:ext cx="1945800" cy="535680"/>
           </a:xfrm>
           <a:prstGeom prst="rect">
             <a:avLst/>
@@ -6758,14 +6758,14 @@
       </p:pic>
       <p:sp>
         <p:nvSpPr>
-          <p:cNvPr id="217" name="Shape 41"/>
+          <p:cNvPr id="218" name="Shape 41"/>
           <p:cNvSpPr/>
           <p:nvPr/>
         </p:nvSpPr>
         <p:spPr>
           <a:xfrm>
             <a:off x="612000" y="1756080"/>
-            <a:ext cx="3345120" cy="4361040"/>
+            <a:ext cx="3344040" cy="4359960"/>
           </a:xfrm>
           <a:prstGeom prst="roundRect">
             <a:avLst>
@@ -6832,14 +6832,14 @@
       </p:sp>
       <p:sp>
         <p:nvSpPr>
-          <p:cNvPr id="218" name="Text 37"/>
+          <p:cNvPr id="219" name="Text 37"/>
           <p:cNvSpPr/>
           <p:nvPr/>
         </p:nvSpPr>
         <p:spPr>
           <a:xfrm>
             <a:off x="168120" y="6538320"/>
-            <a:ext cx="2997000" cy="316800"/>
+            <a:ext cx="2995920" cy="315720"/>
           </a:xfrm>
           <a:prstGeom prst="rect">
             <a:avLst/>
@@ -6886,14 +6886,14 @@
       </p:sp>
       <p:sp>
         <p:nvSpPr>
-          <p:cNvPr id="219" name=""/>
+          <p:cNvPr id="220" name=""/>
           <p:cNvSpPr/>
           <p:nvPr/>
         </p:nvSpPr>
         <p:spPr>
           <a:xfrm>
             <a:off x="560880" y="971280"/>
-            <a:ext cx="9474480" cy="285840"/>
+            <a:ext cx="9473400" cy="284760"/>
           </a:xfrm>
           <a:prstGeom prst="rect">
             <a:avLst/>
@@ -6946,14 +6946,14 @@
       </p:sp>
       <p:sp>
         <p:nvSpPr>
-          <p:cNvPr id="220" name=""/>
+          <p:cNvPr id="221" name=""/>
           <p:cNvSpPr/>
           <p:nvPr/>
         </p:nvSpPr>
         <p:spPr>
           <a:xfrm rot="21590400">
             <a:off x="869400" y="1886760"/>
-            <a:ext cx="2553120" cy="3938760"/>
+            <a:ext cx="2552040" cy="3937680"/>
           </a:xfrm>
           <a:prstGeom prst="rect">
             <a:avLst/>
@@ -7412,14 +7412,14 @@
       </p:sp>
       <p:sp>
         <p:nvSpPr>
-          <p:cNvPr id="221" name="Shape 42"/>
+          <p:cNvPr id="222" name="Shape 42"/>
           <p:cNvSpPr/>
           <p:nvPr/>
         </p:nvSpPr>
         <p:spPr>
           <a:xfrm>
             <a:off x="4320000" y="1756440"/>
-            <a:ext cx="7737120" cy="4361040"/>
+            <a:ext cx="7736040" cy="4359960"/>
           </a:xfrm>
           <a:prstGeom prst="roundRect">
             <a:avLst>
@@ -7486,7 +7486,7 @@
       </p:sp>
       <p:pic>
         <p:nvPicPr>
-          <p:cNvPr id="222" name="" descr=""/>
+          <p:cNvPr id="223" name="" descr=""/>
           <p:cNvPicPr/>
           <p:nvPr/>
         </p:nvPicPr>
@@ -7498,7 +7498,7 @@
         <p:spPr>
           <a:xfrm>
             <a:off x="4140000" y="5710320"/>
-            <a:ext cx="681120" cy="681120"/>
+            <a:ext cx="680040" cy="680040"/>
           </a:xfrm>
           <a:prstGeom prst="rect">
             <a:avLst/>
@@ -7510,7 +7510,7 @@
       </p:pic>
       <p:pic>
         <p:nvPicPr>
-          <p:cNvPr id="223" name="" descr=""/>
+          <p:cNvPr id="224" name="" descr=""/>
           <p:cNvPicPr/>
           <p:nvPr/>
         </p:nvPicPr>
@@ -7521,7 +7521,7 @@
         <p:spPr>
           <a:xfrm>
             <a:off x="-36000" y="5624640"/>
-            <a:ext cx="1383120" cy="852840"/>
+            <a:ext cx="1382040" cy="851760"/>
           </a:xfrm>
           <a:prstGeom prst="rect">
             <a:avLst/>
@@ -7533,7 +7533,7 @@
       </p:pic>
       <p:pic>
         <p:nvPicPr>
-          <p:cNvPr id="224" name="" descr=""/>
+          <p:cNvPr id="225" name="" descr=""/>
           <p:cNvPicPr/>
           <p:nvPr/>
         </p:nvPicPr>
@@ -7544,7 +7544,7 @@
         <p:spPr>
           <a:xfrm>
             <a:off x="5714640" y="2412000"/>
-            <a:ext cx="6306480" cy="3106080"/>
+            <a:ext cx="6305400" cy="3105000"/>
           </a:xfrm>
           <a:prstGeom prst="rect">
             <a:avLst/>
@@ -7556,7 +7556,7 @@
       </p:pic>
       <p:sp>
         <p:nvSpPr>
-          <p:cNvPr id="225" name="forma_edad 2">
+          <p:cNvPr id="226" name="forma_edad 2">
             <a:hlinkClick r:id="rId5" action="ppaction://hlinksldjump"/>
           </p:cNvPr>
           <p:cNvSpPr/>
@@ -7565,7 +7565,7 @@
         <p:spPr>
           <a:xfrm>
             <a:off x="4320360" y="1878480"/>
-            <a:ext cx="1077120" cy="357120"/>
+            <a:ext cx="1076040" cy="356040"/>
           </a:xfrm>
           <a:prstGeom prst="roundRect">
             <a:avLst>
@@ -7642,7 +7642,7 @@
       </p:sp>
       <p:sp>
         <p:nvSpPr>
-          <p:cNvPr id="226" name="boton_educativo 2">
+          <p:cNvPr id="227" name="boton_educativo 2">
             <a:hlinkClick r:id="rId6" action="ppaction://hlinksldjump"/>
           </p:cNvPr>
           <p:cNvSpPr/>
@@ -7651,7 +7651,7 @@
         <p:spPr>
           <a:xfrm>
             <a:off x="4320720" y="2231280"/>
-            <a:ext cx="1076760" cy="357120"/>
+            <a:ext cx="1075680" cy="356040"/>
           </a:xfrm>
           <a:prstGeom prst="roundRect">
             <a:avLst>
@@ -7728,7 +7728,7 @@
       </p:sp>
       <p:sp>
         <p:nvSpPr>
-          <p:cNvPr id="227" name="Shape 43">
+          <p:cNvPr id="228" name="Shape 43">
             <a:hlinkClick r:id="rId7" action="ppaction://hlinksldjump"/>
           </p:cNvPr>
           <p:cNvSpPr/>
@@ -7737,7 +7737,7 @@
         <p:spPr>
           <a:xfrm>
             <a:off x="4321080" y="2584080"/>
-            <a:ext cx="1076400" cy="357120"/>
+            <a:ext cx="1075320" cy="356040"/>
           </a:xfrm>
           <a:prstGeom prst="roundRect">
             <a:avLst>
@@ -7814,7 +7814,7 @@
       </p:sp>
       <p:sp>
         <p:nvSpPr>
-          <p:cNvPr id="228" name="Shape 45">
+          <p:cNvPr id="229" name="Shape 45">
             <a:hlinkClick r:id="rId8" action="ppaction://hlinksldjump"/>
           </p:cNvPr>
           <p:cNvSpPr/>
@@ -7823,7 +7823,7 @@
         <p:spPr>
           <a:xfrm>
             <a:off x="4321440" y="2936880"/>
-            <a:ext cx="1076400" cy="357120"/>
+            <a:ext cx="1075320" cy="356040"/>
           </a:xfrm>
           <a:prstGeom prst="roundRect">
             <a:avLst>
@@ -7900,7 +7900,7 @@
       </p:sp>
       <p:sp>
         <p:nvSpPr>
-          <p:cNvPr id="229" name="Shape 46">
+          <p:cNvPr id="230" name="Shape 46">
             <a:hlinkClick r:id="rId9" action="ppaction://hlinksldjump"/>
           </p:cNvPr>
           <p:cNvSpPr/>
@@ -7909,7 +7909,7 @@
         <p:spPr>
           <a:xfrm>
             <a:off x="4321800" y="3289680"/>
-            <a:ext cx="1076400" cy="565920"/>
+            <a:ext cx="1075320" cy="564840"/>
           </a:xfrm>
           <a:prstGeom prst="roundRect">
             <a:avLst>
@@ -8021,7 +8021,7 @@
       </p:sp>
       <p:sp>
         <p:nvSpPr>
-          <p:cNvPr id="230" name="Shape 47">
+          <p:cNvPr id="231" name="Shape 47">
             <a:hlinkClick r:id="rId10" action="ppaction://hlinksldjump"/>
           </p:cNvPr>
           <p:cNvSpPr/>
@@ -8030,7 +8030,7 @@
         <p:spPr>
           <a:xfrm>
             <a:off x="4321800" y="3829680"/>
-            <a:ext cx="1076400" cy="357120"/>
+            <a:ext cx="1075320" cy="356040"/>
           </a:xfrm>
           <a:prstGeom prst="roundRect">
             <a:avLst>
@@ -8107,7 +8107,7 @@
       </p:sp>
       <p:sp>
         <p:nvSpPr>
-          <p:cNvPr id="231" name="Shape 48">
+          <p:cNvPr id="232" name="Shape 48">
             <a:hlinkClick r:id="rId11" action="ppaction://hlinksldjump"/>
           </p:cNvPr>
           <p:cNvSpPr/>
@@ -8116,7 +8116,7 @@
         <p:spPr>
           <a:xfrm>
             <a:off x="4322160" y="4182480"/>
-            <a:ext cx="1076400" cy="537120"/>
+            <a:ext cx="1075320" cy="536040"/>
           </a:xfrm>
           <a:prstGeom prst="roundRect">
             <a:avLst>
@@ -8193,7 +8193,7 @@
       </p:sp>
       <p:sp>
         <p:nvSpPr>
-          <p:cNvPr id="232" name="Shape 49">
+          <p:cNvPr id="233" name="Shape 49">
             <a:hlinkClick r:id="rId12" action="ppaction://hlinksldjump"/>
           </p:cNvPr>
           <p:cNvSpPr/>
@@ -8202,7 +8202,7 @@
         <p:spPr>
           <a:xfrm>
             <a:off x="4322520" y="4731840"/>
-            <a:ext cx="1076400" cy="537120"/>
+            <a:ext cx="1075320" cy="536040"/>
           </a:xfrm>
           <a:prstGeom prst="roundRect">
             <a:avLst>
@@ -8279,14 +8279,14 @@
       </p:sp>
       <p:sp>
         <p:nvSpPr>
-          <p:cNvPr id="233" name=""/>
+          <p:cNvPr id="234" name=""/>
           <p:cNvSpPr/>
           <p:nvPr/>
         </p:nvSpPr>
         <p:spPr>
           <a:xfrm>
             <a:off x="504000" y="1440000"/>
-            <a:ext cx="3237120" cy="313200"/>
+            <a:ext cx="3236040" cy="312120"/>
           </a:xfrm>
           <a:prstGeom prst="rect">
             <a:avLst/>
@@ -8333,14 +8333,14 @@
       </p:sp>
       <p:sp>
         <p:nvSpPr>
-          <p:cNvPr id="234" name=""/>
+          <p:cNvPr id="235" name=""/>
           <p:cNvSpPr/>
           <p:nvPr/>
         </p:nvSpPr>
         <p:spPr>
           <a:xfrm>
             <a:off x="4212000" y="1440000"/>
-            <a:ext cx="2373120" cy="313200"/>
+            <a:ext cx="2372040" cy="312120"/>
           </a:xfrm>
           <a:prstGeom prst="rect">
             <a:avLst/>
@@ -8387,14 +8387,14 @@
       </p:sp>
       <p:sp>
         <p:nvSpPr>
-          <p:cNvPr id="235" name="Text 10"/>
+          <p:cNvPr id="236" name="Text 10"/>
           <p:cNvSpPr/>
           <p:nvPr/>
         </p:nvSpPr>
         <p:spPr>
           <a:xfrm>
             <a:off x="2742840" y="6538320"/>
-            <a:ext cx="1395720" cy="316800"/>
+            <a:ext cx="1394640" cy="315720"/>
           </a:xfrm>
           <a:prstGeom prst="rect">
             <a:avLst/>
@@ -8441,14 +8441,14 @@
       </p:sp>
       <p:sp>
         <p:nvSpPr>
-          <p:cNvPr id="236" name="Text 36"/>
+          <p:cNvPr id="237" name="Text 36"/>
           <p:cNvSpPr/>
           <p:nvPr/>
         </p:nvSpPr>
         <p:spPr>
           <a:xfrm>
             <a:off x="11412000" y="6538320"/>
-            <a:ext cx="754560" cy="316800"/>
+            <a:ext cx="753480" cy="315720"/>
           </a:xfrm>
           <a:prstGeom prst="rect">
             <a:avLst/>
@@ -8532,14 +8532,14 @@
       </p:grpSpPr>
       <p:sp>
         <p:nvSpPr>
-          <p:cNvPr id="237" name="Shape 23"/>
+          <p:cNvPr id="238" name="Shape 23"/>
           <p:cNvSpPr/>
           <p:nvPr/>
         </p:nvSpPr>
         <p:spPr>
           <a:xfrm>
             <a:off x="0" y="0"/>
-            <a:ext cx="12188520" cy="161280"/>
+            <a:ext cx="12187440" cy="160200"/>
           </a:xfrm>
           <a:prstGeom prst="rect">
             <a:avLst/>
@@ -8579,14 +8579,14 @@
       </p:sp>
       <p:sp>
         <p:nvSpPr>
-          <p:cNvPr id="238" name="Shape 24"/>
+          <p:cNvPr id="239" name="Shape 24"/>
           <p:cNvSpPr/>
           <p:nvPr/>
         </p:nvSpPr>
         <p:spPr>
           <a:xfrm>
             <a:off x="0" y="6510600"/>
-            <a:ext cx="12188520" cy="362520"/>
+            <a:ext cx="12187440" cy="361440"/>
           </a:xfrm>
           <a:prstGeom prst="rect">
             <a:avLst/>
@@ -8626,14 +8626,14 @@
       </p:sp>
       <p:sp>
         <p:nvSpPr>
-          <p:cNvPr id="239" name="Text 16"/>
+          <p:cNvPr id="240" name="Text 16"/>
           <p:cNvSpPr/>
           <p:nvPr/>
         </p:nvSpPr>
         <p:spPr>
           <a:xfrm>
             <a:off x="540000" y="388800"/>
-            <a:ext cx="6717600" cy="1048320"/>
+            <a:ext cx="6716520" cy="1047240"/>
           </a:xfrm>
           <a:prstGeom prst="rect">
             <a:avLst/>
@@ -8686,19 +8686,19 @@
       </p:sp>
       <p:pic>
         <p:nvPicPr>
-          <p:cNvPr id="240" name="" descr=""/>
+          <p:cNvPr id="241" name="" descr=""/>
           <p:cNvPicPr/>
           <p:nvPr/>
         </p:nvPicPr>
         <p:blipFill>
           <a:blip r:embed="rId1"/>
-          <a:srcRect l="0" t="26241" r="0" b="23016"/>
+          <a:srcRect l="0" t="26247" r="0" b="23016"/>
           <a:stretch/>
         </p:blipFill>
         <p:spPr>
           <a:xfrm>
             <a:off x="10038240" y="288360"/>
-            <a:ext cx="1946880" cy="536760"/>
+            <a:ext cx="1945800" cy="535680"/>
           </a:xfrm>
           <a:prstGeom prst="rect">
             <a:avLst/>
@@ -8710,14 +8710,14 @@
       </p:pic>
       <p:sp>
         <p:nvSpPr>
-          <p:cNvPr id="241" name="Shape 25"/>
+          <p:cNvPr id="242" name="Shape 25"/>
           <p:cNvSpPr/>
           <p:nvPr/>
         </p:nvSpPr>
         <p:spPr>
           <a:xfrm>
             <a:off x="612000" y="1756080"/>
-            <a:ext cx="3345120" cy="4361040"/>
+            <a:ext cx="3344040" cy="4359960"/>
           </a:xfrm>
           <a:prstGeom prst="roundRect">
             <a:avLst>
@@ -8784,14 +8784,14 @@
       </p:sp>
       <p:sp>
         <p:nvSpPr>
-          <p:cNvPr id="242" name="Text 28"/>
+          <p:cNvPr id="243" name="Text 28"/>
           <p:cNvSpPr/>
           <p:nvPr/>
         </p:nvSpPr>
         <p:spPr>
           <a:xfrm>
             <a:off x="168120" y="6538320"/>
-            <a:ext cx="2997000" cy="316800"/>
+            <a:ext cx="2995920" cy="315720"/>
           </a:xfrm>
           <a:prstGeom prst="rect">
             <a:avLst/>
@@ -8838,14 +8838,14 @@
       </p:sp>
       <p:sp>
         <p:nvSpPr>
-          <p:cNvPr id="243" name=""/>
+          <p:cNvPr id="244" name=""/>
           <p:cNvSpPr/>
           <p:nvPr/>
         </p:nvSpPr>
         <p:spPr>
           <a:xfrm>
             <a:off x="560880" y="971280"/>
-            <a:ext cx="9474480" cy="285840"/>
+            <a:ext cx="9473400" cy="284760"/>
           </a:xfrm>
           <a:prstGeom prst="rect">
             <a:avLst/>
@@ -8898,14 +8898,14 @@
       </p:sp>
       <p:sp>
         <p:nvSpPr>
-          <p:cNvPr id="244" name=""/>
+          <p:cNvPr id="245" name=""/>
           <p:cNvSpPr/>
           <p:nvPr/>
         </p:nvSpPr>
         <p:spPr>
           <a:xfrm rot="21590400">
             <a:off x="869400" y="1886760"/>
-            <a:ext cx="2553120" cy="3938760"/>
+            <a:ext cx="2552040" cy="3937680"/>
           </a:xfrm>
           <a:prstGeom prst="rect">
             <a:avLst/>
@@ -9351,14 +9351,14 @@
       </p:sp>
       <p:sp>
         <p:nvSpPr>
-          <p:cNvPr id="245" name="Shape 26"/>
+          <p:cNvPr id="246" name="Shape 26"/>
           <p:cNvSpPr/>
           <p:nvPr/>
         </p:nvSpPr>
         <p:spPr>
           <a:xfrm>
             <a:off x="4320000" y="1756440"/>
-            <a:ext cx="7737120" cy="4361040"/>
+            <a:ext cx="7736040" cy="4359960"/>
           </a:xfrm>
           <a:prstGeom prst="roundRect">
             <a:avLst>
@@ -9425,7 +9425,7 @@
       </p:sp>
       <p:pic>
         <p:nvPicPr>
-          <p:cNvPr id="246" name="" descr=""/>
+          <p:cNvPr id="247" name="" descr=""/>
           <p:cNvPicPr/>
           <p:nvPr/>
         </p:nvPicPr>
@@ -9437,7 +9437,7 @@
         <p:spPr>
           <a:xfrm>
             <a:off x="4140000" y="5710320"/>
-            <a:ext cx="681120" cy="681120"/>
+            <a:ext cx="680040" cy="680040"/>
           </a:xfrm>
           <a:prstGeom prst="rect">
             <a:avLst/>
@@ -9449,7 +9449,7 @@
       </p:pic>
       <p:pic>
         <p:nvPicPr>
-          <p:cNvPr id="247" name="" descr=""/>
+          <p:cNvPr id="248" name="" descr=""/>
           <p:cNvPicPr/>
           <p:nvPr/>
         </p:nvPicPr>
@@ -9460,7 +9460,7 @@
         <p:spPr>
           <a:xfrm>
             <a:off x="-36000" y="5624640"/>
-            <a:ext cx="1383120" cy="852840"/>
+            <a:ext cx="1382040" cy="851760"/>
           </a:xfrm>
           <a:prstGeom prst="rect">
             <a:avLst/>
@@ -9472,7 +9472,7 @@
       </p:pic>
       <p:pic>
         <p:nvPicPr>
-          <p:cNvPr id="248" name="" descr=""/>
+          <p:cNvPr id="249" name="" descr=""/>
           <p:cNvPicPr/>
           <p:nvPr/>
         </p:nvPicPr>
@@ -9483,7 +9483,7 @@
         <p:spPr>
           <a:xfrm>
             <a:off x="5716440" y="2411640"/>
-            <a:ext cx="6306480" cy="3106080"/>
+            <a:ext cx="6305400" cy="3105000"/>
           </a:xfrm>
           <a:prstGeom prst="rect">
             <a:avLst/>
@@ -9495,14 +9495,14 @@
       </p:pic>
       <p:sp>
         <p:nvSpPr>
-          <p:cNvPr id="249" name=""/>
+          <p:cNvPr id="250" name=""/>
           <p:cNvSpPr/>
           <p:nvPr/>
         </p:nvSpPr>
         <p:spPr>
           <a:xfrm>
             <a:off x="504000" y="1440000"/>
-            <a:ext cx="3237120" cy="313200"/>
+            <a:ext cx="3236040" cy="312120"/>
           </a:xfrm>
           <a:prstGeom prst="rect">
             <a:avLst/>
@@ -9549,14 +9549,14 @@
       </p:sp>
       <p:sp>
         <p:nvSpPr>
-          <p:cNvPr id="250" name=""/>
+          <p:cNvPr id="251" name=""/>
           <p:cNvSpPr/>
           <p:nvPr/>
         </p:nvSpPr>
         <p:spPr>
           <a:xfrm>
             <a:off x="4212000" y="1440000"/>
-            <a:ext cx="2373120" cy="313200"/>
+            <a:ext cx="2372040" cy="312120"/>
           </a:xfrm>
           <a:prstGeom prst="rect">
             <a:avLst/>
@@ -9603,7 +9603,7 @@
       </p:sp>
       <p:sp>
         <p:nvSpPr>
-          <p:cNvPr id="251" name="forma_edad 1">
+          <p:cNvPr id="252" name="forma_edad 1">
             <a:hlinkClick r:id="rId5" action="ppaction://hlinksldjump"/>
           </p:cNvPr>
           <p:cNvSpPr/>
@@ -9612,7 +9612,7 @@
         <p:spPr>
           <a:xfrm>
             <a:off x="4320720" y="1884600"/>
-            <a:ext cx="1077120" cy="357120"/>
+            <a:ext cx="1076040" cy="356040"/>
           </a:xfrm>
           <a:prstGeom prst="roundRect">
             <a:avLst>
@@ -9689,7 +9689,7 @@
       </p:sp>
       <p:sp>
         <p:nvSpPr>
-          <p:cNvPr id="252" name="boton_educativo 1">
+          <p:cNvPr id="253" name="boton_educativo 1">
             <a:hlinkClick r:id="rId6" action="ppaction://hlinksldjump"/>
           </p:cNvPr>
           <p:cNvSpPr/>
@@ -9698,7 +9698,7 @@
         <p:spPr>
           <a:xfrm>
             <a:off x="4321080" y="2237400"/>
-            <a:ext cx="1076760" cy="357120"/>
+            <a:ext cx="1075680" cy="356040"/>
           </a:xfrm>
           <a:prstGeom prst="roundRect">
             <a:avLst>
@@ -9775,7 +9775,7 @@
       </p:sp>
       <p:sp>
         <p:nvSpPr>
-          <p:cNvPr id="253" name="Shape 27">
+          <p:cNvPr id="254" name="Shape 27">
             <a:hlinkClick r:id="rId7" action="ppaction://hlinksldjump"/>
           </p:cNvPr>
           <p:cNvSpPr/>
@@ -9784,7 +9784,7 @@
         <p:spPr>
           <a:xfrm>
             <a:off x="4321440" y="2590200"/>
-            <a:ext cx="1076400" cy="357120"/>
+            <a:ext cx="1075320" cy="356040"/>
           </a:xfrm>
           <a:prstGeom prst="roundRect">
             <a:avLst>
@@ -9861,7 +9861,7 @@
       </p:sp>
       <p:sp>
         <p:nvSpPr>
-          <p:cNvPr id="254" name="Shape 28">
+          <p:cNvPr id="255" name="Shape 28">
             <a:hlinkClick r:id="rId8" action="ppaction://hlinksldjump"/>
           </p:cNvPr>
           <p:cNvSpPr/>
@@ -9870,7 +9870,7 @@
         <p:spPr>
           <a:xfrm>
             <a:off x="4321800" y="2943000"/>
-            <a:ext cx="1076400" cy="357120"/>
+            <a:ext cx="1075320" cy="356040"/>
           </a:xfrm>
           <a:prstGeom prst="roundRect">
             <a:avLst>
@@ -9947,7 +9947,7 @@
       </p:sp>
       <p:sp>
         <p:nvSpPr>
-          <p:cNvPr id="255" name="Shape 29">
+          <p:cNvPr id="256" name="Shape 29">
             <a:hlinkClick r:id="rId9" action="ppaction://hlinksldjump"/>
           </p:cNvPr>
           <p:cNvSpPr/>
@@ -9956,7 +9956,7 @@
         <p:spPr>
           <a:xfrm>
             <a:off x="4322160" y="3295800"/>
-            <a:ext cx="1076400" cy="565920"/>
+            <a:ext cx="1075320" cy="564840"/>
           </a:xfrm>
           <a:prstGeom prst="roundRect">
             <a:avLst>
@@ -10068,7 +10068,7 @@
       </p:sp>
       <p:sp>
         <p:nvSpPr>
-          <p:cNvPr id="256" name="Shape 30">
+          <p:cNvPr id="257" name="Shape 30">
             <a:hlinkClick r:id="rId10" action="ppaction://hlinksldjump"/>
           </p:cNvPr>
           <p:cNvSpPr/>
@@ -10077,7 +10077,7 @@
         <p:spPr>
           <a:xfrm>
             <a:off x="4322160" y="3835800"/>
-            <a:ext cx="1076400" cy="357120"/>
+            <a:ext cx="1075320" cy="356040"/>
           </a:xfrm>
           <a:prstGeom prst="roundRect">
             <a:avLst>
@@ -10154,7 +10154,7 @@
       </p:sp>
       <p:sp>
         <p:nvSpPr>
-          <p:cNvPr id="257" name="Shape 31">
+          <p:cNvPr id="258" name="Shape 31">
             <a:hlinkClick r:id="rId11" action="ppaction://hlinksldjump"/>
           </p:cNvPr>
           <p:cNvSpPr/>
@@ -10163,7 +10163,7 @@
         <p:spPr>
           <a:xfrm>
             <a:off x="4322520" y="4188600"/>
-            <a:ext cx="1076400" cy="537120"/>
+            <a:ext cx="1075320" cy="536040"/>
           </a:xfrm>
           <a:prstGeom prst="roundRect">
             <a:avLst>
@@ -10240,7 +10240,7 @@
       </p:sp>
       <p:sp>
         <p:nvSpPr>
-          <p:cNvPr id="258" name="Shape 32">
+          <p:cNvPr id="259" name="Shape 32">
             <a:hlinkClick r:id="rId12" action="ppaction://hlinksldjump"/>
           </p:cNvPr>
           <p:cNvSpPr/>
@@ -10249,7 +10249,7 @@
         <p:spPr>
           <a:xfrm>
             <a:off x="4322880" y="4737960"/>
-            <a:ext cx="1076400" cy="537120"/>
+            <a:ext cx="1075320" cy="536040"/>
           </a:xfrm>
           <a:prstGeom prst="roundRect">
             <a:avLst>
@@ -10326,14 +10326,14 @@
       </p:sp>
       <p:sp>
         <p:nvSpPr>
-          <p:cNvPr id="259" name="Text 12"/>
+          <p:cNvPr id="260" name="Text 12"/>
           <p:cNvSpPr/>
           <p:nvPr/>
         </p:nvSpPr>
         <p:spPr>
           <a:xfrm>
             <a:off x="2742840" y="6538320"/>
-            <a:ext cx="1395720" cy="316800"/>
+            <a:ext cx="1394640" cy="315720"/>
           </a:xfrm>
           <a:prstGeom prst="rect">
             <a:avLst/>
@@ -10380,14 +10380,14 @@
       </p:sp>
       <p:sp>
         <p:nvSpPr>
-          <p:cNvPr id="260" name="Text 27"/>
+          <p:cNvPr id="261" name="Text 27"/>
           <p:cNvSpPr/>
           <p:nvPr/>
         </p:nvSpPr>
         <p:spPr>
           <a:xfrm>
             <a:off x="11412000" y="6538320"/>
-            <a:ext cx="754560" cy="316800"/>
+            <a:ext cx="753480" cy="315720"/>
           </a:xfrm>
           <a:prstGeom prst="rect">
             <a:avLst/>
@@ -10471,14 +10471,14 @@
       </p:grpSpPr>
       <p:sp>
         <p:nvSpPr>
-          <p:cNvPr id="261" name="Shape 50"/>
+          <p:cNvPr id="262" name="Shape 50"/>
           <p:cNvSpPr/>
           <p:nvPr/>
         </p:nvSpPr>
         <p:spPr>
           <a:xfrm>
             <a:off x="0" y="0"/>
-            <a:ext cx="12188520" cy="161280"/>
+            <a:ext cx="12187440" cy="160200"/>
           </a:xfrm>
           <a:prstGeom prst="rect">
             <a:avLst/>
@@ -10518,14 +10518,14 @@
       </p:sp>
       <p:sp>
         <p:nvSpPr>
-          <p:cNvPr id="262" name="Shape 51"/>
+          <p:cNvPr id="263" name="Shape 51"/>
           <p:cNvSpPr/>
           <p:nvPr/>
         </p:nvSpPr>
         <p:spPr>
           <a:xfrm>
             <a:off x="0" y="6510600"/>
-            <a:ext cx="12188520" cy="362520"/>
+            <a:ext cx="12187440" cy="361440"/>
           </a:xfrm>
           <a:prstGeom prst="rect">
             <a:avLst/>
@@ -10565,14 +10565,14 @@
       </p:sp>
       <p:sp>
         <p:nvSpPr>
-          <p:cNvPr id="263" name="Text 38"/>
+          <p:cNvPr id="264" name="Text 38"/>
           <p:cNvSpPr/>
           <p:nvPr/>
         </p:nvSpPr>
         <p:spPr>
           <a:xfrm>
             <a:off x="540000" y="388800"/>
-            <a:ext cx="6717600" cy="1048320"/>
+            <a:ext cx="6716520" cy="1047240"/>
           </a:xfrm>
           <a:prstGeom prst="rect">
             <a:avLst/>
@@ -10625,19 +10625,19 @@
       </p:sp>
       <p:pic>
         <p:nvPicPr>
-          <p:cNvPr id="264" name="" descr=""/>
+          <p:cNvPr id="265" name="" descr=""/>
           <p:cNvPicPr/>
           <p:nvPr/>
         </p:nvPicPr>
         <p:blipFill>
           <a:blip r:embed="rId1"/>
-          <a:srcRect l="0" t="26241" r="0" b="23016"/>
+          <a:srcRect l="0" t="26247" r="0" b="23016"/>
           <a:stretch/>
         </p:blipFill>
         <p:spPr>
           <a:xfrm>
             <a:off x="10038240" y="288360"/>
-            <a:ext cx="1946880" cy="536760"/>
+            <a:ext cx="1945800" cy="535680"/>
           </a:xfrm>
           <a:prstGeom prst="rect">
             <a:avLst/>
@@ -10649,14 +10649,14 @@
       </p:pic>
       <p:sp>
         <p:nvSpPr>
-          <p:cNvPr id="265" name="Shape 52"/>
+          <p:cNvPr id="266" name="Shape 52"/>
           <p:cNvSpPr/>
           <p:nvPr/>
         </p:nvSpPr>
         <p:spPr>
           <a:xfrm>
             <a:off x="612000" y="1756080"/>
-            <a:ext cx="3345120" cy="4361040"/>
+            <a:ext cx="3344040" cy="4359960"/>
           </a:xfrm>
           <a:prstGeom prst="roundRect">
             <a:avLst>
@@ -10723,14 +10723,14 @@
       </p:sp>
       <p:sp>
         <p:nvSpPr>
-          <p:cNvPr id="266" name="Text 41"/>
+          <p:cNvPr id="267" name="Text 41"/>
           <p:cNvSpPr/>
           <p:nvPr/>
         </p:nvSpPr>
         <p:spPr>
           <a:xfrm>
             <a:off x="168120" y="6538320"/>
-            <a:ext cx="2997000" cy="316800"/>
+            <a:ext cx="2995920" cy="315720"/>
           </a:xfrm>
           <a:prstGeom prst="rect">
             <a:avLst/>
@@ -10777,14 +10777,14 @@
       </p:sp>
       <p:sp>
         <p:nvSpPr>
-          <p:cNvPr id="267" name=""/>
+          <p:cNvPr id="268" name=""/>
           <p:cNvSpPr/>
           <p:nvPr/>
         </p:nvSpPr>
         <p:spPr>
           <a:xfrm>
             <a:off x="560880" y="971280"/>
-            <a:ext cx="9474480" cy="285840"/>
+            <a:ext cx="9473400" cy="284760"/>
           </a:xfrm>
           <a:prstGeom prst="rect">
             <a:avLst/>
@@ -10837,14 +10837,14 @@
       </p:sp>
       <p:sp>
         <p:nvSpPr>
-          <p:cNvPr id="268" name=""/>
+          <p:cNvPr id="269" name=""/>
           <p:cNvSpPr/>
           <p:nvPr/>
         </p:nvSpPr>
         <p:spPr>
           <a:xfrm rot="21590400">
             <a:off x="869400" y="1886760"/>
-            <a:ext cx="2553120" cy="3938760"/>
+            <a:ext cx="2552040" cy="3937680"/>
           </a:xfrm>
           <a:prstGeom prst="rect">
             <a:avLst/>
@@ -11303,14 +11303,14 @@
       </p:sp>
       <p:sp>
         <p:nvSpPr>
-          <p:cNvPr id="269" name="Shape 53"/>
+          <p:cNvPr id="270" name="Shape 53"/>
           <p:cNvSpPr/>
           <p:nvPr/>
         </p:nvSpPr>
         <p:spPr>
           <a:xfrm>
             <a:off x="4320000" y="1756440"/>
-            <a:ext cx="7737120" cy="4361040"/>
+            <a:ext cx="7736040" cy="4359960"/>
           </a:xfrm>
           <a:prstGeom prst="roundRect">
             <a:avLst>
@@ -11377,7 +11377,7 @@
       </p:sp>
       <p:pic>
         <p:nvPicPr>
-          <p:cNvPr id="270" name="" descr=""/>
+          <p:cNvPr id="271" name="" descr=""/>
           <p:cNvPicPr/>
           <p:nvPr/>
         </p:nvPicPr>
@@ -11389,7 +11389,7 @@
         <p:spPr>
           <a:xfrm>
             <a:off x="4140000" y="5710320"/>
-            <a:ext cx="681120" cy="681120"/>
+            <a:ext cx="680040" cy="680040"/>
           </a:xfrm>
           <a:prstGeom prst="rect">
             <a:avLst/>
@@ -11401,7 +11401,7 @@
       </p:pic>
       <p:pic>
         <p:nvPicPr>
-          <p:cNvPr id="271" name="" descr=""/>
+          <p:cNvPr id="272" name="" descr=""/>
           <p:cNvPicPr/>
           <p:nvPr/>
         </p:nvPicPr>
@@ -11412,7 +11412,7 @@
         <p:spPr>
           <a:xfrm>
             <a:off x="-36000" y="5624640"/>
-            <a:ext cx="1383120" cy="852840"/>
+            <a:ext cx="1382040" cy="851760"/>
           </a:xfrm>
           <a:prstGeom prst="rect">
             <a:avLst/>
@@ -11424,7 +11424,7 @@
       </p:pic>
       <p:pic>
         <p:nvPicPr>
-          <p:cNvPr id="272" name="" descr=""/>
+          <p:cNvPr id="273" name="" descr=""/>
           <p:cNvPicPr/>
           <p:nvPr/>
         </p:nvPicPr>
@@ -11435,7 +11435,7 @@
         <p:spPr>
           <a:xfrm>
             <a:off x="5716440" y="2411640"/>
-            <a:ext cx="6306480" cy="3106080"/>
+            <a:ext cx="6305400" cy="3105000"/>
           </a:xfrm>
           <a:prstGeom prst="rect">
             <a:avLst/>
@@ -11447,14 +11447,14 @@
       </p:pic>
       <p:sp>
         <p:nvSpPr>
-          <p:cNvPr id="273" name=""/>
+          <p:cNvPr id="274" name=""/>
           <p:cNvSpPr/>
           <p:nvPr/>
         </p:nvSpPr>
         <p:spPr>
           <a:xfrm>
             <a:off x="504000" y="1440000"/>
-            <a:ext cx="3237120" cy="313200"/>
+            <a:ext cx="3236040" cy="312120"/>
           </a:xfrm>
           <a:prstGeom prst="rect">
             <a:avLst/>
@@ -11501,14 +11501,14 @@
       </p:sp>
       <p:sp>
         <p:nvSpPr>
-          <p:cNvPr id="274" name=""/>
+          <p:cNvPr id="275" name=""/>
           <p:cNvSpPr/>
           <p:nvPr/>
         </p:nvSpPr>
         <p:spPr>
           <a:xfrm>
             <a:off x="4212000" y="1440000"/>
-            <a:ext cx="2373120" cy="313200"/>
+            <a:ext cx="2372040" cy="312120"/>
           </a:xfrm>
           <a:prstGeom prst="rect">
             <a:avLst/>
@@ -11555,7 +11555,7 @@
       </p:sp>
       <p:sp>
         <p:nvSpPr>
-          <p:cNvPr id="275" name="forma_edad 3">
+          <p:cNvPr id="276" name="forma_edad 3">
             <a:hlinkClick r:id="rId5" action="ppaction://hlinksldjump"/>
           </p:cNvPr>
           <p:cNvSpPr/>
@@ -11564,7 +11564,7 @@
         <p:spPr>
           <a:xfrm>
             <a:off x="4319280" y="1872000"/>
-            <a:ext cx="1077120" cy="357120"/>
+            <a:ext cx="1076040" cy="356040"/>
           </a:xfrm>
           <a:prstGeom prst="roundRect">
             <a:avLst>
@@ -11641,7 +11641,7 @@
       </p:sp>
       <p:sp>
         <p:nvSpPr>
-          <p:cNvPr id="276" name="boton_educativo 3">
+          <p:cNvPr id="277" name="boton_educativo 3">
             <a:hlinkClick r:id="rId6" action="ppaction://hlinksldjump"/>
           </p:cNvPr>
           <p:cNvSpPr/>
@@ -11650,7 +11650,7 @@
         <p:spPr>
           <a:xfrm>
             <a:off x="4319640" y="2224800"/>
-            <a:ext cx="1076760" cy="357120"/>
+            <a:ext cx="1075680" cy="356040"/>
           </a:xfrm>
           <a:prstGeom prst="roundRect">
             <a:avLst>
@@ -11727,7 +11727,7 @@
       </p:sp>
       <p:sp>
         <p:nvSpPr>
-          <p:cNvPr id="277" name="Shape 54">
+          <p:cNvPr id="278" name="Shape 54">
             <a:hlinkClick r:id="rId7" action="ppaction://hlinksldjump"/>
           </p:cNvPr>
           <p:cNvSpPr/>
@@ -11736,7 +11736,7 @@
         <p:spPr>
           <a:xfrm>
             <a:off x="4320000" y="2577600"/>
-            <a:ext cx="1076400" cy="357120"/>
+            <a:ext cx="1075320" cy="356040"/>
           </a:xfrm>
           <a:prstGeom prst="roundRect">
             <a:avLst>
@@ -11813,7 +11813,7 @@
       </p:sp>
       <p:sp>
         <p:nvSpPr>
-          <p:cNvPr id="278" name="Shape 55">
+          <p:cNvPr id="279" name="Shape 55">
             <a:hlinkClick r:id="rId8" action="ppaction://hlinksldjump"/>
           </p:cNvPr>
           <p:cNvSpPr/>
@@ -11822,7 +11822,7 @@
         <p:spPr>
           <a:xfrm>
             <a:off x="4320360" y="2930400"/>
-            <a:ext cx="1076400" cy="357120"/>
+            <a:ext cx="1075320" cy="356040"/>
           </a:xfrm>
           <a:prstGeom prst="roundRect">
             <a:avLst>
@@ -11899,7 +11899,7 @@
       </p:sp>
       <p:sp>
         <p:nvSpPr>
-          <p:cNvPr id="279" name="Shape 56">
+          <p:cNvPr id="280" name="Shape 56">
             <a:hlinkClick r:id="rId9" action="ppaction://hlinksldjump"/>
           </p:cNvPr>
           <p:cNvSpPr/>
@@ -11908,7 +11908,7 @@
         <p:spPr>
           <a:xfrm>
             <a:off x="4320720" y="3283200"/>
-            <a:ext cx="1076400" cy="565920"/>
+            <a:ext cx="1075320" cy="564840"/>
           </a:xfrm>
           <a:prstGeom prst="roundRect">
             <a:avLst>
@@ -12020,7 +12020,7 @@
       </p:sp>
       <p:sp>
         <p:nvSpPr>
-          <p:cNvPr id="280" name="Shape 57">
+          <p:cNvPr id="281" name="Shape 57">
             <a:hlinkClick r:id="rId10" action="ppaction://hlinksldjump"/>
           </p:cNvPr>
           <p:cNvSpPr/>
@@ -12029,7 +12029,7 @@
         <p:spPr>
           <a:xfrm>
             <a:off x="4320720" y="3823200"/>
-            <a:ext cx="1076400" cy="357120"/>
+            <a:ext cx="1075320" cy="356040"/>
           </a:xfrm>
           <a:prstGeom prst="roundRect">
             <a:avLst>
@@ -12106,7 +12106,7 @@
       </p:sp>
       <p:sp>
         <p:nvSpPr>
-          <p:cNvPr id="281" name="Shape 58">
+          <p:cNvPr id="282" name="Shape 58">
             <a:hlinkClick r:id="rId11" action="ppaction://hlinksldjump"/>
           </p:cNvPr>
           <p:cNvSpPr/>
@@ -12115,7 +12115,7 @@
         <p:spPr>
           <a:xfrm>
             <a:off x="4321080" y="4176000"/>
-            <a:ext cx="1076400" cy="537120"/>
+            <a:ext cx="1075320" cy="536040"/>
           </a:xfrm>
           <a:prstGeom prst="roundRect">
             <a:avLst>
@@ -12192,7 +12192,7 @@
       </p:sp>
       <p:sp>
         <p:nvSpPr>
-          <p:cNvPr id="282" name="Shape 59">
+          <p:cNvPr id="283" name="Shape 59">
             <a:hlinkClick r:id="rId12" action="ppaction://hlinksldjump"/>
           </p:cNvPr>
           <p:cNvSpPr/>
@@ -12201,7 +12201,7 @@
         <p:spPr>
           <a:xfrm>
             <a:off x="4321440" y="4725360"/>
-            <a:ext cx="1076400" cy="537120"/>
+            <a:ext cx="1075320" cy="536040"/>
           </a:xfrm>
           <a:prstGeom prst="roundRect">
             <a:avLst>
@@ -12278,14 +12278,14 @@
       </p:sp>
       <p:sp>
         <p:nvSpPr>
-          <p:cNvPr id="283" name="Text 13"/>
+          <p:cNvPr id="284" name="Text 13"/>
           <p:cNvSpPr/>
           <p:nvPr/>
         </p:nvSpPr>
         <p:spPr>
           <a:xfrm>
             <a:off x="2742840" y="6538320"/>
-            <a:ext cx="1395720" cy="316800"/>
+            <a:ext cx="1394640" cy="315720"/>
           </a:xfrm>
           <a:prstGeom prst="rect">
             <a:avLst/>
@@ -12332,14 +12332,14 @@
       </p:sp>
       <p:sp>
         <p:nvSpPr>
-          <p:cNvPr id="284" name="Text 39"/>
+          <p:cNvPr id="285" name="Text 39"/>
           <p:cNvSpPr/>
           <p:nvPr/>
         </p:nvSpPr>
         <p:spPr>
           <a:xfrm>
             <a:off x="11412000" y="6538320"/>
-            <a:ext cx="754560" cy="316800"/>
+            <a:ext cx="753480" cy="315720"/>
           </a:xfrm>
           <a:prstGeom prst="rect">
             <a:avLst/>
@@ -12423,14 +12423,14 @@
       </p:grpSpPr>
       <p:sp>
         <p:nvSpPr>
-          <p:cNvPr id="285" name="Shape 60"/>
+          <p:cNvPr id="286" name="Shape 60"/>
           <p:cNvSpPr/>
           <p:nvPr/>
         </p:nvSpPr>
         <p:spPr>
           <a:xfrm>
             <a:off x="0" y="0"/>
-            <a:ext cx="12188520" cy="161280"/>
+            <a:ext cx="12187440" cy="160200"/>
           </a:xfrm>
           <a:prstGeom prst="rect">
             <a:avLst/>
@@ -12470,14 +12470,14 @@
       </p:sp>
       <p:sp>
         <p:nvSpPr>
-          <p:cNvPr id="286" name="Shape 61"/>
+          <p:cNvPr id="287" name="Shape 61"/>
           <p:cNvSpPr/>
           <p:nvPr/>
         </p:nvSpPr>
         <p:spPr>
           <a:xfrm>
             <a:off x="0" y="6510600"/>
-            <a:ext cx="12188520" cy="362520"/>
+            <a:ext cx="12187440" cy="361440"/>
           </a:xfrm>
           <a:prstGeom prst="rect">
             <a:avLst/>
@@ -12517,14 +12517,14 @@
       </p:sp>
       <p:sp>
         <p:nvSpPr>
-          <p:cNvPr id="287" name="Text 43"/>
+          <p:cNvPr id="288" name="Text 43"/>
           <p:cNvSpPr/>
           <p:nvPr/>
         </p:nvSpPr>
         <p:spPr>
           <a:xfrm>
             <a:off x="540000" y="388800"/>
-            <a:ext cx="6717600" cy="1048320"/>
+            <a:ext cx="6716520" cy="1047240"/>
           </a:xfrm>
           <a:prstGeom prst="rect">
             <a:avLst/>
@@ -12577,19 +12577,19 @@
       </p:sp>
       <p:pic>
         <p:nvPicPr>
-          <p:cNvPr id="288" name="" descr=""/>
+          <p:cNvPr id="289" name="" descr=""/>
           <p:cNvPicPr/>
           <p:nvPr/>
         </p:nvPicPr>
         <p:blipFill>
           <a:blip r:embed="rId1"/>
-          <a:srcRect l="0" t="26241" r="0" b="23016"/>
+          <a:srcRect l="0" t="26247" r="0" b="23016"/>
           <a:stretch/>
         </p:blipFill>
         <p:spPr>
           <a:xfrm>
             <a:off x="10038240" y="288360"/>
-            <a:ext cx="1946880" cy="536760"/>
+            <a:ext cx="1945800" cy="535680"/>
           </a:xfrm>
           <a:prstGeom prst="rect">
             <a:avLst/>
@@ -12601,14 +12601,14 @@
       </p:pic>
       <p:sp>
         <p:nvSpPr>
-          <p:cNvPr id="289" name="Shape 62"/>
+          <p:cNvPr id="290" name="Shape 62"/>
           <p:cNvSpPr/>
           <p:nvPr/>
         </p:nvSpPr>
         <p:spPr>
           <a:xfrm>
             <a:off x="612000" y="1756080"/>
-            <a:ext cx="3345120" cy="4361040"/>
+            <a:ext cx="3344040" cy="4359960"/>
           </a:xfrm>
           <a:prstGeom prst="roundRect">
             <a:avLst>
@@ -12675,14 +12675,14 @@
       </p:sp>
       <p:sp>
         <p:nvSpPr>
-          <p:cNvPr id="290" name="Text 46"/>
+          <p:cNvPr id="291" name="Text 46"/>
           <p:cNvSpPr/>
           <p:nvPr/>
         </p:nvSpPr>
         <p:spPr>
           <a:xfrm>
             <a:off x="168120" y="6538320"/>
-            <a:ext cx="2997000" cy="316800"/>
+            <a:ext cx="2995920" cy="315720"/>
           </a:xfrm>
           <a:prstGeom prst="rect">
             <a:avLst/>
@@ -12729,14 +12729,14 @@
       </p:sp>
       <p:sp>
         <p:nvSpPr>
-          <p:cNvPr id="291" name=""/>
+          <p:cNvPr id="292" name=""/>
           <p:cNvSpPr/>
           <p:nvPr/>
         </p:nvSpPr>
         <p:spPr>
           <a:xfrm>
             <a:off x="560880" y="971280"/>
-            <a:ext cx="9474480" cy="285840"/>
+            <a:ext cx="9473400" cy="284760"/>
           </a:xfrm>
           <a:prstGeom prst="rect">
             <a:avLst/>
@@ -12789,14 +12789,14 @@
       </p:sp>
       <p:sp>
         <p:nvSpPr>
-          <p:cNvPr id="292" name=""/>
+          <p:cNvPr id="293" name=""/>
           <p:cNvSpPr/>
           <p:nvPr/>
         </p:nvSpPr>
         <p:spPr>
           <a:xfrm rot="21590400">
             <a:off x="869400" y="1886760"/>
-            <a:ext cx="2553120" cy="3938760"/>
+            <a:ext cx="2552040" cy="3937680"/>
           </a:xfrm>
           <a:prstGeom prst="rect">
             <a:avLst/>
@@ -13255,14 +13255,14 @@
       </p:sp>
       <p:sp>
         <p:nvSpPr>
-          <p:cNvPr id="293" name="Shape 63"/>
+          <p:cNvPr id="294" name="Shape 63"/>
           <p:cNvSpPr/>
           <p:nvPr/>
         </p:nvSpPr>
         <p:spPr>
           <a:xfrm>
             <a:off x="4320000" y="1756440"/>
-            <a:ext cx="7737120" cy="4361040"/>
+            <a:ext cx="7736040" cy="4359960"/>
           </a:xfrm>
           <a:prstGeom prst="roundRect">
             <a:avLst>
@@ -13329,7 +13329,7 @@
       </p:sp>
       <p:pic>
         <p:nvPicPr>
-          <p:cNvPr id="294" name="" descr=""/>
+          <p:cNvPr id="295" name="" descr=""/>
           <p:cNvPicPr/>
           <p:nvPr/>
         </p:nvPicPr>
@@ -13341,7 +13341,7 @@
         <p:spPr>
           <a:xfrm>
             <a:off x="4140000" y="5710320"/>
-            <a:ext cx="681120" cy="681120"/>
+            <a:ext cx="680040" cy="680040"/>
           </a:xfrm>
           <a:prstGeom prst="rect">
             <a:avLst/>
@@ -13353,7 +13353,7 @@
       </p:pic>
       <p:pic>
         <p:nvPicPr>
-          <p:cNvPr id="295" name="" descr=""/>
+          <p:cNvPr id="296" name="" descr=""/>
           <p:cNvPicPr/>
           <p:nvPr/>
         </p:nvPicPr>
@@ -13364,7 +13364,7 @@
         <p:spPr>
           <a:xfrm>
             <a:off x="-36000" y="5624640"/>
-            <a:ext cx="1383120" cy="852840"/>
+            <a:ext cx="1382040" cy="851760"/>
           </a:xfrm>
           <a:prstGeom prst="rect">
             <a:avLst/>
@@ -13376,7 +13376,7 @@
       </p:pic>
       <p:pic>
         <p:nvPicPr>
-          <p:cNvPr id="296" name="" descr=""/>
+          <p:cNvPr id="297" name="" descr=""/>
           <p:cNvPicPr/>
           <p:nvPr/>
         </p:nvPicPr>
@@ -13387,7 +13387,7 @@
         <p:spPr>
           <a:xfrm>
             <a:off x="5716440" y="2411640"/>
-            <a:ext cx="6306480" cy="3106080"/>
+            <a:ext cx="6305400" cy="3105000"/>
           </a:xfrm>
           <a:prstGeom prst="rect">
             <a:avLst/>
@@ -13399,14 +13399,14 @@
       </p:pic>
       <p:sp>
         <p:nvSpPr>
-          <p:cNvPr id="297" name=""/>
+          <p:cNvPr id="298" name=""/>
           <p:cNvSpPr/>
           <p:nvPr/>
         </p:nvSpPr>
         <p:spPr>
           <a:xfrm>
             <a:off x="504000" y="1440000"/>
-            <a:ext cx="3237120" cy="313200"/>
+            <a:ext cx="3236040" cy="312120"/>
           </a:xfrm>
           <a:prstGeom prst="rect">
             <a:avLst/>
@@ -13453,14 +13453,14 @@
       </p:sp>
       <p:sp>
         <p:nvSpPr>
-          <p:cNvPr id="298" name=""/>
+          <p:cNvPr id="299" name=""/>
           <p:cNvSpPr/>
           <p:nvPr/>
         </p:nvSpPr>
         <p:spPr>
           <a:xfrm>
             <a:off x="4212000" y="1440000"/>
-            <a:ext cx="2373120" cy="313200"/>
+            <a:ext cx="2372040" cy="312120"/>
           </a:xfrm>
           <a:prstGeom prst="rect">
             <a:avLst/>
@@ -13507,7 +13507,7 @@
       </p:sp>
       <p:sp>
         <p:nvSpPr>
-          <p:cNvPr id="299" name="forma_edad 4">
+          <p:cNvPr id="300" name="forma_edad 4">
             <a:hlinkClick r:id="rId5" action="ppaction://hlinksldjump"/>
           </p:cNvPr>
           <p:cNvSpPr/>
@@ -13516,7 +13516,7 @@
         <p:spPr>
           <a:xfrm>
             <a:off x="4321440" y="1872000"/>
-            <a:ext cx="1077120" cy="357120"/>
+            <a:ext cx="1076040" cy="356040"/>
           </a:xfrm>
           <a:prstGeom prst="roundRect">
             <a:avLst>
@@ -13593,7 +13593,7 @@
       </p:sp>
       <p:sp>
         <p:nvSpPr>
-          <p:cNvPr id="300" name="boton_educativo 4">
+          <p:cNvPr id="301" name="boton_educativo 4">
             <a:hlinkClick r:id="rId6" action="ppaction://hlinksldjump"/>
           </p:cNvPr>
           <p:cNvSpPr/>
@@ -13602,7 +13602,7 @@
         <p:spPr>
           <a:xfrm>
             <a:off x="4321800" y="2224800"/>
-            <a:ext cx="1076760" cy="357120"/>
+            <a:ext cx="1075680" cy="356040"/>
           </a:xfrm>
           <a:prstGeom prst="roundRect">
             <a:avLst>
@@ -13679,7 +13679,7 @@
       </p:sp>
       <p:sp>
         <p:nvSpPr>
-          <p:cNvPr id="301" name="Shape 64">
+          <p:cNvPr id="302" name="Shape 64">
             <a:hlinkClick r:id="rId7" action="ppaction://hlinksldjump"/>
           </p:cNvPr>
           <p:cNvSpPr/>
@@ -13688,7 +13688,7 @@
         <p:spPr>
           <a:xfrm>
             <a:off x="4322160" y="2577600"/>
-            <a:ext cx="1076400" cy="357120"/>
+            <a:ext cx="1075320" cy="356040"/>
           </a:xfrm>
           <a:prstGeom prst="roundRect">
             <a:avLst>
@@ -13765,7 +13765,7 @@
       </p:sp>
       <p:sp>
         <p:nvSpPr>
-          <p:cNvPr id="302" name="Shape 65">
+          <p:cNvPr id="303" name="Shape 65">
             <a:hlinkClick r:id="rId8" action="ppaction://hlinksldjump"/>
           </p:cNvPr>
           <p:cNvSpPr/>
@@ -13774,7 +13774,7 @@
         <p:spPr>
           <a:xfrm>
             <a:off x="4322520" y="2930400"/>
-            <a:ext cx="1076400" cy="357120"/>
+            <a:ext cx="1075320" cy="356040"/>
           </a:xfrm>
           <a:prstGeom prst="roundRect">
             <a:avLst>
@@ -13851,7 +13851,7 @@
       </p:sp>
       <p:sp>
         <p:nvSpPr>
-          <p:cNvPr id="303" name="Shape 66">
+          <p:cNvPr id="304" name="Shape 66">
             <a:hlinkClick r:id="rId9" action="ppaction://hlinksldjump"/>
           </p:cNvPr>
           <p:cNvSpPr/>
@@ -13860,7 +13860,7 @@
         <p:spPr>
           <a:xfrm>
             <a:off x="4322880" y="3283200"/>
-            <a:ext cx="1076400" cy="565920"/>
+            <a:ext cx="1075320" cy="564840"/>
           </a:xfrm>
           <a:prstGeom prst="roundRect">
             <a:avLst>
@@ -13972,7 +13972,7 @@
       </p:sp>
       <p:sp>
         <p:nvSpPr>
-          <p:cNvPr id="304" name="Shape 67">
+          <p:cNvPr id="305" name="Shape 67">
             <a:hlinkClick r:id="rId10" action="ppaction://hlinksldjump"/>
           </p:cNvPr>
           <p:cNvSpPr/>
@@ -13981,7 +13981,7 @@
         <p:spPr>
           <a:xfrm>
             <a:off x="4322880" y="3823200"/>
-            <a:ext cx="1076400" cy="357120"/>
+            <a:ext cx="1075320" cy="356040"/>
           </a:xfrm>
           <a:prstGeom prst="roundRect">
             <a:avLst>
@@ -14058,7 +14058,7 @@
       </p:sp>
       <p:sp>
         <p:nvSpPr>
-          <p:cNvPr id="305" name="Shape 68">
+          <p:cNvPr id="306" name="Shape 68">
             <a:hlinkClick r:id="rId11" action="ppaction://hlinksldjump"/>
           </p:cNvPr>
           <p:cNvSpPr/>
@@ -14067,7 +14067,7 @@
         <p:spPr>
           <a:xfrm>
             <a:off x="4323240" y="4176000"/>
-            <a:ext cx="1076400" cy="537120"/>
+            <a:ext cx="1075320" cy="536040"/>
           </a:xfrm>
           <a:prstGeom prst="roundRect">
             <a:avLst>
@@ -14144,7 +14144,7 @@
       </p:sp>
       <p:sp>
         <p:nvSpPr>
-          <p:cNvPr id="306" name="Shape 69">
+          <p:cNvPr id="307" name="Shape 69">
             <a:hlinkClick r:id="rId12" action="ppaction://hlinksldjump"/>
           </p:cNvPr>
           <p:cNvSpPr/>
@@ -14153,7 +14153,7 @@
         <p:spPr>
           <a:xfrm>
             <a:off x="4323600" y="4725360"/>
-            <a:ext cx="1076400" cy="537120"/>
+            <a:ext cx="1075320" cy="536040"/>
           </a:xfrm>
           <a:prstGeom prst="roundRect">
             <a:avLst>
@@ -14230,14 +14230,14 @@
       </p:sp>
       <p:sp>
         <p:nvSpPr>
-          <p:cNvPr id="307" name="Text 14"/>
+          <p:cNvPr id="308" name="Text 14"/>
           <p:cNvSpPr/>
           <p:nvPr/>
         </p:nvSpPr>
         <p:spPr>
           <a:xfrm>
             <a:off x="2742840" y="6538320"/>
-            <a:ext cx="1395720" cy="316800"/>
+            <a:ext cx="1394640" cy="315720"/>
           </a:xfrm>
           <a:prstGeom prst="rect">
             <a:avLst/>
@@ -14284,14 +14284,14 @@
       </p:sp>
       <p:sp>
         <p:nvSpPr>
-          <p:cNvPr id="308" name="Text 44"/>
+          <p:cNvPr id="309" name="Text 44"/>
           <p:cNvSpPr/>
           <p:nvPr/>
         </p:nvSpPr>
         <p:spPr>
           <a:xfrm>
             <a:off x="11412000" y="6538320"/>
-            <a:ext cx="754560" cy="316800"/>
+            <a:ext cx="753480" cy="315720"/>
           </a:xfrm>
           <a:prstGeom prst="rect">
             <a:avLst/>
@@ -14375,14 +14375,14 @@
       </p:grpSpPr>
       <p:sp>
         <p:nvSpPr>
-          <p:cNvPr id="309" name="Shape 70"/>
+          <p:cNvPr id="310" name="Shape 70"/>
           <p:cNvSpPr/>
           <p:nvPr/>
         </p:nvSpPr>
         <p:spPr>
           <a:xfrm>
             <a:off x="0" y="0"/>
-            <a:ext cx="12188520" cy="161280"/>
+            <a:ext cx="12187440" cy="160200"/>
           </a:xfrm>
           <a:prstGeom prst="rect">
             <a:avLst/>
@@ -14422,14 +14422,14 @@
       </p:sp>
       <p:sp>
         <p:nvSpPr>
-          <p:cNvPr id="310" name="Shape 71"/>
+          <p:cNvPr id="311" name="Shape 71"/>
           <p:cNvSpPr/>
           <p:nvPr/>
         </p:nvSpPr>
         <p:spPr>
           <a:xfrm>
             <a:off x="0" y="6510600"/>
-            <a:ext cx="12188520" cy="362520"/>
+            <a:ext cx="12187440" cy="361440"/>
           </a:xfrm>
           <a:prstGeom prst="rect">
             <a:avLst/>
@@ -14469,14 +14469,14 @@
       </p:sp>
       <p:sp>
         <p:nvSpPr>
-          <p:cNvPr id="311" name="Text 47"/>
+          <p:cNvPr id="312" name="Text 47"/>
           <p:cNvSpPr/>
           <p:nvPr/>
         </p:nvSpPr>
         <p:spPr>
           <a:xfrm>
             <a:off x="540000" y="388800"/>
-            <a:ext cx="6717600" cy="1048320"/>
+            <a:ext cx="6716520" cy="1047240"/>
           </a:xfrm>
           <a:prstGeom prst="rect">
             <a:avLst/>
@@ -14529,19 +14529,19 @@
       </p:sp>
       <p:pic>
         <p:nvPicPr>
-          <p:cNvPr id="312" name="" descr=""/>
+          <p:cNvPr id="313" name="" descr=""/>
           <p:cNvPicPr/>
           <p:nvPr/>
         </p:nvPicPr>
         <p:blipFill>
           <a:blip r:embed="rId1"/>
-          <a:srcRect l="0" t="26241" r="0" b="23016"/>
+          <a:srcRect l="0" t="26247" r="0" b="23016"/>
           <a:stretch/>
         </p:blipFill>
         <p:spPr>
           <a:xfrm>
             <a:off x="10038240" y="288360"/>
-            <a:ext cx="1946880" cy="536760"/>
+            <a:ext cx="1945800" cy="535680"/>
           </a:xfrm>
           <a:prstGeom prst="rect">
             <a:avLst/>
@@ -14553,14 +14553,14 @@
       </p:pic>
       <p:sp>
         <p:nvSpPr>
-          <p:cNvPr id="313" name="Shape 72"/>
+          <p:cNvPr id="314" name="Shape 72"/>
           <p:cNvSpPr/>
           <p:nvPr/>
         </p:nvSpPr>
         <p:spPr>
           <a:xfrm>
             <a:off x="612000" y="1756080"/>
-            <a:ext cx="3345120" cy="4361040"/>
+            <a:ext cx="3344040" cy="4359960"/>
           </a:xfrm>
           <a:prstGeom prst="roundRect">
             <a:avLst>
@@ -14627,14 +14627,14 @@
       </p:sp>
       <p:sp>
         <p:nvSpPr>
-          <p:cNvPr id="314" name="Text 49"/>
+          <p:cNvPr id="315" name="Text 49"/>
           <p:cNvSpPr/>
           <p:nvPr/>
         </p:nvSpPr>
         <p:spPr>
           <a:xfrm>
             <a:off x="168120" y="6538320"/>
-            <a:ext cx="2997000" cy="316800"/>
+            <a:ext cx="2995920" cy="315720"/>
           </a:xfrm>
           <a:prstGeom prst="rect">
             <a:avLst/>
@@ -14681,14 +14681,14 @@
       </p:sp>
       <p:sp>
         <p:nvSpPr>
-          <p:cNvPr id="315" name=""/>
+          <p:cNvPr id="316" name=""/>
           <p:cNvSpPr/>
           <p:nvPr/>
         </p:nvSpPr>
         <p:spPr>
           <a:xfrm>
             <a:off x="560880" y="971280"/>
-            <a:ext cx="9474480" cy="285840"/>
+            <a:ext cx="9473400" cy="284760"/>
           </a:xfrm>
           <a:prstGeom prst="rect">
             <a:avLst/>
@@ -14741,14 +14741,14 @@
       </p:sp>
       <p:sp>
         <p:nvSpPr>
-          <p:cNvPr id="316" name=""/>
+          <p:cNvPr id="317" name=""/>
           <p:cNvSpPr/>
           <p:nvPr/>
         </p:nvSpPr>
         <p:spPr>
           <a:xfrm rot="21590400">
             <a:off x="869400" y="1886760"/>
-            <a:ext cx="2553120" cy="3938760"/>
+            <a:ext cx="2552040" cy="3937680"/>
           </a:xfrm>
           <a:prstGeom prst="rect">
             <a:avLst/>
@@ -15207,14 +15207,14 @@
       </p:sp>
       <p:sp>
         <p:nvSpPr>
-          <p:cNvPr id="317" name="Shape 73"/>
+          <p:cNvPr id="318" name="Shape 73"/>
           <p:cNvSpPr/>
           <p:nvPr/>
         </p:nvSpPr>
         <p:spPr>
           <a:xfrm>
             <a:off x="4320000" y="1756440"/>
-            <a:ext cx="7737120" cy="4361040"/>
+            <a:ext cx="7736040" cy="4359960"/>
           </a:xfrm>
           <a:prstGeom prst="roundRect">
             <a:avLst>
@@ -15281,7 +15281,7 @@
       </p:sp>
       <p:pic>
         <p:nvPicPr>
-          <p:cNvPr id="318" name="" descr=""/>
+          <p:cNvPr id="319" name="" descr=""/>
           <p:cNvPicPr/>
           <p:nvPr/>
         </p:nvPicPr>
@@ -15293,7 +15293,7 @@
         <p:spPr>
           <a:xfrm>
             <a:off x="4140000" y="5710320"/>
-            <a:ext cx="681120" cy="681120"/>
+            <a:ext cx="680040" cy="680040"/>
           </a:xfrm>
           <a:prstGeom prst="rect">
             <a:avLst/>
@@ -15305,7 +15305,7 @@
       </p:pic>
       <p:pic>
         <p:nvPicPr>
-          <p:cNvPr id="319" name="" descr=""/>
+          <p:cNvPr id="320" name="" descr=""/>
           <p:cNvPicPr/>
           <p:nvPr/>
         </p:nvPicPr>
@@ -15316,7 +15316,7 @@
         <p:spPr>
           <a:xfrm>
             <a:off x="-36000" y="5624640"/>
-            <a:ext cx="1383120" cy="852840"/>
+            <a:ext cx="1382040" cy="851760"/>
           </a:xfrm>
           <a:prstGeom prst="rect">
             <a:avLst/>
@@ -15328,7 +15328,7 @@
       </p:pic>
       <p:pic>
         <p:nvPicPr>
-          <p:cNvPr id="320" name="" descr=""/>
+          <p:cNvPr id="321" name="" descr=""/>
           <p:cNvPicPr/>
           <p:nvPr/>
         </p:nvPicPr>
@@ -15339,7 +15339,7 @@
         <p:spPr>
           <a:xfrm>
             <a:off x="5545080" y="2088720"/>
-            <a:ext cx="6476400" cy="3236760"/>
+            <a:ext cx="6475320" cy="3235680"/>
           </a:xfrm>
           <a:prstGeom prst="rect">
             <a:avLst/>
@@ -15351,14 +15351,14 @@
       </p:pic>
       <p:sp>
         <p:nvSpPr>
-          <p:cNvPr id="321" name=""/>
+          <p:cNvPr id="322" name=""/>
           <p:cNvSpPr/>
           <p:nvPr/>
         </p:nvSpPr>
         <p:spPr>
           <a:xfrm>
             <a:off x="504000" y="1440000"/>
-            <a:ext cx="3237120" cy="313200"/>
+            <a:ext cx="3236040" cy="312120"/>
           </a:xfrm>
           <a:prstGeom prst="rect">
             <a:avLst/>
@@ -15405,14 +15405,14 @@
       </p:sp>
       <p:sp>
         <p:nvSpPr>
-          <p:cNvPr id="322" name=""/>
+          <p:cNvPr id="323" name=""/>
           <p:cNvSpPr/>
           <p:nvPr/>
         </p:nvSpPr>
         <p:spPr>
           <a:xfrm>
             <a:off x="4212000" y="1440000"/>
-            <a:ext cx="2373120" cy="313200"/>
+            <a:ext cx="2372040" cy="312120"/>
           </a:xfrm>
           <a:prstGeom prst="rect">
             <a:avLst/>
@@ -15459,7 +15459,7 @@
       </p:sp>
       <p:sp>
         <p:nvSpPr>
-          <p:cNvPr id="323" name="forma_edad 5">
+          <p:cNvPr id="324" name="forma_edad 5">
             <a:hlinkClick r:id="rId5" action="ppaction://hlinksldjump"/>
           </p:cNvPr>
           <p:cNvSpPr/>
@@ -15468,7 +15468,7 @@
         <p:spPr>
           <a:xfrm>
             <a:off x="4321440" y="1872000"/>
-            <a:ext cx="1077120" cy="357120"/>
+            <a:ext cx="1076040" cy="356040"/>
           </a:xfrm>
           <a:prstGeom prst="roundRect">
             <a:avLst>
@@ -15545,7 +15545,7 @@
       </p:sp>
       <p:sp>
         <p:nvSpPr>
-          <p:cNvPr id="324" name="boton_educativo 5">
+          <p:cNvPr id="325" name="boton_educativo 5">
             <a:hlinkClick r:id="rId6" action="ppaction://hlinksldjump"/>
           </p:cNvPr>
           <p:cNvSpPr/>
@@ -15554,7 +15554,7 @@
         <p:spPr>
           <a:xfrm>
             <a:off x="4321800" y="2224800"/>
-            <a:ext cx="1076760" cy="357120"/>
+            <a:ext cx="1075680" cy="356040"/>
           </a:xfrm>
           <a:prstGeom prst="roundRect">
             <a:avLst>
@@ -15631,7 +15631,7 @@
       </p:sp>
       <p:sp>
         <p:nvSpPr>
-          <p:cNvPr id="325" name="Shape 74">
+          <p:cNvPr id="326" name="Shape 74">
             <a:hlinkClick r:id="rId7" action="ppaction://hlinksldjump"/>
           </p:cNvPr>
           <p:cNvSpPr/>
@@ -15640,7 +15640,7 @@
         <p:spPr>
           <a:xfrm>
             <a:off x="4322160" y="2577600"/>
-            <a:ext cx="1076400" cy="357120"/>
+            <a:ext cx="1075320" cy="356040"/>
           </a:xfrm>
           <a:prstGeom prst="roundRect">
             <a:avLst>
@@ -15717,7 +15717,7 @@
       </p:sp>
       <p:sp>
         <p:nvSpPr>
-          <p:cNvPr id="326" name="Shape 75">
+          <p:cNvPr id="327" name="Shape 75">
             <a:hlinkClick r:id="rId8" action="ppaction://hlinksldjump"/>
           </p:cNvPr>
           <p:cNvSpPr/>
@@ -15726,7 +15726,7 @@
         <p:spPr>
           <a:xfrm>
             <a:off x="4322520" y="2930400"/>
-            <a:ext cx="1076400" cy="357120"/>
+            <a:ext cx="1075320" cy="356040"/>
           </a:xfrm>
           <a:prstGeom prst="roundRect">
             <a:avLst>
@@ -15803,7 +15803,7 @@
       </p:sp>
       <p:sp>
         <p:nvSpPr>
-          <p:cNvPr id="327" name="Shape 76">
+          <p:cNvPr id="328" name="Shape 76">
             <a:hlinkClick r:id="rId9" action="ppaction://hlinksldjump"/>
           </p:cNvPr>
           <p:cNvSpPr/>
@@ -15812,7 +15812,7 @@
         <p:spPr>
           <a:xfrm>
             <a:off x="4322880" y="3283200"/>
-            <a:ext cx="1076400" cy="565920"/>
+            <a:ext cx="1075320" cy="564840"/>
           </a:xfrm>
           <a:prstGeom prst="roundRect">
             <a:avLst>
@@ -15924,7 +15924,7 @@
       </p:sp>
       <p:sp>
         <p:nvSpPr>
-          <p:cNvPr id="328" name="Shape 77">
+          <p:cNvPr id="329" name="Shape 77">
             <a:hlinkClick r:id="rId10" action="ppaction://hlinksldjump"/>
           </p:cNvPr>
           <p:cNvSpPr/>
@@ -15933,7 +15933,7 @@
         <p:spPr>
           <a:xfrm>
             <a:off x="4322880" y="3823200"/>
-            <a:ext cx="1076400" cy="357120"/>
+            <a:ext cx="1075320" cy="356040"/>
           </a:xfrm>
           <a:prstGeom prst="roundRect">
             <a:avLst>
@@ -16010,7 +16010,7 @@
       </p:sp>
       <p:sp>
         <p:nvSpPr>
-          <p:cNvPr id="329" name="Shape 78">
+          <p:cNvPr id="330" name="Shape 78">
             <a:hlinkClick r:id="rId11" action="ppaction://hlinksldjump"/>
           </p:cNvPr>
           <p:cNvSpPr/>
@@ -16019,7 +16019,7 @@
         <p:spPr>
           <a:xfrm>
             <a:off x="4323240" y="4176000"/>
-            <a:ext cx="1076400" cy="537120"/>
+            <a:ext cx="1075320" cy="536040"/>
           </a:xfrm>
           <a:prstGeom prst="roundRect">
             <a:avLst>
@@ -16096,7 +16096,7 @@
       </p:sp>
       <p:sp>
         <p:nvSpPr>
-          <p:cNvPr id="330" name="Shape 79">
+          <p:cNvPr id="331" name="Shape 79">
             <a:hlinkClick r:id="rId12" action="ppaction://hlinksldjump"/>
           </p:cNvPr>
           <p:cNvSpPr/>
@@ -16105,7 +16105,7 @@
         <p:spPr>
           <a:xfrm>
             <a:off x="4323600" y="4725360"/>
-            <a:ext cx="1076400" cy="537120"/>
+            <a:ext cx="1075320" cy="536040"/>
           </a:xfrm>
           <a:prstGeom prst="roundRect">
             <a:avLst>
@@ -16182,14 +16182,14 @@
       </p:sp>
       <p:sp>
         <p:nvSpPr>
-          <p:cNvPr id="331" name="Text 20"/>
+          <p:cNvPr id="332" name="Text 20"/>
           <p:cNvSpPr/>
           <p:nvPr/>
         </p:nvSpPr>
         <p:spPr>
           <a:xfrm>
             <a:off x="2742840" y="6538320"/>
-            <a:ext cx="1395720" cy="316800"/>
+            <a:ext cx="1394640" cy="315720"/>
           </a:xfrm>
           <a:prstGeom prst="rect">
             <a:avLst/>
@@ -16236,14 +16236,14 @@
       </p:sp>
       <p:sp>
         <p:nvSpPr>
-          <p:cNvPr id="332" name="Text 48"/>
+          <p:cNvPr id="333" name="Text 48"/>
           <p:cNvSpPr/>
           <p:nvPr/>
         </p:nvSpPr>
         <p:spPr>
           <a:xfrm>
             <a:off x="11412000" y="6538320"/>
-            <a:ext cx="754560" cy="316800"/>
+            <a:ext cx="753480" cy="315720"/>
           </a:xfrm>
           <a:prstGeom prst="rect">
             <a:avLst/>
@@ -16327,14 +16327,14 @@
       </p:grpSpPr>
       <p:sp>
         <p:nvSpPr>
-          <p:cNvPr id="333" name="Shape 90"/>
+          <p:cNvPr id="334" name="Shape 90"/>
           <p:cNvSpPr/>
           <p:nvPr/>
         </p:nvSpPr>
         <p:spPr>
           <a:xfrm>
             <a:off x="0" y="0"/>
-            <a:ext cx="12188520" cy="161280"/>
+            <a:ext cx="12187440" cy="160200"/>
           </a:xfrm>
           <a:prstGeom prst="rect">
             <a:avLst/>
@@ -16374,14 +16374,14 @@
       </p:sp>
       <p:sp>
         <p:nvSpPr>
-          <p:cNvPr id="334" name="Shape 91"/>
+          <p:cNvPr id="335" name="Shape 91"/>
           <p:cNvSpPr/>
           <p:nvPr/>
         </p:nvSpPr>
         <p:spPr>
           <a:xfrm>
             <a:off x="0" y="6510600"/>
-            <a:ext cx="12188520" cy="362520"/>
+            <a:ext cx="12187440" cy="361440"/>
           </a:xfrm>
           <a:prstGeom prst="rect">
             <a:avLst/>
@@ -16421,14 +16421,14 @@
       </p:sp>
       <p:sp>
         <p:nvSpPr>
-          <p:cNvPr id="335" name="Text 53"/>
+          <p:cNvPr id="336" name="Text 53"/>
           <p:cNvSpPr/>
           <p:nvPr/>
         </p:nvSpPr>
         <p:spPr>
           <a:xfrm>
             <a:off x="540000" y="388800"/>
-            <a:ext cx="6717600" cy="1048320"/>
+            <a:ext cx="6716520" cy="1047240"/>
           </a:xfrm>
           <a:prstGeom prst="rect">
             <a:avLst/>
@@ -16481,19 +16481,19 @@
       </p:sp>
       <p:pic>
         <p:nvPicPr>
-          <p:cNvPr id="336" name="" descr=""/>
+          <p:cNvPr id="337" name="" descr=""/>
           <p:cNvPicPr/>
           <p:nvPr/>
         </p:nvPicPr>
         <p:blipFill>
           <a:blip r:embed="rId1"/>
-          <a:srcRect l="0" t="26241" r="0" b="23016"/>
+          <a:srcRect l="0" t="26247" r="0" b="23016"/>
           <a:stretch/>
         </p:blipFill>
         <p:spPr>
           <a:xfrm>
             <a:off x="10038240" y="288360"/>
-            <a:ext cx="1946880" cy="536760"/>
+            <a:ext cx="1945800" cy="535680"/>
           </a:xfrm>
           <a:prstGeom prst="rect">
             <a:avLst/>
@@ -16505,14 +16505,14 @@
       </p:pic>
       <p:sp>
         <p:nvSpPr>
-          <p:cNvPr id="337" name="Shape 92"/>
+          <p:cNvPr id="338" name="Shape 92"/>
           <p:cNvSpPr/>
           <p:nvPr/>
         </p:nvSpPr>
         <p:spPr>
           <a:xfrm>
             <a:off x="612000" y="1756080"/>
-            <a:ext cx="3345120" cy="4361040"/>
+            <a:ext cx="3344040" cy="4359960"/>
           </a:xfrm>
           <a:prstGeom prst="roundRect">
             <a:avLst>
@@ -16579,14 +16579,14 @@
       </p:sp>
       <p:sp>
         <p:nvSpPr>
-          <p:cNvPr id="338" name="Text 55"/>
+          <p:cNvPr id="339" name="Text 55"/>
           <p:cNvSpPr/>
           <p:nvPr/>
         </p:nvSpPr>
         <p:spPr>
           <a:xfrm>
             <a:off x="168120" y="6538320"/>
-            <a:ext cx="2997000" cy="316800"/>
+            <a:ext cx="2995920" cy="315720"/>
           </a:xfrm>
           <a:prstGeom prst="rect">
             <a:avLst/>
@@ -16633,14 +16633,14 @@
       </p:sp>
       <p:sp>
         <p:nvSpPr>
-          <p:cNvPr id="339" name=""/>
+          <p:cNvPr id="340" name=""/>
           <p:cNvSpPr/>
           <p:nvPr/>
         </p:nvSpPr>
         <p:spPr>
           <a:xfrm>
             <a:off x="560880" y="971280"/>
-            <a:ext cx="9474480" cy="285840"/>
+            <a:ext cx="9473400" cy="284760"/>
           </a:xfrm>
           <a:prstGeom prst="rect">
             <a:avLst/>
@@ -16693,14 +16693,14 @@
       </p:sp>
       <p:sp>
         <p:nvSpPr>
-          <p:cNvPr id="340" name=""/>
+          <p:cNvPr id="341" name=""/>
           <p:cNvSpPr/>
           <p:nvPr/>
         </p:nvSpPr>
         <p:spPr>
           <a:xfrm rot="21590400">
             <a:off x="869400" y="1886760"/>
-            <a:ext cx="2553120" cy="3938760"/>
+            <a:ext cx="2552040" cy="3937680"/>
           </a:xfrm>
           <a:prstGeom prst="rect">
             <a:avLst/>
@@ -17159,14 +17159,14 @@
       </p:sp>
       <p:sp>
         <p:nvSpPr>
-          <p:cNvPr id="341" name="Shape 93"/>
+          <p:cNvPr id="342" name="Shape 93"/>
           <p:cNvSpPr/>
           <p:nvPr/>
         </p:nvSpPr>
         <p:spPr>
           <a:xfrm>
             <a:off x="4320000" y="1756440"/>
-            <a:ext cx="7737120" cy="4361040"/>
+            <a:ext cx="7736040" cy="4359960"/>
           </a:xfrm>
           <a:prstGeom prst="roundRect">
             <a:avLst>
@@ -17233,7 +17233,7 @@
       </p:sp>
       <p:pic>
         <p:nvPicPr>
-          <p:cNvPr id="342" name="" descr=""/>
+          <p:cNvPr id="343" name="" descr=""/>
           <p:cNvPicPr/>
           <p:nvPr/>
         </p:nvPicPr>
@@ -17245,7 +17245,7 @@
         <p:spPr>
           <a:xfrm>
             <a:off x="4140000" y="5710320"/>
-            <a:ext cx="681120" cy="681120"/>
+            <a:ext cx="680040" cy="680040"/>
           </a:xfrm>
           <a:prstGeom prst="rect">
             <a:avLst/>
@@ -17257,7 +17257,7 @@
       </p:pic>
       <p:pic>
         <p:nvPicPr>
-          <p:cNvPr id="343" name="" descr=""/>
+          <p:cNvPr id="344" name="" descr=""/>
           <p:cNvPicPr/>
           <p:nvPr/>
         </p:nvPicPr>
@@ -17268,7 +17268,7 @@
         <p:spPr>
           <a:xfrm>
             <a:off x="-36000" y="5624640"/>
-            <a:ext cx="1383120" cy="852840"/>
+            <a:ext cx="1382040" cy="851760"/>
           </a:xfrm>
           <a:prstGeom prst="rect">
             <a:avLst/>
@@ -17280,7 +17280,7 @@
       </p:pic>
       <p:pic>
         <p:nvPicPr>
-          <p:cNvPr id="344" name="" descr=""/>
+          <p:cNvPr id="345" name="" descr=""/>
           <p:cNvPicPr/>
           <p:nvPr/>
         </p:nvPicPr>
@@ -17291,7 +17291,7 @@
         <p:spPr>
           <a:xfrm>
             <a:off x="5716440" y="2411640"/>
-            <a:ext cx="6306480" cy="3106080"/>
+            <a:ext cx="6305400" cy="3105000"/>
           </a:xfrm>
           <a:prstGeom prst="rect">
             <a:avLst/>
@@ -17303,14 +17303,14 @@
       </p:pic>
       <p:sp>
         <p:nvSpPr>
-          <p:cNvPr id="345" name=""/>
+          <p:cNvPr id="346" name=""/>
           <p:cNvSpPr/>
           <p:nvPr/>
         </p:nvSpPr>
         <p:spPr>
           <a:xfrm>
             <a:off x="504000" y="1440000"/>
-            <a:ext cx="3237120" cy="313200"/>
+            <a:ext cx="3236040" cy="312120"/>
           </a:xfrm>
           <a:prstGeom prst="rect">
             <a:avLst/>
@@ -17357,14 +17357,14 @@
       </p:sp>
       <p:sp>
         <p:nvSpPr>
-          <p:cNvPr id="346" name=""/>
+          <p:cNvPr id="347" name=""/>
           <p:cNvSpPr/>
           <p:nvPr/>
         </p:nvSpPr>
         <p:spPr>
           <a:xfrm>
             <a:off x="4212000" y="1440000"/>
-            <a:ext cx="2373120" cy="313200"/>
+            <a:ext cx="2372040" cy="312120"/>
           </a:xfrm>
           <a:prstGeom prst="rect">
             <a:avLst/>
@@ -17411,7 +17411,7 @@
       </p:sp>
       <p:sp>
         <p:nvSpPr>
-          <p:cNvPr id="347" name="forma_edad 6">
+          <p:cNvPr id="348" name="forma_edad 6">
             <a:hlinkClick r:id="rId5" action="ppaction://hlinksldjump"/>
           </p:cNvPr>
           <p:cNvSpPr/>
@@ -17420,7 +17420,7 @@
         <p:spPr>
           <a:xfrm>
             <a:off x="4321800" y="1878480"/>
-            <a:ext cx="1077120" cy="357120"/>
+            <a:ext cx="1076040" cy="356040"/>
           </a:xfrm>
           <a:prstGeom prst="roundRect">
             <a:avLst>
@@ -17497,7 +17497,7 @@
       </p:sp>
       <p:sp>
         <p:nvSpPr>
-          <p:cNvPr id="348" name="boton_educativo 6">
+          <p:cNvPr id="349" name="boton_educativo 6">
             <a:hlinkClick r:id="rId6" action="ppaction://hlinksldjump"/>
           </p:cNvPr>
           <p:cNvSpPr/>
@@ -17506,7 +17506,7 @@
         <p:spPr>
           <a:xfrm>
             <a:off x="4322160" y="2231280"/>
-            <a:ext cx="1076760" cy="357120"/>
+            <a:ext cx="1075680" cy="356040"/>
           </a:xfrm>
           <a:prstGeom prst="roundRect">
             <a:avLst>
@@ -17583,7 +17583,7 @@
       </p:sp>
       <p:sp>
         <p:nvSpPr>
-          <p:cNvPr id="349" name="Shape 80">
+          <p:cNvPr id="350" name="Shape 80">
             <a:hlinkClick r:id="rId7" action="ppaction://hlinksldjump"/>
           </p:cNvPr>
           <p:cNvSpPr/>
@@ -17592,7 +17592,7 @@
         <p:spPr>
           <a:xfrm>
             <a:off x="4322520" y="2584080"/>
-            <a:ext cx="1076400" cy="357120"/>
+            <a:ext cx="1075320" cy="356040"/>
           </a:xfrm>
           <a:prstGeom prst="roundRect">
             <a:avLst>
@@ -17669,7 +17669,7 @@
       </p:sp>
       <p:sp>
         <p:nvSpPr>
-          <p:cNvPr id="350" name="Shape 81">
+          <p:cNvPr id="351" name="Shape 81">
             <a:hlinkClick r:id="rId8" action="ppaction://hlinksldjump"/>
           </p:cNvPr>
           <p:cNvSpPr/>
@@ -17678,7 +17678,7 @@
         <p:spPr>
           <a:xfrm>
             <a:off x="4322880" y="2936880"/>
-            <a:ext cx="1076400" cy="357120"/>
+            <a:ext cx="1075320" cy="356040"/>
           </a:xfrm>
           <a:prstGeom prst="roundRect">
             <a:avLst>
@@ -17755,7 +17755,7 @@
       </p:sp>
       <p:sp>
         <p:nvSpPr>
-          <p:cNvPr id="351" name="Shape 82">
+          <p:cNvPr id="352" name="Shape 82">
             <a:hlinkClick r:id="rId9" action="ppaction://hlinksldjump"/>
           </p:cNvPr>
           <p:cNvSpPr/>
@@ -17764,7 +17764,7 @@
         <p:spPr>
           <a:xfrm>
             <a:off x="4323240" y="3289680"/>
-            <a:ext cx="1076400" cy="565920"/>
+            <a:ext cx="1075320" cy="564840"/>
           </a:xfrm>
           <a:prstGeom prst="roundRect">
             <a:avLst>
@@ -17876,7 +17876,7 @@
       </p:sp>
       <p:sp>
         <p:nvSpPr>
-          <p:cNvPr id="352" name="Shape 83">
+          <p:cNvPr id="353" name="Shape 83">
             <a:hlinkClick r:id="rId10" action="ppaction://hlinksldjump"/>
           </p:cNvPr>
           <p:cNvSpPr/>
@@ -17885,7 +17885,7 @@
         <p:spPr>
           <a:xfrm>
             <a:off x="4323240" y="3829680"/>
-            <a:ext cx="1076400" cy="357120"/>
+            <a:ext cx="1075320" cy="356040"/>
           </a:xfrm>
           <a:prstGeom prst="roundRect">
             <a:avLst>
@@ -17962,7 +17962,7 @@
       </p:sp>
       <p:sp>
         <p:nvSpPr>
-          <p:cNvPr id="353" name="Shape 84">
+          <p:cNvPr id="354" name="Shape 84">
             <a:hlinkClick r:id="rId11" action="ppaction://hlinksldjump"/>
           </p:cNvPr>
           <p:cNvSpPr/>
@@ -17971,7 +17971,7 @@
         <p:spPr>
           <a:xfrm>
             <a:off x="4323600" y="4182480"/>
-            <a:ext cx="1076400" cy="537120"/>
+            <a:ext cx="1075320" cy="536040"/>
           </a:xfrm>
           <a:prstGeom prst="roundRect">
             <a:avLst>
@@ -18048,7 +18048,7 @@
       </p:sp>
       <p:sp>
         <p:nvSpPr>
-          <p:cNvPr id="354" name="Shape 85">
+          <p:cNvPr id="355" name="Shape 85">
             <a:hlinkClick r:id="rId12" action="ppaction://hlinksldjump"/>
           </p:cNvPr>
           <p:cNvSpPr/>
@@ -18057,7 +18057,7 @@
         <p:spPr>
           <a:xfrm>
             <a:off x="4323960" y="4731840"/>
-            <a:ext cx="1076400" cy="537120"/>
+            <a:ext cx="1075320" cy="536040"/>
           </a:xfrm>
           <a:prstGeom prst="roundRect">
             <a:avLst>
@@ -18134,14 +18134,14 @@
       </p:sp>
       <p:sp>
         <p:nvSpPr>
-          <p:cNvPr id="355" name="Text 21"/>
+          <p:cNvPr id="356" name="Text 21"/>
           <p:cNvSpPr/>
           <p:nvPr/>
         </p:nvSpPr>
         <p:spPr>
           <a:xfrm>
             <a:off x="2742840" y="6538320"/>
-            <a:ext cx="1395720" cy="316800"/>
+            <a:ext cx="1394640" cy="315720"/>
           </a:xfrm>
           <a:prstGeom prst="rect">
             <a:avLst/>
@@ -18188,14 +18188,14 @@
       </p:sp>
       <p:sp>
         <p:nvSpPr>
-          <p:cNvPr id="356" name="Text 54"/>
+          <p:cNvPr id="357" name="Text 54"/>
           <p:cNvSpPr/>
           <p:nvPr/>
         </p:nvSpPr>
         <p:spPr>
           <a:xfrm>
             <a:off x="11412000" y="6538320"/>
-            <a:ext cx="754560" cy="316800"/>
+            <a:ext cx="753480" cy="315720"/>
           </a:xfrm>
           <a:prstGeom prst="rect">
             <a:avLst/>
@@ -18290,7 +18290,7 @@
         <p:spPr>
           <a:xfrm>
             <a:off x="5760000" y="164160"/>
-            <a:ext cx="6433920" cy="6352560"/>
+            <a:ext cx="6432840" cy="6351480"/>
           </a:xfrm>
           <a:prstGeom prst="rect">
             <a:avLst/>
@@ -18309,7 +18309,7 @@
         <p:spPr>
           <a:xfrm>
             <a:off x="0" y="0"/>
-            <a:ext cx="12188520" cy="161280"/>
+            <a:ext cx="12187440" cy="160200"/>
           </a:xfrm>
           <a:prstGeom prst="rect">
             <a:avLst/>
@@ -18356,7 +18356,7 @@
         <p:spPr>
           <a:xfrm>
             <a:off x="0" y="6519600"/>
-            <a:ext cx="12188520" cy="353520"/>
+            <a:ext cx="12187440" cy="352440"/>
           </a:xfrm>
           <a:prstGeom prst="rect">
             <a:avLst/>
@@ -18402,13 +18402,13 @@
         </p:nvPicPr>
         <p:blipFill>
           <a:blip r:embed="rId2"/>
-          <a:srcRect l="0" t="26241" r="0" b="23016"/>
+          <a:srcRect l="0" t="26247" r="0" b="23016"/>
           <a:stretch/>
         </p:blipFill>
         <p:spPr>
           <a:xfrm>
             <a:off x="216000" y="360360"/>
-            <a:ext cx="1946880" cy="536760"/>
+            <a:ext cx="1945800" cy="535680"/>
           </a:xfrm>
           <a:prstGeom prst="rect">
             <a:avLst/>
@@ -18427,7 +18427,7 @@
         <p:spPr>
           <a:xfrm>
             <a:off x="168120" y="6538320"/>
-            <a:ext cx="2997000" cy="316800"/>
+            <a:ext cx="2995920" cy="315720"/>
           </a:xfrm>
           <a:prstGeom prst="rect">
             <a:avLst/>
@@ -18481,7 +18481,7 @@
         <p:spPr>
           <a:xfrm>
             <a:off x="2742840" y="6538320"/>
-            <a:ext cx="1395720" cy="316800"/>
+            <a:ext cx="1394640" cy="315720"/>
           </a:xfrm>
           <a:prstGeom prst="rect">
             <a:avLst/>
@@ -18535,7 +18535,7 @@
         <p:spPr>
           <a:xfrm>
             <a:off x="468000" y="966240"/>
-            <a:ext cx="2698560" cy="688320"/>
+            <a:ext cx="2697480" cy="687240"/>
           </a:xfrm>
           <a:prstGeom prst="rect">
             <a:avLst/>
@@ -18589,7 +18589,7 @@
         <p:spPr>
           <a:xfrm>
             <a:off x="525960" y="1665360"/>
-            <a:ext cx="5146560" cy="421200"/>
+            <a:ext cx="5145480" cy="420120"/>
           </a:xfrm>
           <a:prstGeom prst="roundRect">
             <a:avLst>
@@ -18663,7 +18663,7 @@
         <p:spPr>
           <a:xfrm>
             <a:off x="525960" y="1728000"/>
-            <a:ext cx="5641560" cy="545400"/>
+            <a:ext cx="5640480" cy="544320"/>
           </a:xfrm>
           <a:prstGeom prst="rect">
             <a:avLst/>
@@ -18723,7 +18723,7 @@
         <p:spPr>
           <a:xfrm>
             <a:off x="525960" y="2205360"/>
-            <a:ext cx="5146560" cy="421200"/>
+            <a:ext cx="5145480" cy="420120"/>
           </a:xfrm>
           <a:prstGeom prst="roundRect">
             <a:avLst>
@@ -18735,7 +18735,7 @@
           </a:solidFill>
           <a:ln w="18000">
             <a:solidFill>
-              <a:srgbClr val="d3d3d3"/>
+              <a:srgbClr val="ff950e"/>
             </a:solidFill>
             <a:round/>
           </a:ln>
@@ -18797,7 +18797,7 @@
         <p:spPr>
           <a:xfrm>
             <a:off x="525960" y="3280680"/>
-            <a:ext cx="5146560" cy="421200"/>
+            <a:ext cx="5145480" cy="420120"/>
           </a:xfrm>
           <a:prstGeom prst="roundRect">
             <a:avLst>
@@ -18809,7 +18809,7 @@
           </a:solidFill>
           <a:ln w="18000">
             <a:solidFill>
-              <a:srgbClr val="d3d3d3"/>
+              <a:srgbClr val="ff950e"/>
             </a:solidFill>
             <a:round/>
           </a:ln>
@@ -18871,7 +18871,7 @@
         <p:spPr>
           <a:xfrm>
             <a:off x="525960" y="3816000"/>
-            <a:ext cx="5146560" cy="421200"/>
+            <a:ext cx="5145480" cy="420120"/>
           </a:xfrm>
           <a:prstGeom prst="roundRect">
             <a:avLst>
@@ -18883,7 +18883,7 @@
           </a:solidFill>
           <a:ln w="18000">
             <a:solidFill>
-              <a:srgbClr val="d3d3d3"/>
+              <a:srgbClr val="ff950e"/>
             </a:solidFill>
             <a:round/>
           </a:ln>
@@ -18945,7 +18945,7 @@
         <p:spPr>
           <a:xfrm>
             <a:off x="525960" y="2258640"/>
-            <a:ext cx="5641560" cy="545400"/>
+            <a:ext cx="5640480" cy="544320"/>
           </a:xfrm>
           <a:prstGeom prst="rect">
             <a:avLst/>
@@ -19005,7 +19005,7 @@
         <p:spPr>
           <a:xfrm>
             <a:off x="525960" y="4363200"/>
-            <a:ext cx="5146560" cy="421200"/>
+            <a:ext cx="5145480" cy="420120"/>
           </a:xfrm>
           <a:prstGeom prst="roundRect">
             <a:avLst>
@@ -19017,7 +19017,7 @@
           </a:solidFill>
           <a:ln w="18000">
             <a:solidFill>
-              <a:srgbClr val="d3d3d3"/>
+              <a:srgbClr val="ff950e"/>
             </a:solidFill>
             <a:round/>
           </a:ln>
@@ -19079,7 +19079,7 @@
         <p:spPr>
           <a:xfrm>
             <a:off x="525960" y="3345840"/>
-            <a:ext cx="5641560" cy="545400"/>
+            <a:ext cx="5640480" cy="544320"/>
           </a:xfrm>
           <a:prstGeom prst="rect">
             <a:avLst/>
@@ -19139,7 +19139,7 @@
         <p:spPr>
           <a:xfrm>
             <a:off x="525960" y="4898520"/>
-            <a:ext cx="5146560" cy="421200"/>
+            <a:ext cx="5145480" cy="420120"/>
           </a:xfrm>
           <a:prstGeom prst="roundRect">
             <a:avLst>
@@ -19151,7 +19151,7 @@
           </a:solidFill>
           <a:ln w="18000">
             <a:solidFill>
-              <a:srgbClr val="d3d3d3"/>
+              <a:srgbClr val="ff00ff"/>
             </a:solidFill>
             <a:round/>
           </a:ln>
@@ -19213,7 +19213,7 @@
         <p:spPr>
           <a:xfrm>
             <a:off x="525960" y="3881160"/>
-            <a:ext cx="5641560" cy="545400"/>
+            <a:ext cx="5640480" cy="544320"/>
           </a:xfrm>
           <a:prstGeom prst="rect">
             <a:avLst/>
@@ -19273,7 +19273,7 @@
         <p:spPr>
           <a:xfrm>
             <a:off x="525960" y="5441760"/>
-            <a:ext cx="5146560" cy="421200"/>
+            <a:ext cx="5145480" cy="420120"/>
           </a:xfrm>
           <a:prstGeom prst="roundRect">
             <a:avLst>
@@ -19285,7 +19285,7 @@
           </a:solidFill>
           <a:ln w="18000">
             <a:solidFill>
-              <a:srgbClr val="d3d3d3"/>
+              <a:srgbClr val="ff00ff"/>
             </a:solidFill>
             <a:round/>
           </a:ln>
@@ -19347,7 +19347,7 @@
         <p:spPr>
           <a:xfrm>
             <a:off x="525960" y="4932000"/>
-            <a:ext cx="5641560" cy="545400"/>
+            <a:ext cx="5640480" cy="544320"/>
           </a:xfrm>
           <a:prstGeom prst="rect">
             <a:avLst/>
@@ -19407,7 +19407,7 @@
         <p:spPr>
           <a:xfrm>
             <a:off x="525960" y="5467320"/>
-            <a:ext cx="5641560" cy="545400"/>
+            <a:ext cx="5640480" cy="544320"/>
           </a:xfrm>
           <a:prstGeom prst="rect">
             <a:avLst/>
@@ -19467,7 +19467,7 @@
         <p:spPr>
           <a:xfrm>
             <a:off x="525960" y="4421160"/>
-            <a:ext cx="5641560" cy="545400"/>
+            <a:ext cx="5640480" cy="544320"/>
           </a:xfrm>
           <a:prstGeom prst="rect">
             <a:avLst/>
@@ -19527,7 +19527,7 @@
         <p:spPr>
           <a:xfrm>
             <a:off x="521280" y="2740680"/>
-            <a:ext cx="5146560" cy="421200"/>
+            <a:ext cx="5145480" cy="420120"/>
           </a:xfrm>
           <a:prstGeom prst="roundRect">
             <a:avLst>
@@ -19539,7 +19539,7 @@
           </a:solidFill>
           <a:ln w="18000">
             <a:solidFill>
-              <a:srgbClr val="d3d3d3"/>
+              <a:srgbClr val="ff950e"/>
             </a:solidFill>
             <a:round/>
           </a:ln>
@@ -19601,7 +19601,7 @@
         <p:spPr>
           <a:xfrm>
             <a:off x="521280" y="2793960"/>
-            <a:ext cx="5641560" cy="545400"/>
+            <a:ext cx="5640480" cy="544320"/>
           </a:xfrm>
           <a:prstGeom prst="rect">
             <a:avLst/>
@@ -19691,14 +19691,14 @@
       </p:grpSpPr>
       <p:sp>
         <p:nvSpPr>
-          <p:cNvPr id="357" name="Shape 100"/>
+          <p:cNvPr id="358" name="Shape 100"/>
           <p:cNvSpPr/>
           <p:nvPr/>
         </p:nvSpPr>
         <p:spPr>
           <a:xfrm>
             <a:off x="0" y="0"/>
-            <a:ext cx="12188520" cy="161280"/>
+            <a:ext cx="12187440" cy="160200"/>
           </a:xfrm>
           <a:prstGeom prst="rect">
             <a:avLst/>
@@ -19738,14 +19738,14 @@
       </p:sp>
       <p:sp>
         <p:nvSpPr>
-          <p:cNvPr id="358" name="Shape 101"/>
+          <p:cNvPr id="359" name="Shape 101"/>
           <p:cNvSpPr/>
           <p:nvPr/>
         </p:nvSpPr>
         <p:spPr>
           <a:xfrm>
             <a:off x="0" y="6510600"/>
-            <a:ext cx="12188520" cy="362520"/>
+            <a:ext cx="12187440" cy="361440"/>
           </a:xfrm>
           <a:prstGeom prst="rect">
             <a:avLst/>
@@ -19785,14 +19785,14 @@
       </p:sp>
       <p:sp>
         <p:nvSpPr>
-          <p:cNvPr id="359" name="Text 56"/>
+          <p:cNvPr id="360" name="Text 56"/>
           <p:cNvSpPr/>
           <p:nvPr/>
         </p:nvSpPr>
         <p:spPr>
           <a:xfrm>
             <a:off x="540000" y="388800"/>
-            <a:ext cx="6717600" cy="1048320"/>
+            <a:ext cx="6716520" cy="1047240"/>
           </a:xfrm>
           <a:prstGeom prst="rect">
             <a:avLst/>
@@ -19845,19 +19845,19 @@
       </p:sp>
       <p:pic>
         <p:nvPicPr>
-          <p:cNvPr id="360" name="" descr=""/>
+          <p:cNvPr id="361" name="" descr=""/>
           <p:cNvPicPr/>
           <p:nvPr/>
         </p:nvPicPr>
         <p:blipFill>
           <a:blip r:embed="rId1"/>
-          <a:srcRect l="0" t="26241" r="0" b="23016"/>
+          <a:srcRect l="0" t="26247" r="0" b="23016"/>
           <a:stretch/>
         </p:blipFill>
         <p:spPr>
           <a:xfrm>
             <a:off x="10038240" y="288360"/>
-            <a:ext cx="1946880" cy="536760"/>
+            <a:ext cx="1945800" cy="535680"/>
           </a:xfrm>
           <a:prstGeom prst="rect">
             <a:avLst/>
@@ -19869,14 +19869,14 @@
       </p:pic>
       <p:sp>
         <p:nvSpPr>
-          <p:cNvPr id="361" name="Shape 102"/>
+          <p:cNvPr id="362" name="Shape 102"/>
           <p:cNvSpPr/>
           <p:nvPr/>
         </p:nvSpPr>
         <p:spPr>
           <a:xfrm>
             <a:off x="612000" y="1756080"/>
-            <a:ext cx="3345120" cy="4361040"/>
+            <a:ext cx="3344040" cy="4359960"/>
           </a:xfrm>
           <a:prstGeom prst="roundRect">
             <a:avLst>
@@ -19943,14 +19943,14 @@
       </p:sp>
       <p:sp>
         <p:nvSpPr>
-          <p:cNvPr id="362" name="Text 58"/>
+          <p:cNvPr id="363" name="Text 58"/>
           <p:cNvSpPr/>
           <p:nvPr/>
         </p:nvSpPr>
         <p:spPr>
           <a:xfrm>
             <a:off x="168120" y="6538320"/>
-            <a:ext cx="2997000" cy="316800"/>
+            <a:ext cx="2995920" cy="315720"/>
           </a:xfrm>
           <a:prstGeom prst="rect">
             <a:avLst/>
@@ -19997,14 +19997,14 @@
       </p:sp>
       <p:sp>
         <p:nvSpPr>
-          <p:cNvPr id="363" name=""/>
+          <p:cNvPr id="364" name=""/>
           <p:cNvSpPr/>
           <p:nvPr/>
         </p:nvSpPr>
         <p:spPr>
           <a:xfrm>
             <a:off x="560880" y="971280"/>
-            <a:ext cx="9474480" cy="285840"/>
+            <a:ext cx="9473400" cy="284760"/>
           </a:xfrm>
           <a:prstGeom prst="rect">
             <a:avLst/>
@@ -20057,14 +20057,14 @@
       </p:sp>
       <p:sp>
         <p:nvSpPr>
-          <p:cNvPr id="364" name=""/>
+          <p:cNvPr id="365" name=""/>
           <p:cNvSpPr/>
           <p:nvPr/>
         </p:nvSpPr>
         <p:spPr>
           <a:xfrm rot="21590400">
             <a:off x="869400" y="1886760"/>
-            <a:ext cx="2553120" cy="3938760"/>
+            <a:ext cx="2552040" cy="3937680"/>
           </a:xfrm>
           <a:prstGeom prst="rect">
             <a:avLst/>
@@ -20523,14 +20523,14 @@
       </p:sp>
       <p:sp>
         <p:nvSpPr>
-          <p:cNvPr id="365" name="Shape 103"/>
+          <p:cNvPr id="366" name="Shape 103"/>
           <p:cNvSpPr/>
           <p:nvPr/>
         </p:nvSpPr>
         <p:spPr>
           <a:xfrm>
             <a:off x="4320000" y="1756440"/>
-            <a:ext cx="7737120" cy="4361040"/>
+            <a:ext cx="7736040" cy="4359960"/>
           </a:xfrm>
           <a:prstGeom prst="roundRect">
             <a:avLst>
@@ -20597,7 +20597,7 @@
       </p:sp>
       <p:pic>
         <p:nvPicPr>
-          <p:cNvPr id="366" name="" descr=""/>
+          <p:cNvPr id="367" name="" descr=""/>
           <p:cNvPicPr/>
           <p:nvPr/>
         </p:nvPicPr>
@@ -20609,7 +20609,7 @@
         <p:spPr>
           <a:xfrm>
             <a:off x="4140000" y="5710320"/>
-            <a:ext cx="681120" cy="681120"/>
+            <a:ext cx="680040" cy="680040"/>
           </a:xfrm>
           <a:prstGeom prst="rect">
             <a:avLst/>
@@ -20621,7 +20621,7 @@
       </p:pic>
       <p:pic>
         <p:nvPicPr>
-          <p:cNvPr id="367" name="" descr=""/>
+          <p:cNvPr id="368" name="" descr=""/>
           <p:cNvPicPr/>
           <p:nvPr/>
         </p:nvPicPr>
@@ -20632,7 +20632,7 @@
         <p:spPr>
           <a:xfrm>
             <a:off x="-36000" y="5624640"/>
-            <a:ext cx="1383120" cy="852840"/>
+            <a:ext cx="1382040" cy="851760"/>
           </a:xfrm>
           <a:prstGeom prst="rect">
             <a:avLst/>
@@ -20644,7 +20644,7 @@
       </p:pic>
       <p:pic>
         <p:nvPicPr>
-          <p:cNvPr id="368" name="" descr=""/>
+          <p:cNvPr id="369" name="" descr=""/>
           <p:cNvPicPr/>
           <p:nvPr/>
         </p:nvPicPr>
@@ -20655,7 +20655,7 @@
         <p:spPr>
           <a:xfrm>
             <a:off x="5716440" y="2411640"/>
-            <a:ext cx="6306480" cy="3106080"/>
+            <a:ext cx="6305400" cy="3105000"/>
           </a:xfrm>
           <a:prstGeom prst="rect">
             <a:avLst/>
@@ -20667,14 +20667,14 @@
       </p:pic>
       <p:sp>
         <p:nvSpPr>
-          <p:cNvPr id="369" name=""/>
+          <p:cNvPr id="370" name=""/>
           <p:cNvSpPr/>
           <p:nvPr/>
         </p:nvSpPr>
         <p:spPr>
           <a:xfrm>
             <a:off x="504000" y="1440000"/>
-            <a:ext cx="3237120" cy="313200"/>
+            <a:ext cx="3236040" cy="312120"/>
           </a:xfrm>
           <a:prstGeom prst="rect">
             <a:avLst/>
@@ -20721,14 +20721,14 @@
       </p:sp>
       <p:sp>
         <p:nvSpPr>
-          <p:cNvPr id="370" name=""/>
+          <p:cNvPr id="371" name=""/>
           <p:cNvSpPr/>
           <p:nvPr/>
         </p:nvSpPr>
         <p:spPr>
           <a:xfrm>
             <a:off x="4212000" y="1440000"/>
-            <a:ext cx="2373120" cy="313200"/>
+            <a:ext cx="2372040" cy="312120"/>
           </a:xfrm>
           <a:prstGeom prst="rect">
             <a:avLst/>
@@ -20775,7 +20775,7 @@
       </p:sp>
       <p:sp>
         <p:nvSpPr>
-          <p:cNvPr id="371" name="forma_edad 7">
+          <p:cNvPr id="372" name="forma_edad 7">
             <a:hlinkClick r:id="rId5" action="ppaction://hlinksldjump"/>
           </p:cNvPr>
           <p:cNvSpPr/>
@@ -20784,7 +20784,7 @@
         <p:spPr>
           <a:xfrm>
             <a:off x="4322160" y="1884600"/>
-            <a:ext cx="1077120" cy="357120"/>
+            <a:ext cx="1076040" cy="356040"/>
           </a:xfrm>
           <a:prstGeom prst="roundRect">
             <a:avLst>
@@ -20861,7 +20861,7 @@
       </p:sp>
       <p:sp>
         <p:nvSpPr>
-          <p:cNvPr id="372" name="boton_educativo 7">
+          <p:cNvPr id="373" name="boton_educativo 7">
             <a:hlinkClick r:id="rId6" action="ppaction://hlinksldjump"/>
           </p:cNvPr>
           <p:cNvSpPr/>
@@ -20870,7 +20870,7 @@
         <p:spPr>
           <a:xfrm>
             <a:off x="4322520" y="2237400"/>
-            <a:ext cx="1076760" cy="357120"/>
+            <a:ext cx="1075680" cy="356040"/>
           </a:xfrm>
           <a:prstGeom prst="roundRect">
             <a:avLst>
@@ -20947,7 +20947,7 @@
       </p:sp>
       <p:sp>
         <p:nvSpPr>
-          <p:cNvPr id="373" name="Shape 86">
+          <p:cNvPr id="374" name="Shape 86">
             <a:hlinkClick r:id="rId7" action="ppaction://hlinksldjump"/>
           </p:cNvPr>
           <p:cNvSpPr/>
@@ -20956,7 +20956,7 @@
         <p:spPr>
           <a:xfrm>
             <a:off x="4322880" y="2590200"/>
-            <a:ext cx="1076400" cy="357120"/>
+            <a:ext cx="1075320" cy="356040"/>
           </a:xfrm>
           <a:prstGeom prst="roundRect">
             <a:avLst>
@@ -21033,7 +21033,7 @@
       </p:sp>
       <p:sp>
         <p:nvSpPr>
-          <p:cNvPr id="374" name="Shape 87">
+          <p:cNvPr id="375" name="Shape 87">
             <a:hlinkClick r:id="rId8" action="ppaction://hlinksldjump"/>
           </p:cNvPr>
           <p:cNvSpPr/>
@@ -21042,7 +21042,7 @@
         <p:spPr>
           <a:xfrm>
             <a:off x="4323240" y="2943000"/>
-            <a:ext cx="1076400" cy="357120"/>
+            <a:ext cx="1075320" cy="356040"/>
           </a:xfrm>
           <a:prstGeom prst="roundRect">
             <a:avLst>
@@ -21119,7 +21119,7 @@
       </p:sp>
       <p:sp>
         <p:nvSpPr>
-          <p:cNvPr id="375" name="Shape 88">
+          <p:cNvPr id="376" name="Shape 88">
             <a:hlinkClick r:id="rId9" action="ppaction://hlinksldjump"/>
           </p:cNvPr>
           <p:cNvSpPr/>
@@ -21128,7 +21128,7 @@
         <p:spPr>
           <a:xfrm>
             <a:off x="4323600" y="3295800"/>
-            <a:ext cx="1076400" cy="565920"/>
+            <a:ext cx="1075320" cy="564840"/>
           </a:xfrm>
           <a:prstGeom prst="roundRect">
             <a:avLst>
@@ -21240,7 +21240,7 @@
       </p:sp>
       <p:sp>
         <p:nvSpPr>
-          <p:cNvPr id="376" name="Shape 89">
+          <p:cNvPr id="377" name="Shape 89">
             <a:hlinkClick r:id="rId10" action="ppaction://hlinksldjump"/>
           </p:cNvPr>
           <p:cNvSpPr/>
@@ -21249,7 +21249,7 @@
         <p:spPr>
           <a:xfrm>
             <a:off x="4323600" y="3835800"/>
-            <a:ext cx="1076400" cy="357120"/>
+            <a:ext cx="1075320" cy="356040"/>
           </a:xfrm>
           <a:prstGeom prst="roundRect">
             <a:avLst>
@@ -21326,7 +21326,7 @@
       </p:sp>
       <p:sp>
         <p:nvSpPr>
-          <p:cNvPr id="377" name="Shape 94">
+          <p:cNvPr id="378" name="Shape 94">
             <a:hlinkClick r:id="rId11" action="ppaction://hlinksldjump"/>
           </p:cNvPr>
           <p:cNvSpPr/>
@@ -21335,7 +21335,7 @@
         <p:spPr>
           <a:xfrm>
             <a:off x="4323960" y="4188600"/>
-            <a:ext cx="1076400" cy="537120"/>
+            <a:ext cx="1075320" cy="536040"/>
           </a:xfrm>
           <a:prstGeom prst="roundRect">
             <a:avLst>
@@ -21412,7 +21412,7 @@
       </p:sp>
       <p:sp>
         <p:nvSpPr>
-          <p:cNvPr id="378" name="Shape 95">
+          <p:cNvPr id="379" name="Shape 95">
             <a:hlinkClick r:id="rId12" action="ppaction://hlinksldjump"/>
           </p:cNvPr>
           <p:cNvSpPr/>
@@ -21421,7 +21421,7 @@
         <p:spPr>
           <a:xfrm>
             <a:off x="4324320" y="4737960"/>
-            <a:ext cx="1076400" cy="537120"/>
+            <a:ext cx="1075320" cy="536040"/>
           </a:xfrm>
           <a:prstGeom prst="roundRect">
             <a:avLst>
@@ -21498,14 +21498,14 @@
       </p:sp>
       <p:sp>
         <p:nvSpPr>
-          <p:cNvPr id="379" name="Text 22"/>
+          <p:cNvPr id="380" name="Text 22"/>
           <p:cNvSpPr/>
           <p:nvPr/>
         </p:nvSpPr>
         <p:spPr>
           <a:xfrm>
             <a:off x="2742840" y="6538320"/>
-            <a:ext cx="1395720" cy="316800"/>
+            <a:ext cx="1394640" cy="315720"/>
           </a:xfrm>
           <a:prstGeom prst="rect">
             <a:avLst/>
@@ -21552,14 +21552,14 @@
       </p:sp>
       <p:sp>
         <p:nvSpPr>
-          <p:cNvPr id="380" name="Text 57"/>
+          <p:cNvPr id="381" name="Text 57"/>
           <p:cNvSpPr/>
           <p:nvPr/>
         </p:nvSpPr>
         <p:spPr>
           <a:xfrm>
             <a:off x="11412000" y="6538320"/>
-            <a:ext cx="754560" cy="316800"/>
+            <a:ext cx="753480" cy="315720"/>
           </a:xfrm>
           <a:prstGeom prst="rect">
             <a:avLst/>
@@ -21643,14 +21643,14 @@
       </p:grpSpPr>
       <p:sp>
         <p:nvSpPr>
-          <p:cNvPr id="381" name="Shape 110"/>
+          <p:cNvPr id="382" name="Shape 110"/>
           <p:cNvSpPr/>
           <p:nvPr/>
         </p:nvSpPr>
         <p:spPr>
           <a:xfrm>
             <a:off x="0" y="0"/>
-            <a:ext cx="12188520" cy="161280"/>
+            <a:ext cx="12187440" cy="160200"/>
           </a:xfrm>
           <a:prstGeom prst="rect">
             <a:avLst/>
@@ -21690,14 +21690,14 @@
       </p:sp>
       <p:sp>
         <p:nvSpPr>
-          <p:cNvPr id="382" name="Shape 111"/>
+          <p:cNvPr id="383" name="Shape 111"/>
           <p:cNvSpPr/>
           <p:nvPr/>
         </p:nvSpPr>
         <p:spPr>
           <a:xfrm>
             <a:off x="0" y="6510600"/>
-            <a:ext cx="12188520" cy="362520"/>
+            <a:ext cx="12187440" cy="361440"/>
           </a:xfrm>
           <a:prstGeom prst="rect">
             <a:avLst/>
@@ -21737,14 +21737,14 @@
       </p:sp>
       <p:sp>
         <p:nvSpPr>
-          <p:cNvPr id="383" name="Text 59"/>
+          <p:cNvPr id="384" name="Text 59"/>
           <p:cNvSpPr/>
           <p:nvPr/>
         </p:nvSpPr>
         <p:spPr>
           <a:xfrm>
             <a:off x="540000" y="388800"/>
-            <a:ext cx="6717600" cy="1048320"/>
+            <a:ext cx="6716520" cy="1047240"/>
           </a:xfrm>
           <a:prstGeom prst="rect">
             <a:avLst/>
@@ -21797,19 +21797,19 @@
       </p:sp>
       <p:pic>
         <p:nvPicPr>
-          <p:cNvPr id="384" name="" descr=""/>
+          <p:cNvPr id="385" name="" descr=""/>
           <p:cNvPicPr/>
           <p:nvPr/>
         </p:nvPicPr>
         <p:blipFill>
           <a:blip r:embed="rId1"/>
-          <a:srcRect l="0" t="26241" r="0" b="23016"/>
+          <a:srcRect l="0" t="26247" r="0" b="23016"/>
           <a:stretch/>
         </p:blipFill>
         <p:spPr>
           <a:xfrm>
             <a:off x="10038240" y="288360"/>
-            <a:ext cx="1946880" cy="536760"/>
+            <a:ext cx="1945800" cy="535680"/>
           </a:xfrm>
           <a:prstGeom prst="rect">
             <a:avLst/>
@@ -21821,14 +21821,14 @@
       </p:pic>
       <p:sp>
         <p:nvSpPr>
-          <p:cNvPr id="385" name="Shape 112"/>
+          <p:cNvPr id="386" name="Shape 112"/>
           <p:cNvSpPr/>
           <p:nvPr/>
         </p:nvSpPr>
         <p:spPr>
           <a:xfrm>
             <a:off x="612000" y="1756080"/>
-            <a:ext cx="3345120" cy="4361040"/>
+            <a:ext cx="3344040" cy="4359960"/>
           </a:xfrm>
           <a:prstGeom prst="roundRect">
             <a:avLst>
@@ -21895,14 +21895,14 @@
       </p:sp>
       <p:sp>
         <p:nvSpPr>
-          <p:cNvPr id="386" name="Text 61"/>
+          <p:cNvPr id="387" name="Text 61"/>
           <p:cNvSpPr/>
           <p:nvPr/>
         </p:nvSpPr>
         <p:spPr>
           <a:xfrm>
             <a:off x="168120" y="6538320"/>
-            <a:ext cx="2997000" cy="316800"/>
+            <a:ext cx="2995920" cy="315720"/>
           </a:xfrm>
           <a:prstGeom prst="rect">
             <a:avLst/>
@@ -21949,14 +21949,14 @@
       </p:sp>
       <p:sp>
         <p:nvSpPr>
-          <p:cNvPr id="387" name=""/>
+          <p:cNvPr id="388" name=""/>
           <p:cNvSpPr/>
           <p:nvPr/>
         </p:nvSpPr>
         <p:spPr>
           <a:xfrm>
             <a:off x="560880" y="971280"/>
-            <a:ext cx="9474480" cy="285840"/>
+            <a:ext cx="9473400" cy="284760"/>
           </a:xfrm>
           <a:prstGeom prst="rect">
             <a:avLst/>
@@ -22009,14 +22009,14 @@
       </p:sp>
       <p:sp>
         <p:nvSpPr>
-          <p:cNvPr id="388" name=""/>
+          <p:cNvPr id="389" name=""/>
           <p:cNvSpPr/>
           <p:nvPr/>
         </p:nvSpPr>
         <p:spPr>
           <a:xfrm rot="21590400">
             <a:off x="869400" y="1886760"/>
-            <a:ext cx="2553120" cy="3938760"/>
+            <a:ext cx="2552040" cy="3937680"/>
           </a:xfrm>
           <a:prstGeom prst="rect">
             <a:avLst/>
@@ -22475,7 +22475,7 @@
       </p:sp>
       <p:sp>
         <p:nvSpPr>
-          <p:cNvPr id="389" name="boton_gasto">
+          <p:cNvPr id="390" name="boton_gasto">
             <a:hlinkClick r:id="rId2" action="ppaction://hlinksldjump"/>
           </p:cNvPr>
           <p:cNvSpPr/>
@@ -22484,7 +22484,7 @@
         <p:spPr>
           <a:xfrm>
             <a:off x="4320000" y="1756440"/>
-            <a:ext cx="7737120" cy="4361040"/>
+            <a:ext cx="7736040" cy="4359960"/>
           </a:xfrm>
           <a:prstGeom prst="roundRect">
             <a:avLst>
@@ -22551,7 +22551,7 @@
       </p:sp>
       <p:pic>
         <p:nvPicPr>
-          <p:cNvPr id="390" name="" descr=""/>
+          <p:cNvPr id="391" name="" descr=""/>
           <p:cNvPicPr/>
           <p:nvPr/>
         </p:nvPicPr>
@@ -22563,7 +22563,7 @@
         <p:spPr>
           <a:xfrm>
             <a:off x="4140000" y="5710320"/>
-            <a:ext cx="681120" cy="681120"/>
+            <a:ext cx="680040" cy="680040"/>
           </a:xfrm>
           <a:prstGeom prst="rect">
             <a:avLst/>
@@ -22575,7 +22575,7 @@
       </p:pic>
       <p:pic>
         <p:nvPicPr>
-          <p:cNvPr id="391" name="" descr=""/>
+          <p:cNvPr id="392" name="" descr=""/>
           <p:cNvPicPr/>
           <p:nvPr/>
         </p:nvPicPr>
@@ -22586,7 +22586,7 @@
         <p:spPr>
           <a:xfrm>
             <a:off x="-36000" y="5624640"/>
-            <a:ext cx="1383120" cy="852840"/>
+            <a:ext cx="1382040" cy="851760"/>
           </a:xfrm>
           <a:prstGeom prst="rect">
             <a:avLst/>
@@ -22598,7 +22598,7 @@
       </p:pic>
       <p:pic>
         <p:nvPicPr>
-          <p:cNvPr id="392" name="" descr=""/>
+          <p:cNvPr id="393" name="" descr=""/>
           <p:cNvPicPr/>
           <p:nvPr/>
         </p:nvPicPr>
@@ -22609,7 +22609,7 @@
         <p:spPr>
           <a:xfrm>
             <a:off x="5716440" y="2411640"/>
-            <a:ext cx="6306480" cy="3106080"/>
+            <a:ext cx="6305400" cy="3105000"/>
           </a:xfrm>
           <a:prstGeom prst="rect">
             <a:avLst/>
@@ -22621,14 +22621,14 @@
       </p:pic>
       <p:sp>
         <p:nvSpPr>
-          <p:cNvPr id="393" name=""/>
+          <p:cNvPr id="394" name=""/>
           <p:cNvSpPr/>
           <p:nvPr/>
         </p:nvSpPr>
         <p:spPr>
           <a:xfrm>
             <a:off x="504000" y="1440000"/>
-            <a:ext cx="3237120" cy="313200"/>
+            <a:ext cx="3236040" cy="312120"/>
           </a:xfrm>
           <a:prstGeom prst="rect">
             <a:avLst/>
@@ -22675,14 +22675,14 @@
       </p:sp>
       <p:sp>
         <p:nvSpPr>
-          <p:cNvPr id="394" name=""/>
+          <p:cNvPr id="395" name=""/>
           <p:cNvSpPr/>
           <p:nvPr/>
         </p:nvSpPr>
         <p:spPr>
           <a:xfrm>
             <a:off x="4212000" y="1440000"/>
-            <a:ext cx="2373120" cy="313200"/>
+            <a:ext cx="2372040" cy="312120"/>
           </a:xfrm>
           <a:prstGeom prst="rect">
             <a:avLst/>
@@ -22729,7 +22729,7 @@
       </p:sp>
       <p:sp>
         <p:nvSpPr>
-          <p:cNvPr id="395" name="forma_edad 8">
+          <p:cNvPr id="396" name="forma_edad 8">
             <a:hlinkClick r:id="rId6" action="ppaction://hlinksldjump"/>
           </p:cNvPr>
           <p:cNvSpPr/>
@@ -22738,7 +22738,7 @@
         <p:spPr>
           <a:xfrm>
             <a:off x="4322520" y="1890720"/>
-            <a:ext cx="1077120" cy="357120"/>
+            <a:ext cx="1076040" cy="356040"/>
           </a:xfrm>
           <a:prstGeom prst="roundRect">
             <a:avLst>
@@ -22815,7 +22815,7 @@
       </p:sp>
       <p:sp>
         <p:nvSpPr>
-          <p:cNvPr id="396" name="boton_educativo 8">
+          <p:cNvPr id="397" name="boton_educativo 8">
             <a:hlinkClick r:id="rId7" action="ppaction://hlinksldjump"/>
           </p:cNvPr>
           <p:cNvSpPr/>
@@ -22824,7 +22824,7 @@
         <p:spPr>
           <a:xfrm>
             <a:off x="4322880" y="2243520"/>
-            <a:ext cx="1076760" cy="357120"/>
+            <a:ext cx="1075680" cy="356040"/>
           </a:xfrm>
           <a:prstGeom prst="roundRect">
             <a:avLst>
@@ -22901,7 +22901,7 @@
       </p:sp>
       <p:sp>
         <p:nvSpPr>
-          <p:cNvPr id="397" name="Shape 96">
+          <p:cNvPr id="398" name="Shape 96">
             <a:hlinkClick r:id="rId8" action="ppaction://hlinksldjump"/>
           </p:cNvPr>
           <p:cNvSpPr/>
@@ -22910,7 +22910,7 @@
         <p:spPr>
           <a:xfrm>
             <a:off x="4323240" y="2596320"/>
-            <a:ext cx="1076400" cy="357120"/>
+            <a:ext cx="1075320" cy="356040"/>
           </a:xfrm>
           <a:prstGeom prst="roundRect">
             <a:avLst>
@@ -22987,7 +22987,7 @@
       </p:sp>
       <p:sp>
         <p:nvSpPr>
-          <p:cNvPr id="398" name="Shape 97">
+          <p:cNvPr id="399" name="Shape 97">
             <a:hlinkClick r:id="rId9" action="ppaction://hlinksldjump"/>
           </p:cNvPr>
           <p:cNvSpPr/>
@@ -22996,7 +22996,7 @@
         <p:spPr>
           <a:xfrm>
             <a:off x="4323600" y="2949120"/>
-            <a:ext cx="1076400" cy="357120"/>
+            <a:ext cx="1075320" cy="356040"/>
           </a:xfrm>
           <a:prstGeom prst="roundRect">
             <a:avLst>
@@ -23073,7 +23073,7 @@
       </p:sp>
       <p:sp>
         <p:nvSpPr>
-          <p:cNvPr id="399" name="Shape 98">
+          <p:cNvPr id="400" name="Shape 98">
             <a:hlinkClick r:id="rId10" action="ppaction://hlinksldjump"/>
           </p:cNvPr>
           <p:cNvSpPr/>
@@ -23082,7 +23082,7 @@
         <p:spPr>
           <a:xfrm>
             <a:off x="4323960" y="3301920"/>
-            <a:ext cx="1076400" cy="565920"/>
+            <a:ext cx="1075320" cy="564840"/>
           </a:xfrm>
           <a:prstGeom prst="roundRect">
             <a:avLst>
@@ -23194,7 +23194,7 @@
       </p:sp>
       <p:sp>
         <p:nvSpPr>
-          <p:cNvPr id="400" name="Shape 99">
+          <p:cNvPr id="401" name="Shape 99">
             <a:hlinkClick r:id="rId11" action="ppaction://hlinksldjump"/>
           </p:cNvPr>
           <p:cNvSpPr/>
@@ -23203,7 +23203,7 @@
         <p:spPr>
           <a:xfrm>
             <a:off x="4323960" y="3841920"/>
-            <a:ext cx="1076400" cy="357120"/>
+            <a:ext cx="1075320" cy="356040"/>
           </a:xfrm>
           <a:prstGeom prst="roundRect">
             <a:avLst>
@@ -23280,7 +23280,7 @@
       </p:sp>
       <p:sp>
         <p:nvSpPr>
-          <p:cNvPr id="401" name="Shape 104">
+          <p:cNvPr id="402" name="Shape 104">
             <a:hlinkClick r:id="rId12" action="ppaction://hlinksldjump"/>
           </p:cNvPr>
           <p:cNvSpPr/>
@@ -23289,7 +23289,7 @@
         <p:spPr>
           <a:xfrm>
             <a:off x="4324320" y="4194720"/>
-            <a:ext cx="1076400" cy="537120"/>
+            <a:ext cx="1075320" cy="536040"/>
           </a:xfrm>
           <a:prstGeom prst="roundRect">
             <a:avLst>
@@ -23366,7 +23366,7 @@
       </p:sp>
       <p:sp>
         <p:nvSpPr>
-          <p:cNvPr id="402" name="Shape 105">
+          <p:cNvPr id="403" name="Shape 105">
             <a:hlinkClick r:id="rId13" action="ppaction://hlinksldjump"/>
           </p:cNvPr>
           <p:cNvSpPr/>
@@ -23375,7 +23375,7 @@
         <p:spPr>
           <a:xfrm>
             <a:off x="4324680" y="4744080"/>
-            <a:ext cx="1076400" cy="537120"/>
+            <a:ext cx="1075320" cy="536040"/>
           </a:xfrm>
           <a:prstGeom prst="roundRect">
             <a:avLst>
@@ -23452,14 +23452,14 @@
       </p:sp>
       <p:sp>
         <p:nvSpPr>
-          <p:cNvPr id="403" name="Text 23"/>
+          <p:cNvPr id="404" name="Text 23"/>
           <p:cNvSpPr/>
           <p:nvPr/>
         </p:nvSpPr>
         <p:spPr>
           <a:xfrm>
             <a:off x="2742840" y="6538320"/>
-            <a:ext cx="1395720" cy="316800"/>
+            <a:ext cx="1394640" cy="315720"/>
           </a:xfrm>
           <a:prstGeom prst="rect">
             <a:avLst/>
@@ -23506,14 +23506,14 @@
       </p:sp>
       <p:sp>
         <p:nvSpPr>
-          <p:cNvPr id="404" name="Text 60"/>
+          <p:cNvPr id="405" name="Text 60"/>
           <p:cNvSpPr/>
           <p:nvPr/>
         </p:nvSpPr>
         <p:spPr>
           <a:xfrm>
             <a:off x="11412000" y="6538320"/>
-            <a:ext cx="754560" cy="316800"/>
+            <a:ext cx="753480" cy="315720"/>
           </a:xfrm>
           <a:prstGeom prst="rect">
             <a:avLst/>
@@ -23597,14 +23597,14 @@
       </p:grpSpPr>
       <p:sp>
         <p:nvSpPr>
-          <p:cNvPr id="405" name="Shape 106"/>
+          <p:cNvPr id="406" name="Shape 106"/>
           <p:cNvSpPr/>
           <p:nvPr/>
         </p:nvSpPr>
         <p:spPr>
           <a:xfrm>
             <a:off x="0" y="0"/>
-            <a:ext cx="12188520" cy="161280"/>
+            <a:ext cx="12187440" cy="160200"/>
           </a:xfrm>
           <a:prstGeom prst="rect">
             <a:avLst/>
@@ -23644,14 +23644,14 @@
       </p:sp>
       <p:sp>
         <p:nvSpPr>
-          <p:cNvPr id="406" name="Shape 107"/>
+          <p:cNvPr id="407" name="Shape 107"/>
           <p:cNvSpPr/>
           <p:nvPr/>
         </p:nvSpPr>
         <p:spPr>
           <a:xfrm>
             <a:off x="0" y="6510600"/>
-            <a:ext cx="12188520" cy="362520"/>
+            <a:ext cx="12187440" cy="361440"/>
           </a:xfrm>
           <a:prstGeom prst="rect">
             <a:avLst/>
@@ -23691,14 +23691,14 @@
       </p:sp>
       <p:sp>
         <p:nvSpPr>
-          <p:cNvPr id="407" name="Text 50"/>
+          <p:cNvPr id="408" name="Text 50"/>
           <p:cNvSpPr/>
           <p:nvPr/>
         </p:nvSpPr>
         <p:spPr>
           <a:xfrm>
             <a:off x="540000" y="388800"/>
-            <a:ext cx="6477840" cy="1048320"/>
+            <a:ext cx="6476760" cy="1047240"/>
           </a:xfrm>
           <a:prstGeom prst="rect">
             <a:avLst/>
@@ -23751,19 +23751,19 @@
       </p:sp>
       <p:pic>
         <p:nvPicPr>
-          <p:cNvPr id="408" name="" descr=""/>
+          <p:cNvPr id="409" name="" descr=""/>
           <p:cNvPicPr/>
           <p:nvPr/>
         </p:nvPicPr>
         <p:blipFill>
           <a:blip r:embed="rId1"/>
-          <a:srcRect l="0" t="26241" r="0" b="23016"/>
+          <a:srcRect l="0" t="26247" r="0" b="23016"/>
           <a:stretch/>
         </p:blipFill>
         <p:spPr>
           <a:xfrm>
             <a:off x="10038240" y="288360"/>
-            <a:ext cx="1946880" cy="536760"/>
+            <a:ext cx="1945800" cy="535680"/>
           </a:xfrm>
           <a:prstGeom prst="rect">
             <a:avLst/>
@@ -23775,7 +23775,7 @@
       </p:pic>
       <p:sp>
         <p:nvSpPr>
-          <p:cNvPr id="409" name="Shape 108">
+          <p:cNvPr id="410" name="Shape 108">
             <a:hlinkClick r:id="rId2" action="ppaction://hlinksldjump"/>
           </p:cNvPr>
           <p:cNvSpPr/>
@@ -23784,7 +23784,7 @@
         <p:spPr>
           <a:xfrm>
             <a:off x="612000" y="1936080"/>
-            <a:ext cx="10725120" cy="1481760"/>
+            <a:ext cx="10724040" cy="1480680"/>
           </a:xfrm>
           <a:prstGeom prst="roundRect">
             <a:avLst>
@@ -23887,14 +23887,14 @@
       </p:sp>
       <p:sp>
         <p:nvSpPr>
-          <p:cNvPr id="410" name="Text 52"/>
+          <p:cNvPr id="411" name="Text 52"/>
           <p:cNvSpPr/>
           <p:nvPr/>
         </p:nvSpPr>
         <p:spPr>
           <a:xfrm>
             <a:off x="168120" y="6538320"/>
-            <a:ext cx="2997000" cy="316800"/>
+            <a:ext cx="2995920" cy="315720"/>
           </a:xfrm>
           <a:prstGeom prst="rect">
             <a:avLst/>
@@ -23941,14 +23941,14 @@
       </p:sp>
       <p:sp>
         <p:nvSpPr>
-          <p:cNvPr id="411" name=""/>
+          <p:cNvPr id="412" name=""/>
           <p:cNvSpPr/>
           <p:nvPr/>
         </p:nvSpPr>
         <p:spPr>
           <a:xfrm>
             <a:off x="648000" y="1584000"/>
-            <a:ext cx="3237120" cy="313200"/>
+            <a:ext cx="3236040" cy="312120"/>
           </a:xfrm>
           <a:prstGeom prst="rect">
             <a:avLst/>
@@ -23995,14 +23995,14 @@
       </p:sp>
       <p:sp>
         <p:nvSpPr>
-          <p:cNvPr id="412" name=""/>
+          <p:cNvPr id="413" name=""/>
           <p:cNvSpPr/>
           <p:nvPr/>
         </p:nvSpPr>
         <p:spPr>
           <a:xfrm>
             <a:off x="560880" y="971280"/>
-            <a:ext cx="9474480" cy="285840"/>
+            <a:ext cx="9473400" cy="284760"/>
           </a:xfrm>
           <a:prstGeom prst="rect">
             <a:avLst/>
@@ -24055,14 +24055,14 @@
       </p:sp>
       <p:sp>
         <p:nvSpPr>
-          <p:cNvPr id="413" name=""/>
+          <p:cNvPr id="414" name=""/>
           <p:cNvSpPr/>
           <p:nvPr/>
         </p:nvSpPr>
         <p:spPr>
           <a:xfrm rot="21590400">
-            <a:off x="864000" y="1875600"/>
-            <a:ext cx="10468440" cy="1722240"/>
+            <a:off x="862920" y="1875600"/>
+            <a:ext cx="10467360" cy="1721160"/>
           </a:xfrm>
           <a:prstGeom prst="rect">
             <a:avLst/>
@@ -24170,14 +24170,14 @@
       </p:sp>
       <p:sp>
         <p:nvSpPr>
-          <p:cNvPr id="414" name=""/>
+          <p:cNvPr id="415" name=""/>
           <p:cNvSpPr/>
           <p:nvPr/>
         </p:nvSpPr>
         <p:spPr>
           <a:xfrm>
             <a:off x="648000" y="3960000"/>
-            <a:ext cx="3237120" cy="313200"/>
+            <a:ext cx="3236040" cy="312120"/>
           </a:xfrm>
           <a:prstGeom prst="rect">
             <a:avLst/>
@@ -24240,14 +24240,14 @@
       </p:sp>
       <p:sp>
         <p:nvSpPr>
-          <p:cNvPr id="415" name="Shape 109"/>
+          <p:cNvPr id="416" name="Shape 109"/>
           <p:cNvSpPr/>
           <p:nvPr/>
         </p:nvSpPr>
         <p:spPr>
           <a:xfrm>
             <a:off x="612000" y="4319640"/>
-            <a:ext cx="10725120" cy="1402200"/>
+            <a:ext cx="10724040" cy="1401120"/>
           </a:xfrm>
           <a:prstGeom prst="roundRect">
             <a:avLst>
@@ -24439,14 +24439,14 @@
       </p:sp>
       <p:sp>
         <p:nvSpPr>
-          <p:cNvPr id="416" name="Text 24"/>
+          <p:cNvPr id="417" name="Text 24"/>
           <p:cNvSpPr/>
           <p:nvPr/>
         </p:nvSpPr>
         <p:spPr>
           <a:xfrm>
             <a:off x="2742840" y="6538320"/>
-            <a:ext cx="1395720" cy="316800"/>
+            <a:ext cx="1394640" cy="315720"/>
           </a:xfrm>
           <a:prstGeom prst="rect">
             <a:avLst/>
@@ -24493,14 +24493,14 @@
       </p:sp>
       <p:sp>
         <p:nvSpPr>
-          <p:cNvPr id="417" name="Text 51"/>
+          <p:cNvPr id="418" name="Text 51"/>
           <p:cNvSpPr/>
           <p:nvPr/>
         </p:nvSpPr>
         <p:spPr>
           <a:xfrm>
             <a:off x="11412000" y="6538320"/>
-            <a:ext cx="754560" cy="316800"/>
+            <a:ext cx="753480" cy="315720"/>
           </a:xfrm>
           <a:prstGeom prst="rect">
             <a:avLst/>
@@ -24584,14 +24584,14 @@
       </p:grpSpPr>
       <p:sp>
         <p:nvSpPr>
-          <p:cNvPr id="418" name="Shape 121"/>
+          <p:cNvPr id="419" name="Shape 121"/>
           <p:cNvSpPr/>
           <p:nvPr/>
         </p:nvSpPr>
         <p:spPr>
           <a:xfrm>
             <a:off x="0" y="0"/>
-            <a:ext cx="12188520" cy="161280"/>
+            <a:ext cx="12187440" cy="160200"/>
           </a:xfrm>
           <a:prstGeom prst="rect">
             <a:avLst/>
@@ -24631,14 +24631,14 @@
       </p:sp>
       <p:sp>
         <p:nvSpPr>
-          <p:cNvPr id="419" name="Shape 122"/>
+          <p:cNvPr id="420" name="Shape 122"/>
           <p:cNvSpPr/>
           <p:nvPr/>
         </p:nvSpPr>
         <p:spPr>
           <a:xfrm>
             <a:off x="0" y="6510600"/>
-            <a:ext cx="12188520" cy="362520"/>
+            <a:ext cx="12187440" cy="361440"/>
           </a:xfrm>
           <a:prstGeom prst="rect">
             <a:avLst/>
@@ -24678,14 +24678,14 @@
       </p:sp>
       <p:sp>
         <p:nvSpPr>
-          <p:cNvPr id="420" name="Text 68"/>
+          <p:cNvPr id="421" name="Text 68"/>
           <p:cNvSpPr/>
           <p:nvPr/>
         </p:nvSpPr>
         <p:spPr>
           <a:xfrm>
             <a:off x="540000" y="388800"/>
-            <a:ext cx="6477840" cy="1048320"/>
+            <a:ext cx="6476760" cy="1047240"/>
           </a:xfrm>
           <a:prstGeom prst="rect">
             <a:avLst/>
@@ -24738,19 +24738,19 @@
       </p:sp>
       <p:pic>
         <p:nvPicPr>
-          <p:cNvPr id="421" name="" descr=""/>
+          <p:cNvPr id="422" name="" descr=""/>
           <p:cNvPicPr/>
           <p:nvPr/>
         </p:nvPicPr>
         <p:blipFill>
           <a:blip r:embed="rId1"/>
-          <a:srcRect l="0" t="26241" r="0" b="23016"/>
+          <a:srcRect l="0" t="26247" r="0" b="23016"/>
           <a:stretch/>
         </p:blipFill>
         <p:spPr>
           <a:xfrm>
             <a:off x="10038240" y="288360"/>
-            <a:ext cx="1946880" cy="536760"/>
+            <a:ext cx="1945800" cy="535680"/>
           </a:xfrm>
           <a:prstGeom prst="rect">
             <a:avLst/>
@@ -24762,14 +24762,14 @@
       </p:pic>
       <p:sp>
         <p:nvSpPr>
-          <p:cNvPr id="422" name="Text 70"/>
+          <p:cNvPr id="423" name="Text 70"/>
           <p:cNvSpPr/>
           <p:nvPr/>
         </p:nvSpPr>
         <p:spPr>
           <a:xfrm>
             <a:off x="168120" y="6538320"/>
-            <a:ext cx="2997000" cy="316800"/>
+            <a:ext cx="2995920" cy="315720"/>
           </a:xfrm>
           <a:prstGeom prst="rect">
             <a:avLst/>
@@ -24816,14 +24816,14 @@
       </p:sp>
       <p:sp>
         <p:nvSpPr>
-          <p:cNvPr id="423" name=""/>
+          <p:cNvPr id="424" name=""/>
           <p:cNvSpPr/>
           <p:nvPr/>
         </p:nvSpPr>
         <p:spPr>
           <a:xfrm>
             <a:off x="648000" y="1584000"/>
-            <a:ext cx="3237120" cy="313200"/>
+            <a:ext cx="3236040" cy="312120"/>
           </a:xfrm>
           <a:prstGeom prst="rect">
             <a:avLst/>
@@ -24870,14 +24870,14 @@
       </p:sp>
       <p:sp>
         <p:nvSpPr>
-          <p:cNvPr id="424" name=""/>
+          <p:cNvPr id="425" name=""/>
           <p:cNvSpPr/>
           <p:nvPr/>
         </p:nvSpPr>
         <p:spPr>
           <a:xfrm>
             <a:off x="560880" y="971280"/>
-            <a:ext cx="9474480" cy="285840"/>
+            <a:ext cx="9473400" cy="284760"/>
           </a:xfrm>
           <a:prstGeom prst="rect">
             <a:avLst/>
@@ -24930,14 +24930,14 @@
       </p:sp>
       <p:sp>
         <p:nvSpPr>
-          <p:cNvPr id="425" name=""/>
+          <p:cNvPr id="426" name=""/>
           <p:cNvSpPr/>
           <p:nvPr/>
         </p:nvSpPr>
         <p:spPr>
           <a:xfrm rot="21590400">
-            <a:off x="864000" y="1875600"/>
-            <a:ext cx="10468440" cy="1722240"/>
+            <a:off x="862920" y="1875600"/>
+            <a:ext cx="10467360" cy="1721160"/>
           </a:xfrm>
           <a:prstGeom prst="rect">
             <a:avLst/>
@@ -25045,14 +25045,14 @@
       </p:sp>
       <p:sp>
         <p:nvSpPr>
-          <p:cNvPr id="426" name=""/>
+          <p:cNvPr id="427" name=""/>
           <p:cNvSpPr/>
           <p:nvPr/>
         </p:nvSpPr>
         <p:spPr>
           <a:xfrm>
             <a:off x="648000" y="3960000"/>
-            <a:ext cx="3237120" cy="313200"/>
+            <a:ext cx="3236040" cy="312120"/>
           </a:xfrm>
           <a:prstGeom prst="rect">
             <a:avLst/>
@@ -25115,7 +25115,7 @@
       </p:sp>
       <p:sp>
         <p:nvSpPr>
-          <p:cNvPr id="427" name="Shape 124">
+          <p:cNvPr id="428" name="Shape 124">
             <a:hlinkClick r:id="rId2" action="ppaction://hlinksldjump"/>
           </p:cNvPr>
           <p:cNvSpPr/>
@@ -25124,7 +25124,7 @@
         <p:spPr>
           <a:xfrm>
             <a:off x="612000" y="4319640"/>
-            <a:ext cx="10725120" cy="1402200"/>
+            <a:ext cx="10724040" cy="1401120"/>
           </a:xfrm>
           <a:prstGeom prst="roundRect">
             <a:avLst>
@@ -25316,14 +25316,14 @@
       </p:sp>
       <p:sp>
         <p:nvSpPr>
-          <p:cNvPr id="428" name="Shape 125"/>
+          <p:cNvPr id="429" name="Shape 125"/>
           <p:cNvSpPr/>
           <p:nvPr/>
         </p:nvSpPr>
         <p:spPr>
           <a:xfrm>
             <a:off x="612000" y="1960200"/>
-            <a:ext cx="10725120" cy="1652400"/>
+            <a:ext cx="10724040" cy="1651320"/>
           </a:xfrm>
           <a:prstGeom prst="roundRect">
             <a:avLst>
@@ -25464,14 +25464,14 @@
       </p:sp>
       <p:sp>
         <p:nvSpPr>
-          <p:cNvPr id="429" name="Text 25"/>
+          <p:cNvPr id="430" name="Text 25"/>
           <p:cNvSpPr/>
           <p:nvPr/>
         </p:nvSpPr>
         <p:spPr>
           <a:xfrm>
             <a:off x="2742840" y="6538320"/>
-            <a:ext cx="1395720" cy="316800"/>
+            <a:ext cx="1394640" cy="315720"/>
           </a:xfrm>
           <a:prstGeom prst="rect">
             <a:avLst/>
@@ -25518,14 +25518,14 @@
       </p:sp>
       <p:sp>
         <p:nvSpPr>
-          <p:cNvPr id="430" name="Text 69"/>
+          <p:cNvPr id="431" name="Text 69"/>
           <p:cNvSpPr/>
           <p:nvPr/>
         </p:nvSpPr>
         <p:spPr>
           <a:xfrm>
             <a:off x="11412000" y="6538320"/>
-            <a:ext cx="754560" cy="316800"/>
+            <a:ext cx="753480" cy="315720"/>
           </a:xfrm>
           <a:prstGeom prst="rect">
             <a:avLst/>
@@ -25609,14 +25609,14 @@
       </p:grpSpPr>
       <p:sp>
         <p:nvSpPr>
-          <p:cNvPr id="431" name="Shape 117"/>
+          <p:cNvPr id="432" name="Shape 117"/>
           <p:cNvSpPr/>
           <p:nvPr/>
         </p:nvSpPr>
         <p:spPr>
           <a:xfrm>
             <a:off x="0" y="0"/>
-            <a:ext cx="12188520" cy="161280"/>
+            <a:ext cx="12187440" cy="160200"/>
           </a:xfrm>
           <a:prstGeom prst="rect">
             <a:avLst/>
@@ -25656,14 +25656,14 @@
       </p:sp>
       <p:sp>
         <p:nvSpPr>
-          <p:cNvPr id="432" name="Shape 118"/>
+          <p:cNvPr id="433" name="Shape 118"/>
           <p:cNvSpPr/>
           <p:nvPr/>
         </p:nvSpPr>
         <p:spPr>
           <a:xfrm>
             <a:off x="0" y="6510600"/>
-            <a:ext cx="12188520" cy="362520"/>
+            <a:ext cx="12187440" cy="361440"/>
           </a:xfrm>
           <a:prstGeom prst="rect">
             <a:avLst/>
@@ -25703,14 +25703,14 @@
       </p:sp>
       <p:sp>
         <p:nvSpPr>
-          <p:cNvPr id="433" name="Text 65"/>
+          <p:cNvPr id="434" name="Text 65"/>
           <p:cNvSpPr/>
           <p:nvPr/>
         </p:nvSpPr>
         <p:spPr>
           <a:xfrm>
             <a:off x="540000" y="388800"/>
-            <a:ext cx="6477840" cy="1048320"/>
+            <a:ext cx="6476760" cy="1047240"/>
           </a:xfrm>
           <a:prstGeom prst="rect">
             <a:avLst/>
@@ -25763,19 +25763,19 @@
       </p:sp>
       <p:pic>
         <p:nvPicPr>
-          <p:cNvPr id="434" name="" descr=""/>
+          <p:cNvPr id="435" name="" descr=""/>
           <p:cNvPicPr/>
           <p:nvPr/>
         </p:nvPicPr>
         <p:blipFill>
           <a:blip r:embed="rId1"/>
-          <a:srcRect l="0" t="26241" r="0" b="23016"/>
+          <a:srcRect l="0" t="26247" r="0" b="23016"/>
           <a:stretch/>
         </p:blipFill>
         <p:spPr>
           <a:xfrm>
             <a:off x="10038240" y="288360"/>
-            <a:ext cx="1946880" cy="536760"/>
+            <a:ext cx="1945800" cy="535680"/>
           </a:xfrm>
           <a:prstGeom prst="rect">
             <a:avLst/>
@@ -25787,14 +25787,14 @@
       </p:pic>
       <p:sp>
         <p:nvSpPr>
-          <p:cNvPr id="435" name="Text 67"/>
+          <p:cNvPr id="436" name="Text 67"/>
           <p:cNvSpPr/>
           <p:nvPr/>
         </p:nvSpPr>
         <p:spPr>
           <a:xfrm>
             <a:off x="168120" y="6538320"/>
-            <a:ext cx="2997000" cy="316800"/>
+            <a:ext cx="2995920" cy="315720"/>
           </a:xfrm>
           <a:prstGeom prst="rect">
             <a:avLst/>
@@ -25841,14 +25841,14 @@
       </p:sp>
       <p:sp>
         <p:nvSpPr>
-          <p:cNvPr id="436" name=""/>
+          <p:cNvPr id="437" name=""/>
           <p:cNvSpPr/>
           <p:nvPr/>
         </p:nvSpPr>
         <p:spPr>
           <a:xfrm>
             <a:off x="648000" y="1584000"/>
-            <a:ext cx="3237120" cy="313200"/>
+            <a:ext cx="3236040" cy="312120"/>
           </a:xfrm>
           <a:prstGeom prst="rect">
             <a:avLst/>
@@ -25895,14 +25895,14 @@
       </p:sp>
       <p:sp>
         <p:nvSpPr>
-          <p:cNvPr id="437" name=""/>
+          <p:cNvPr id="438" name=""/>
           <p:cNvSpPr/>
           <p:nvPr/>
         </p:nvSpPr>
         <p:spPr>
           <a:xfrm>
             <a:off x="560880" y="971280"/>
-            <a:ext cx="9474480" cy="285840"/>
+            <a:ext cx="9473400" cy="284760"/>
           </a:xfrm>
           <a:prstGeom prst="rect">
             <a:avLst/>
@@ -25955,14 +25955,14 @@
       </p:sp>
       <p:sp>
         <p:nvSpPr>
-          <p:cNvPr id="438" name=""/>
+          <p:cNvPr id="439" name=""/>
           <p:cNvSpPr/>
           <p:nvPr/>
         </p:nvSpPr>
         <p:spPr>
           <a:xfrm rot="21590400">
-            <a:off x="864000" y="1875600"/>
-            <a:ext cx="10468440" cy="1722240"/>
+            <a:off x="862920" y="1875600"/>
+            <a:ext cx="10467360" cy="1721160"/>
           </a:xfrm>
           <a:prstGeom prst="rect">
             <a:avLst/>
@@ -26070,14 +26070,14 @@
       </p:sp>
       <p:sp>
         <p:nvSpPr>
-          <p:cNvPr id="439" name=""/>
+          <p:cNvPr id="440" name=""/>
           <p:cNvSpPr/>
           <p:nvPr/>
         </p:nvSpPr>
         <p:spPr>
           <a:xfrm>
             <a:off x="648000" y="3960000"/>
-            <a:ext cx="3237120" cy="313200"/>
+            <a:ext cx="3236040" cy="312120"/>
           </a:xfrm>
           <a:prstGeom prst="rect">
             <a:avLst/>
@@ -26140,14 +26140,14 @@
       </p:sp>
       <p:sp>
         <p:nvSpPr>
-          <p:cNvPr id="440" name="Shape 120"/>
+          <p:cNvPr id="441" name="Shape 120"/>
           <p:cNvSpPr/>
           <p:nvPr/>
         </p:nvSpPr>
         <p:spPr>
           <a:xfrm>
             <a:off x="612000" y="4319640"/>
-            <a:ext cx="10725120" cy="1798920"/>
+            <a:ext cx="10724040" cy="1797840"/>
           </a:xfrm>
           <a:prstGeom prst="roundRect">
             <a:avLst>
@@ -26317,14 +26317,14 @@
       </p:sp>
       <p:sp>
         <p:nvSpPr>
-          <p:cNvPr id="441" name="Text 30"/>
+          <p:cNvPr id="442" name="Text 30"/>
           <p:cNvSpPr/>
           <p:nvPr/>
         </p:nvSpPr>
         <p:spPr>
           <a:xfrm>
             <a:off x="2742840" y="6538320"/>
-            <a:ext cx="1395720" cy="316800"/>
+            <a:ext cx="1394640" cy="315720"/>
           </a:xfrm>
           <a:prstGeom prst="rect">
             <a:avLst/>
@@ -26371,14 +26371,14 @@
       </p:sp>
       <p:sp>
         <p:nvSpPr>
-          <p:cNvPr id="442" name="Text 66"/>
+          <p:cNvPr id="443" name="Text 66"/>
           <p:cNvSpPr/>
           <p:nvPr/>
         </p:nvSpPr>
         <p:spPr>
           <a:xfrm>
             <a:off x="11412000" y="6538320"/>
-            <a:ext cx="754560" cy="316800"/>
+            <a:ext cx="753480" cy="315720"/>
           </a:xfrm>
           <a:prstGeom prst="rect">
             <a:avLst/>
@@ -26425,14 +26425,14 @@
       </p:sp>
       <p:sp>
         <p:nvSpPr>
-          <p:cNvPr id="443" name="Shape 158"/>
+          <p:cNvPr id="444" name="Shape 158"/>
           <p:cNvSpPr/>
           <p:nvPr/>
         </p:nvSpPr>
         <p:spPr>
           <a:xfrm>
             <a:off x="612360" y="1910880"/>
-            <a:ext cx="10725120" cy="1652400"/>
+            <a:ext cx="10724040" cy="1651320"/>
           </a:xfrm>
           <a:prstGeom prst="roundRect">
             <a:avLst>
@@ -26610,14 +26610,14 @@
       </p:grpSpPr>
       <p:sp>
         <p:nvSpPr>
-          <p:cNvPr id="444" name="Shape 113"/>
+          <p:cNvPr id="445" name="Shape 113"/>
           <p:cNvSpPr/>
           <p:nvPr/>
         </p:nvSpPr>
         <p:spPr>
           <a:xfrm>
             <a:off x="0" y="0"/>
-            <a:ext cx="12188520" cy="161280"/>
+            <a:ext cx="12187440" cy="160200"/>
           </a:xfrm>
           <a:prstGeom prst="rect">
             <a:avLst/>
@@ -26657,14 +26657,14 @@
       </p:sp>
       <p:sp>
         <p:nvSpPr>
-          <p:cNvPr id="445" name="Shape 114"/>
+          <p:cNvPr id="446" name="Shape 114"/>
           <p:cNvSpPr/>
           <p:nvPr/>
         </p:nvSpPr>
         <p:spPr>
           <a:xfrm>
             <a:off x="0" y="6510600"/>
-            <a:ext cx="12188520" cy="362520"/>
+            <a:ext cx="12187440" cy="361440"/>
           </a:xfrm>
           <a:prstGeom prst="rect">
             <a:avLst/>
@@ -26704,14 +26704,14 @@
       </p:sp>
       <p:sp>
         <p:nvSpPr>
-          <p:cNvPr id="446" name="Text 62"/>
+          <p:cNvPr id="447" name="Text 62"/>
           <p:cNvSpPr/>
           <p:nvPr/>
         </p:nvSpPr>
         <p:spPr>
           <a:xfrm>
             <a:off x="540000" y="388800"/>
-            <a:ext cx="6477840" cy="1048320"/>
+            <a:ext cx="6476760" cy="1047240"/>
           </a:xfrm>
           <a:prstGeom prst="rect">
             <a:avLst/>
@@ -26764,19 +26764,19 @@
       </p:sp>
       <p:pic>
         <p:nvPicPr>
-          <p:cNvPr id="447" name="" descr=""/>
+          <p:cNvPr id="448" name="" descr=""/>
           <p:cNvPicPr/>
           <p:nvPr/>
         </p:nvPicPr>
         <p:blipFill>
           <a:blip r:embed="rId1"/>
-          <a:srcRect l="0" t="26241" r="0" b="23016"/>
+          <a:srcRect l="0" t="26247" r="0" b="23016"/>
           <a:stretch/>
         </p:blipFill>
         <p:spPr>
           <a:xfrm>
             <a:off x="10038240" y="288360"/>
-            <a:ext cx="1946880" cy="536760"/>
+            <a:ext cx="1945800" cy="535680"/>
           </a:xfrm>
           <a:prstGeom prst="rect">
             <a:avLst/>
@@ -26788,7 +26788,7 @@
       </p:pic>
       <p:sp>
         <p:nvSpPr>
-          <p:cNvPr id="448" name="Shape 115">
+          <p:cNvPr id="449" name="Shape 115">
             <a:hlinkClick r:id="rId2" action="ppaction://hlinksldjump"/>
           </p:cNvPr>
           <p:cNvSpPr/>
@@ -26797,7 +26797,7 @@
         <p:spPr>
           <a:xfrm>
             <a:off x="612000" y="1936080"/>
-            <a:ext cx="10725120" cy="941760"/>
+            <a:ext cx="10724040" cy="940680"/>
           </a:xfrm>
           <a:prstGeom prst="roundRect">
             <a:avLst>
@@ -26897,14 +26897,14 @@
       </p:sp>
       <p:sp>
         <p:nvSpPr>
-          <p:cNvPr id="449" name="Text 64"/>
+          <p:cNvPr id="450" name="Text 64"/>
           <p:cNvSpPr/>
           <p:nvPr/>
         </p:nvSpPr>
         <p:spPr>
           <a:xfrm>
             <a:off x="168120" y="6538320"/>
-            <a:ext cx="2997000" cy="316800"/>
+            <a:ext cx="2995920" cy="315720"/>
           </a:xfrm>
           <a:prstGeom prst="rect">
             <a:avLst/>
@@ -26951,14 +26951,14 @@
       </p:sp>
       <p:sp>
         <p:nvSpPr>
-          <p:cNvPr id="450" name=""/>
+          <p:cNvPr id="451" name=""/>
           <p:cNvSpPr/>
           <p:nvPr/>
         </p:nvSpPr>
         <p:spPr>
           <a:xfrm>
             <a:off x="648000" y="1584000"/>
-            <a:ext cx="3237120" cy="313200"/>
+            <a:ext cx="3236040" cy="312120"/>
           </a:xfrm>
           <a:prstGeom prst="rect">
             <a:avLst/>
@@ -27005,14 +27005,14 @@
       </p:sp>
       <p:sp>
         <p:nvSpPr>
-          <p:cNvPr id="451" name=""/>
+          <p:cNvPr id="452" name=""/>
           <p:cNvSpPr/>
           <p:nvPr/>
         </p:nvSpPr>
         <p:spPr>
           <a:xfrm>
             <a:off x="560880" y="971280"/>
-            <a:ext cx="9474480" cy="285840"/>
+            <a:ext cx="9473400" cy="284760"/>
           </a:xfrm>
           <a:prstGeom prst="rect">
             <a:avLst/>
@@ -27065,14 +27065,14 @@
       </p:sp>
       <p:sp>
         <p:nvSpPr>
-          <p:cNvPr id="452" name=""/>
+          <p:cNvPr id="453" name=""/>
           <p:cNvSpPr/>
           <p:nvPr/>
         </p:nvSpPr>
         <p:spPr>
           <a:xfrm rot="21590400">
-            <a:off x="864000" y="1875600"/>
-            <a:ext cx="10468440" cy="1722240"/>
+            <a:off x="862920" y="1875600"/>
+            <a:ext cx="10467360" cy="1721160"/>
           </a:xfrm>
           <a:prstGeom prst="rect">
             <a:avLst/>
@@ -27180,14 +27180,14 @@
       </p:sp>
       <p:sp>
         <p:nvSpPr>
-          <p:cNvPr id="453" name=""/>
+          <p:cNvPr id="454" name=""/>
           <p:cNvSpPr/>
           <p:nvPr/>
         </p:nvSpPr>
         <p:spPr>
           <a:xfrm>
             <a:off x="648000" y="3672000"/>
-            <a:ext cx="3237120" cy="313200"/>
+            <a:ext cx="3236040" cy="312120"/>
           </a:xfrm>
           <a:prstGeom prst="rect">
             <a:avLst/>
@@ -27240,14 +27240,14 @@
       </p:sp>
       <p:sp>
         <p:nvSpPr>
-          <p:cNvPr id="454" name="Shape 116"/>
+          <p:cNvPr id="455" name="Shape 116"/>
           <p:cNvSpPr/>
           <p:nvPr/>
         </p:nvSpPr>
         <p:spPr>
           <a:xfrm>
             <a:off x="612000" y="3995640"/>
-            <a:ext cx="10725120" cy="1042200"/>
+            <a:ext cx="10724040" cy="1041120"/>
           </a:xfrm>
           <a:prstGeom prst="roundRect">
             <a:avLst>
@@ -27347,14 +27347,14 @@
       </p:sp>
       <p:sp>
         <p:nvSpPr>
-          <p:cNvPr id="455" name="Text 31"/>
+          <p:cNvPr id="456" name="Text 31"/>
           <p:cNvSpPr/>
           <p:nvPr/>
         </p:nvSpPr>
         <p:spPr>
           <a:xfrm>
             <a:off x="2742840" y="6538320"/>
-            <a:ext cx="1395720" cy="316800"/>
+            <a:ext cx="1394640" cy="315720"/>
           </a:xfrm>
           <a:prstGeom prst="rect">
             <a:avLst/>
@@ -27401,14 +27401,14 @@
       </p:sp>
       <p:sp>
         <p:nvSpPr>
-          <p:cNvPr id="456" name="Text 63"/>
+          <p:cNvPr id="457" name="Text 63"/>
           <p:cNvSpPr/>
           <p:nvPr/>
         </p:nvSpPr>
         <p:spPr>
           <a:xfrm>
             <a:off x="11412000" y="6538320"/>
-            <a:ext cx="754560" cy="316800"/>
+            <a:ext cx="753480" cy="315720"/>
           </a:xfrm>
           <a:prstGeom prst="rect">
             <a:avLst/>
@@ -27492,14 +27492,14 @@
       </p:grpSpPr>
       <p:sp>
         <p:nvSpPr>
-          <p:cNvPr id="457" name="Shape 129"/>
+          <p:cNvPr id="458" name="Shape 129"/>
           <p:cNvSpPr/>
           <p:nvPr/>
         </p:nvSpPr>
         <p:spPr>
           <a:xfrm>
             <a:off x="0" y="0"/>
-            <a:ext cx="12188520" cy="161280"/>
+            <a:ext cx="12187440" cy="160200"/>
           </a:xfrm>
           <a:prstGeom prst="rect">
             <a:avLst/>
@@ -27539,14 +27539,14 @@
       </p:sp>
       <p:sp>
         <p:nvSpPr>
-          <p:cNvPr id="458" name="Shape 130"/>
+          <p:cNvPr id="459" name="Shape 130"/>
           <p:cNvSpPr/>
           <p:nvPr/>
         </p:nvSpPr>
         <p:spPr>
           <a:xfrm>
             <a:off x="0" y="6510600"/>
-            <a:ext cx="12188520" cy="362520"/>
+            <a:ext cx="12187440" cy="361440"/>
           </a:xfrm>
           <a:prstGeom prst="rect">
             <a:avLst/>
@@ -27586,14 +27586,14 @@
       </p:sp>
       <p:sp>
         <p:nvSpPr>
-          <p:cNvPr id="459" name="Text 74"/>
+          <p:cNvPr id="460" name="Text 74"/>
           <p:cNvSpPr/>
           <p:nvPr/>
         </p:nvSpPr>
         <p:spPr>
           <a:xfrm>
             <a:off x="540000" y="388800"/>
-            <a:ext cx="6477840" cy="1048320"/>
+            <a:ext cx="6476760" cy="1047240"/>
           </a:xfrm>
           <a:prstGeom prst="rect">
             <a:avLst/>
@@ -27646,19 +27646,19 @@
       </p:sp>
       <p:pic>
         <p:nvPicPr>
-          <p:cNvPr id="460" name="" descr=""/>
+          <p:cNvPr id="461" name="" descr=""/>
           <p:cNvPicPr/>
           <p:nvPr/>
         </p:nvPicPr>
         <p:blipFill>
           <a:blip r:embed="rId1"/>
-          <a:srcRect l="0" t="26241" r="0" b="23016"/>
+          <a:srcRect l="0" t="26247" r="0" b="23016"/>
           <a:stretch/>
         </p:blipFill>
         <p:spPr>
           <a:xfrm>
             <a:off x="10038240" y="288360"/>
-            <a:ext cx="1946880" cy="536760"/>
+            <a:ext cx="1945800" cy="535680"/>
           </a:xfrm>
           <a:prstGeom prst="rect">
             <a:avLst/>
@@ -27670,14 +27670,14 @@
       </p:pic>
       <p:sp>
         <p:nvSpPr>
-          <p:cNvPr id="461" name="Shape 131"/>
+          <p:cNvPr id="462" name="Shape 131"/>
           <p:cNvSpPr/>
           <p:nvPr/>
         </p:nvSpPr>
         <p:spPr>
           <a:xfrm>
             <a:off x="612000" y="1936080"/>
-            <a:ext cx="10725120" cy="941760"/>
+            <a:ext cx="10724040" cy="940680"/>
           </a:xfrm>
           <a:prstGeom prst="roundRect">
             <a:avLst>
@@ -27818,14 +27818,14 @@
       </p:sp>
       <p:sp>
         <p:nvSpPr>
-          <p:cNvPr id="462" name="Text 76"/>
+          <p:cNvPr id="463" name="Text 76"/>
           <p:cNvSpPr/>
           <p:nvPr/>
         </p:nvSpPr>
         <p:spPr>
           <a:xfrm>
             <a:off x="168120" y="6538320"/>
-            <a:ext cx="2997000" cy="316800"/>
+            <a:ext cx="2995920" cy="315720"/>
           </a:xfrm>
           <a:prstGeom prst="rect">
             <a:avLst/>
@@ -27872,14 +27872,14 @@
       </p:sp>
       <p:sp>
         <p:nvSpPr>
-          <p:cNvPr id="463" name=""/>
+          <p:cNvPr id="464" name=""/>
           <p:cNvSpPr/>
           <p:nvPr/>
         </p:nvSpPr>
         <p:spPr>
           <a:xfrm>
             <a:off x="648000" y="1584000"/>
-            <a:ext cx="3237120" cy="313200"/>
+            <a:ext cx="3236040" cy="312120"/>
           </a:xfrm>
           <a:prstGeom prst="rect">
             <a:avLst/>
@@ -27926,14 +27926,14 @@
       </p:sp>
       <p:sp>
         <p:nvSpPr>
-          <p:cNvPr id="464" name=""/>
+          <p:cNvPr id="465" name=""/>
           <p:cNvSpPr/>
           <p:nvPr/>
         </p:nvSpPr>
         <p:spPr>
           <a:xfrm>
             <a:off x="560880" y="971280"/>
-            <a:ext cx="9474480" cy="285840"/>
+            <a:ext cx="9473400" cy="284760"/>
           </a:xfrm>
           <a:prstGeom prst="rect">
             <a:avLst/>
@@ -27986,14 +27986,14 @@
       </p:sp>
       <p:sp>
         <p:nvSpPr>
-          <p:cNvPr id="465" name=""/>
+          <p:cNvPr id="466" name=""/>
           <p:cNvSpPr/>
           <p:nvPr/>
         </p:nvSpPr>
         <p:spPr>
           <a:xfrm rot="21590400">
-            <a:off x="864000" y="1875600"/>
-            <a:ext cx="10468440" cy="1722240"/>
+            <a:off x="862920" y="1875600"/>
+            <a:ext cx="10467360" cy="1721160"/>
           </a:xfrm>
           <a:prstGeom prst="rect">
             <a:avLst/>
@@ -28101,14 +28101,14 @@
       </p:sp>
       <p:sp>
         <p:nvSpPr>
-          <p:cNvPr id="466" name=""/>
+          <p:cNvPr id="467" name=""/>
           <p:cNvSpPr/>
           <p:nvPr/>
         </p:nvSpPr>
         <p:spPr>
           <a:xfrm>
             <a:off x="648000" y="3672000"/>
-            <a:ext cx="3237120" cy="313200"/>
+            <a:ext cx="3236040" cy="312120"/>
           </a:xfrm>
           <a:prstGeom prst="rect">
             <a:avLst/>
@@ -28161,14 +28161,14 @@
       </p:sp>
       <p:sp>
         <p:nvSpPr>
-          <p:cNvPr id="467" name="Shape 132"/>
+          <p:cNvPr id="468" name="Shape 132"/>
           <p:cNvSpPr/>
           <p:nvPr/>
         </p:nvSpPr>
         <p:spPr>
           <a:xfrm>
             <a:off x="612000" y="3995640"/>
-            <a:ext cx="10725120" cy="1042200"/>
+            <a:ext cx="10724040" cy="1041120"/>
           </a:xfrm>
           <a:prstGeom prst="roundRect">
             <a:avLst>
@@ -28286,7 +28286,7 @@
       </p:sp>
       <p:sp>
         <p:nvSpPr>
-          <p:cNvPr id="468" name="Shape 133">
+          <p:cNvPr id="469" name="Shape 133">
             <a:hlinkClick r:id="rId2" action="ppaction://hlinksldjump"/>
           </p:cNvPr>
           <p:cNvSpPr/>
@@ -28295,7 +28295,7 @@
         <p:spPr>
           <a:xfrm>
             <a:off x="612000" y="3995640"/>
-            <a:ext cx="10725120" cy="1042200"/>
+            <a:ext cx="10724040" cy="1041120"/>
           </a:xfrm>
           <a:prstGeom prst="roundRect">
             <a:avLst>
@@ -28395,14 +28395,14 @@
       </p:sp>
       <p:sp>
         <p:nvSpPr>
-          <p:cNvPr id="469" name="Text 32"/>
+          <p:cNvPr id="470" name="Text 32"/>
           <p:cNvSpPr/>
           <p:nvPr/>
         </p:nvSpPr>
         <p:spPr>
           <a:xfrm>
             <a:off x="2742840" y="6538320"/>
-            <a:ext cx="1395720" cy="316800"/>
+            <a:ext cx="1394640" cy="315720"/>
           </a:xfrm>
           <a:prstGeom prst="rect">
             <a:avLst/>
@@ -28449,14 +28449,14 @@
       </p:sp>
       <p:sp>
         <p:nvSpPr>
-          <p:cNvPr id="470" name="Text 75"/>
+          <p:cNvPr id="471" name="Text 75"/>
           <p:cNvSpPr/>
           <p:nvPr/>
         </p:nvSpPr>
         <p:spPr>
           <a:xfrm>
             <a:off x="11412000" y="6538320"/>
-            <a:ext cx="754560" cy="316800"/>
+            <a:ext cx="753480" cy="315720"/>
           </a:xfrm>
           <a:prstGeom prst="rect">
             <a:avLst/>
@@ -28540,14 +28540,14 @@
       </p:grpSpPr>
       <p:sp>
         <p:nvSpPr>
-          <p:cNvPr id="471" name="Shape 123"/>
+          <p:cNvPr id="472" name="Shape 123"/>
           <p:cNvSpPr/>
           <p:nvPr/>
         </p:nvSpPr>
         <p:spPr>
           <a:xfrm>
             <a:off x="0" y="0"/>
-            <a:ext cx="12188520" cy="161280"/>
+            <a:ext cx="12187440" cy="160200"/>
           </a:xfrm>
           <a:prstGeom prst="rect">
             <a:avLst/>
@@ -28587,14 +28587,14 @@
       </p:sp>
       <p:sp>
         <p:nvSpPr>
-          <p:cNvPr id="472" name="Shape 126"/>
+          <p:cNvPr id="473" name="Shape 126"/>
           <p:cNvSpPr/>
           <p:nvPr/>
         </p:nvSpPr>
         <p:spPr>
           <a:xfrm>
             <a:off x="0" y="6510600"/>
-            <a:ext cx="12188520" cy="362520"/>
+            <a:ext cx="12187440" cy="361440"/>
           </a:xfrm>
           <a:prstGeom prst="rect">
             <a:avLst/>
@@ -28634,14 +28634,14 @@
       </p:sp>
       <p:sp>
         <p:nvSpPr>
-          <p:cNvPr id="473" name="Text 71"/>
+          <p:cNvPr id="474" name="Text 71"/>
           <p:cNvSpPr/>
           <p:nvPr/>
         </p:nvSpPr>
         <p:spPr>
           <a:xfrm>
             <a:off x="540000" y="388800"/>
-            <a:ext cx="6477840" cy="1048320"/>
+            <a:ext cx="6476760" cy="1047240"/>
           </a:xfrm>
           <a:prstGeom prst="rect">
             <a:avLst/>
@@ -28694,19 +28694,19 @@
       </p:sp>
       <p:pic>
         <p:nvPicPr>
-          <p:cNvPr id="474" name="" descr=""/>
+          <p:cNvPr id="475" name="" descr=""/>
           <p:cNvPicPr/>
           <p:nvPr/>
         </p:nvPicPr>
         <p:blipFill>
           <a:blip r:embed="rId1"/>
-          <a:srcRect l="0" t="26241" r="0" b="23016"/>
+          <a:srcRect l="0" t="26247" r="0" b="23016"/>
           <a:stretch/>
         </p:blipFill>
         <p:spPr>
           <a:xfrm>
             <a:off x="10038240" y="288360"/>
-            <a:ext cx="1946880" cy="536760"/>
+            <a:ext cx="1945800" cy="535680"/>
           </a:xfrm>
           <a:prstGeom prst="rect">
             <a:avLst/>
@@ -28718,14 +28718,14 @@
       </p:pic>
       <p:sp>
         <p:nvSpPr>
-          <p:cNvPr id="475" name="Shape 127"/>
+          <p:cNvPr id="476" name="Shape 127"/>
           <p:cNvSpPr/>
           <p:nvPr/>
         </p:nvSpPr>
         <p:spPr>
           <a:xfrm>
             <a:off x="612000" y="1936080"/>
-            <a:ext cx="10725120" cy="941760"/>
+            <a:ext cx="10724040" cy="940680"/>
           </a:xfrm>
           <a:prstGeom prst="roundRect">
             <a:avLst>
@@ -28866,14 +28866,14 @@
       </p:sp>
       <p:sp>
         <p:nvSpPr>
-          <p:cNvPr id="476" name="Text 73"/>
+          <p:cNvPr id="477" name="Text 73"/>
           <p:cNvSpPr/>
           <p:nvPr/>
         </p:nvSpPr>
         <p:spPr>
           <a:xfrm>
             <a:off x="168120" y="6538320"/>
-            <a:ext cx="2997000" cy="316800"/>
+            <a:ext cx="2995920" cy="315720"/>
           </a:xfrm>
           <a:prstGeom prst="rect">
             <a:avLst/>
@@ -28920,14 +28920,14 @@
       </p:sp>
       <p:sp>
         <p:nvSpPr>
-          <p:cNvPr id="477" name=""/>
+          <p:cNvPr id="478" name=""/>
           <p:cNvSpPr/>
           <p:nvPr/>
         </p:nvSpPr>
         <p:spPr>
           <a:xfrm>
             <a:off x="648000" y="1584000"/>
-            <a:ext cx="3237120" cy="313200"/>
+            <a:ext cx="3236040" cy="312120"/>
           </a:xfrm>
           <a:prstGeom prst="rect">
             <a:avLst/>
@@ -28974,14 +28974,14 @@
       </p:sp>
       <p:sp>
         <p:nvSpPr>
-          <p:cNvPr id="478" name=""/>
+          <p:cNvPr id="479" name=""/>
           <p:cNvSpPr/>
           <p:nvPr/>
         </p:nvSpPr>
         <p:spPr>
           <a:xfrm>
             <a:off x="560880" y="971280"/>
-            <a:ext cx="9474480" cy="285840"/>
+            <a:ext cx="9473400" cy="284760"/>
           </a:xfrm>
           <a:prstGeom prst="rect">
             <a:avLst/>
@@ -29034,14 +29034,14 @@
       </p:sp>
       <p:sp>
         <p:nvSpPr>
-          <p:cNvPr id="479" name=""/>
+          <p:cNvPr id="480" name=""/>
           <p:cNvSpPr/>
           <p:nvPr/>
         </p:nvSpPr>
         <p:spPr>
           <a:xfrm rot="21590400">
-            <a:off x="864000" y="1875600"/>
-            <a:ext cx="10468440" cy="1722240"/>
+            <a:off x="862920" y="1875600"/>
+            <a:ext cx="10467360" cy="1721160"/>
           </a:xfrm>
           <a:prstGeom prst="rect">
             <a:avLst/>
@@ -29149,14 +29149,14 @@
       </p:sp>
       <p:sp>
         <p:nvSpPr>
-          <p:cNvPr id="480" name=""/>
+          <p:cNvPr id="481" name=""/>
           <p:cNvSpPr/>
           <p:nvPr/>
         </p:nvSpPr>
         <p:spPr>
           <a:xfrm>
             <a:off x="648000" y="3672000"/>
-            <a:ext cx="3237120" cy="313200"/>
+            <a:ext cx="3236040" cy="312120"/>
           </a:xfrm>
           <a:prstGeom prst="rect">
             <a:avLst/>
@@ -29209,14 +29209,14 @@
       </p:sp>
       <p:sp>
         <p:nvSpPr>
-          <p:cNvPr id="481" name="Shape 128"/>
+          <p:cNvPr id="482" name="Shape 128"/>
           <p:cNvSpPr/>
           <p:nvPr/>
         </p:nvSpPr>
         <p:spPr>
           <a:xfrm>
             <a:off x="612000" y="3995640"/>
-            <a:ext cx="10725120" cy="1042200"/>
+            <a:ext cx="10724040" cy="1041120"/>
           </a:xfrm>
           <a:prstGeom prst="roundRect">
             <a:avLst>
@@ -29334,14 +29334,14 @@
       </p:sp>
       <p:sp>
         <p:nvSpPr>
-          <p:cNvPr id="482" name="Text 33"/>
+          <p:cNvPr id="483" name="Text 33"/>
           <p:cNvSpPr/>
           <p:nvPr/>
         </p:nvSpPr>
         <p:spPr>
           <a:xfrm>
             <a:off x="2742840" y="6538320"/>
-            <a:ext cx="1395720" cy="316800"/>
+            <a:ext cx="1394640" cy="315720"/>
           </a:xfrm>
           <a:prstGeom prst="rect">
             <a:avLst/>
@@ -29388,14 +29388,14 @@
       </p:sp>
       <p:sp>
         <p:nvSpPr>
-          <p:cNvPr id="483" name="Text 72"/>
+          <p:cNvPr id="484" name="Text 72"/>
           <p:cNvSpPr/>
           <p:nvPr/>
         </p:nvSpPr>
         <p:spPr>
           <a:xfrm>
             <a:off x="11412000" y="6538320"/>
-            <a:ext cx="754560" cy="316800"/>
+            <a:ext cx="753480" cy="315720"/>
           </a:xfrm>
           <a:prstGeom prst="rect">
             <a:avLst/>
@@ -29479,7 +29479,7 @@
       </p:grpSpPr>
       <p:pic>
         <p:nvPicPr>
-          <p:cNvPr id="484" name="" descr=""/>
+          <p:cNvPr id="485" name="" descr=""/>
           <p:cNvPicPr/>
           <p:nvPr/>
         </p:nvPicPr>
@@ -29490,7 +29490,7 @@
         <p:spPr>
           <a:xfrm>
             <a:off x="5760000" y="164160"/>
-            <a:ext cx="6433920" cy="6352560"/>
+            <a:ext cx="6432840" cy="6351480"/>
           </a:xfrm>
           <a:prstGeom prst="rect">
             <a:avLst/>
@@ -29502,14 +29502,14 @@
       </p:pic>
       <p:sp>
         <p:nvSpPr>
-          <p:cNvPr id="485" name="Shape 5"/>
+          <p:cNvPr id="486" name="Shape 5"/>
           <p:cNvSpPr/>
           <p:nvPr/>
         </p:nvSpPr>
         <p:spPr>
           <a:xfrm>
             <a:off x="0" y="0"/>
-            <a:ext cx="12188520" cy="161280"/>
+            <a:ext cx="12187440" cy="160200"/>
           </a:xfrm>
           <a:prstGeom prst="rect">
             <a:avLst/>
@@ -29549,14 +29549,14 @@
       </p:sp>
       <p:sp>
         <p:nvSpPr>
-          <p:cNvPr id="486" name="Shape 6"/>
+          <p:cNvPr id="487" name="Shape 6"/>
           <p:cNvSpPr/>
           <p:nvPr/>
         </p:nvSpPr>
         <p:spPr>
           <a:xfrm>
             <a:off x="0" y="6519600"/>
-            <a:ext cx="12188520" cy="353520"/>
+            <a:ext cx="12187440" cy="352440"/>
           </a:xfrm>
           <a:prstGeom prst="rect">
             <a:avLst/>
@@ -29596,14 +29596,14 @@
       </p:sp>
       <p:sp>
         <p:nvSpPr>
-          <p:cNvPr id="487" name="Text 4"/>
+          <p:cNvPr id="488" name="Text 4"/>
           <p:cNvSpPr/>
           <p:nvPr/>
         </p:nvSpPr>
         <p:spPr>
           <a:xfrm>
             <a:off x="1116000" y="3744000"/>
-            <a:ext cx="1977120" cy="856800"/>
+            <a:ext cx="1976040" cy="855720"/>
           </a:xfrm>
           <a:prstGeom prst="rect">
             <a:avLst/>
@@ -29650,19 +29650,19 @@
       </p:sp>
       <p:pic>
         <p:nvPicPr>
-          <p:cNvPr id="488" name="" descr=""/>
+          <p:cNvPr id="489" name="" descr=""/>
           <p:cNvPicPr/>
           <p:nvPr/>
         </p:nvPicPr>
         <p:blipFill>
           <a:blip r:embed="rId2"/>
-          <a:srcRect l="0" t="26241" r="0" b="23016"/>
+          <a:srcRect l="0" t="26247" r="0" b="23016"/>
           <a:stretch/>
         </p:blipFill>
         <p:spPr>
           <a:xfrm>
             <a:off x="216000" y="360360"/>
-            <a:ext cx="1946880" cy="536760"/>
+            <a:ext cx="1945800" cy="535680"/>
           </a:xfrm>
           <a:prstGeom prst="rect">
             <a:avLst/>
@@ -29674,14 +29674,14 @@
       </p:pic>
       <p:sp>
         <p:nvSpPr>
-          <p:cNvPr id="489" name="Text 7"/>
+          <p:cNvPr id="490" name="Text 7"/>
           <p:cNvSpPr/>
           <p:nvPr/>
         </p:nvSpPr>
         <p:spPr>
           <a:xfrm>
             <a:off x="1104120" y="3420000"/>
-            <a:ext cx="3357000" cy="537120"/>
+            <a:ext cx="3355920" cy="536040"/>
           </a:xfrm>
           <a:prstGeom prst="rect">
             <a:avLst/>
@@ -29772,7 +29772,7 @@
         <p:spPr>
           <a:xfrm>
             <a:off x="0" y="0"/>
-            <a:ext cx="12188520" cy="161280"/>
+            <a:ext cx="12187440" cy="160200"/>
           </a:xfrm>
           <a:prstGeom prst="rect">
             <a:avLst/>
@@ -29819,7 +29819,7 @@
         <p:spPr>
           <a:xfrm>
             <a:off x="0" y="6510600"/>
-            <a:ext cx="12188520" cy="362520"/>
+            <a:ext cx="12187440" cy="361440"/>
           </a:xfrm>
           <a:prstGeom prst="rect">
             <a:avLst/>
@@ -29866,7 +29866,7 @@
         <p:spPr>
           <a:xfrm>
             <a:off x="540000" y="388800"/>
-            <a:ext cx="6717600" cy="1048320"/>
+            <a:ext cx="6716520" cy="1047240"/>
           </a:xfrm>
           <a:prstGeom prst="rect">
             <a:avLst/>
@@ -29920,7 +29920,7 @@
         <p:spPr>
           <a:xfrm>
             <a:off x="2742840" y="6538320"/>
-            <a:ext cx="1395720" cy="316800"/>
+            <a:ext cx="1394640" cy="315720"/>
           </a:xfrm>
           <a:prstGeom prst="rect">
             <a:avLst/>
@@ -29973,13 +29973,13 @@
         </p:nvPicPr>
         <p:blipFill>
           <a:blip r:embed="rId1"/>
-          <a:srcRect l="0" t="26241" r="0" b="23016"/>
+          <a:srcRect l="0" t="26247" r="0" b="23016"/>
           <a:stretch/>
         </p:blipFill>
         <p:spPr>
           <a:xfrm>
             <a:off x="10038240" y="288360"/>
-            <a:ext cx="1946880" cy="536760"/>
+            <a:ext cx="1945800" cy="535680"/>
           </a:xfrm>
           <a:prstGeom prst="rect">
             <a:avLst/>
@@ -29998,7 +29998,7 @@
         <p:spPr>
           <a:xfrm>
             <a:off x="612000" y="2133360"/>
-            <a:ext cx="2517120" cy="1823760"/>
+            <a:ext cx="2516040" cy="1822680"/>
           </a:xfrm>
           <a:prstGeom prst="roundRect">
             <a:avLst>
@@ -30072,7 +30072,7 @@
         <p:spPr>
           <a:xfrm>
             <a:off x="168120" y="6538320"/>
-            <a:ext cx="2997000" cy="316800"/>
+            <a:ext cx="2995920" cy="315720"/>
           </a:xfrm>
           <a:prstGeom prst="rect">
             <a:avLst/>
@@ -30168,7 +30168,7 @@
         <p:spPr>
           <a:xfrm>
             <a:off x="720000" y="2484000"/>
-            <a:ext cx="1257120" cy="384840"/>
+            <a:ext cx="1256040" cy="383760"/>
           </a:xfrm>
           <a:prstGeom prst="rect">
             <a:avLst/>
@@ -30222,7 +30222,7 @@
         <p:spPr>
           <a:xfrm>
             <a:off x="720000" y="2871720"/>
-            <a:ext cx="2337120" cy="725400"/>
+            <a:ext cx="2336040" cy="724320"/>
           </a:xfrm>
           <a:prstGeom prst="rect">
             <a:avLst/>
@@ -30276,7 +30276,7 @@
         <p:spPr>
           <a:xfrm>
             <a:off x="756000" y="3240000"/>
-            <a:ext cx="2337120" cy="717120"/>
+            <a:ext cx="2336040" cy="716040"/>
           </a:xfrm>
           <a:prstGeom prst="rect">
             <a:avLst/>
@@ -30330,7 +30330,7 @@
         <p:spPr>
           <a:xfrm>
             <a:off x="3420000" y="2142720"/>
-            <a:ext cx="2517120" cy="1823760"/>
+            <a:ext cx="2516040" cy="1822680"/>
           </a:xfrm>
           <a:prstGeom prst="roundRect">
             <a:avLst>
@@ -30446,7 +30446,7 @@
         <p:spPr>
           <a:xfrm>
             <a:off x="3528000" y="2493360"/>
-            <a:ext cx="1257120" cy="384840"/>
+            <a:ext cx="1256040" cy="383760"/>
           </a:xfrm>
           <a:prstGeom prst="rect">
             <a:avLst/>
@@ -30500,7 +30500,7 @@
         <p:spPr>
           <a:xfrm>
             <a:off x="3528000" y="2881080"/>
-            <a:ext cx="2337120" cy="725400"/>
+            <a:ext cx="2336040" cy="724320"/>
           </a:xfrm>
           <a:prstGeom prst="rect">
             <a:avLst/>
@@ -30554,7 +30554,7 @@
         <p:spPr>
           <a:xfrm>
             <a:off x="3564000" y="3249360"/>
-            <a:ext cx="2337120" cy="717120"/>
+            <a:ext cx="2336040" cy="716040"/>
           </a:xfrm>
           <a:prstGeom prst="rect">
             <a:avLst/>
@@ -30608,7 +30608,7 @@
         <p:spPr>
           <a:xfrm>
             <a:off x="6228000" y="2142720"/>
-            <a:ext cx="2517120" cy="1823760"/>
+            <a:ext cx="2516040" cy="1822680"/>
           </a:xfrm>
           <a:prstGeom prst="roundRect">
             <a:avLst>
@@ -30724,7 +30724,7 @@
         <p:spPr>
           <a:xfrm>
             <a:off x="6336000" y="2493360"/>
-            <a:ext cx="2697480" cy="979560"/>
+            <a:ext cx="2696400" cy="978480"/>
           </a:xfrm>
           <a:prstGeom prst="rect">
             <a:avLst/>
@@ -30778,7 +30778,7 @@
         <p:spPr>
           <a:xfrm>
             <a:off x="6336000" y="2881080"/>
-            <a:ext cx="2337120" cy="725400"/>
+            <a:ext cx="2336040" cy="724320"/>
           </a:xfrm>
           <a:prstGeom prst="rect">
             <a:avLst/>
@@ -30832,7 +30832,7 @@
         <p:spPr>
           <a:xfrm>
             <a:off x="6372000" y="3249360"/>
-            <a:ext cx="2337120" cy="1018440"/>
+            <a:ext cx="2336040" cy="1017360"/>
           </a:xfrm>
           <a:prstGeom prst="rect">
             <a:avLst/>
@@ -30899,7 +30899,7 @@
         <p:spPr>
           <a:xfrm>
             <a:off x="9036360" y="2142720"/>
-            <a:ext cx="2517120" cy="1823760"/>
+            <a:ext cx="2516040" cy="1822680"/>
           </a:xfrm>
           <a:prstGeom prst="roundRect">
             <a:avLst>
@@ -31015,7 +31015,7 @@
         <p:spPr>
           <a:xfrm>
             <a:off x="9144360" y="2493360"/>
-            <a:ext cx="1257120" cy="384840"/>
+            <a:ext cx="1256040" cy="383760"/>
           </a:xfrm>
           <a:prstGeom prst="rect">
             <a:avLst/>
@@ -31069,7 +31069,7 @@
         <p:spPr>
           <a:xfrm>
             <a:off x="9144360" y="2881080"/>
-            <a:ext cx="2337120" cy="725400"/>
+            <a:ext cx="2336040" cy="724320"/>
           </a:xfrm>
           <a:prstGeom prst="rect">
             <a:avLst/>
@@ -31123,7 +31123,7 @@
         <p:spPr>
           <a:xfrm>
             <a:off x="9180360" y="3249360"/>
-            <a:ext cx="2337120" cy="717120"/>
+            <a:ext cx="2336040" cy="716040"/>
           </a:xfrm>
           <a:prstGeom prst="rect">
             <a:avLst/>
@@ -31177,7 +31177,7 @@
         <p:spPr>
           <a:xfrm>
             <a:off x="560880" y="971280"/>
-            <a:ext cx="5641560" cy="545400"/>
+            <a:ext cx="5640480" cy="544320"/>
           </a:xfrm>
           <a:prstGeom prst="rect">
             <a:avLst/>
@@ -31266,7 +31266,7 @@
         <p:spPr>
           <a:xfrm>
             <a:off x="11412000" y="6538320"/>
-            <a:ext cx="754560" cy="316800"/>
+            <a:ext cx="753480" cy="315720"/>
           </a:xfrm>
           <a:prstGeom prst="rect">
             <a:avLst/>
@@ -31357,7 +31357,7 @@
         <p:spPr>
           <a:xfrm>
             <a:off x="0" y="0"/>
-            <a:ext cx="12188520" cy="161280"/>
+            <a:ext cx="12187440" cy="160200"/>
           </a:xfrm>
           <a:prstGeom prst="rect">
             <a:avLst/>
@@ -31408,7 +31408,7 @@
         <p:spPr>
           <a:xfrm>
             <a:off x="3185640" y="1476000"/>
-            <a:ext cx="8514000" cy="4693680"/>
+            <a:ext cx="8512920" cy="4692600"/>
           </a:xfrm>
           <a:prstGeom prst="rect">
             <a:avLst/>
@@ -31427,7 +31427,7 @@
         <p:spPr>
           <a:xfrm>
             <a:off x="0" y="6510600"/>
-            <a:ext cx="12188520" cy="362520"/>
+            <a:ext cx="12187440" cy="361440"/>
           </a:xfrm>
           <a:prstGeom prst="rect">
             <a:avLst/>
@@ -31474,7 +31474,7 @@
         <p:spPr>
           <a:xfrm>
             <a:off x="3185640" y="1620000"/>
-            <a:ext cx="8694000" cy="4549680"/>
+            <a:ext cx="8692920" cy="4548600"/>
           </a:xfrm>
           <a:prstGeom prst="roundRect">
             <a:avLst>
@@ -31546,7 +31546,7 @@
         <p:spPr>
           <a:xfrm>
             <a:off x="540000" y="388800"/>
-            <a:ext cx="6717600" cy="1048320"/>
+            <a:ext cx="6716520" cy="1047240"/>
           </a:xfrm>
           <a:prstGeom prst="rect">
             <a:avLst/>
@@ -31599,13 +31599,13 @@
         </p:nvPicPr>
         <p:blipFill>
           <a:blip r:embed="rId2"/>
-          <a:srcRect l="0" t="26241" r="0" b="23016"/>
+          <a:srcRect l="0" t="26247" r="0" b="23016"/>
           <a:stretch/>
         </p:blipFill>
         <p:spPr>
           <a:xfrm>
             <a:off x="10038240" y="288360"/>
-            <a:ext cx="1946880" cy="536760"/>
+            <a:ext cx="1945800" cy="535680"/>
           </a:xfrm>
           <a:prstGeom prst="rect">
             <a:avLst/>
@@ -31624,7 +31624,7 @@
         <p:spPr>
           <a:xfrm>
             <a:off x="168120" y="6538320"/>
-            <a:ext cx="2997000" cy="316800"/>
+            <a:ext cx="2995920" cy="315720"/>
           </a:xfrm>
           <a:prstGeom prst="rect">
             <a:avLst/>
@@ -31678,7 +31678,7 @@
         <p:spPr>
           <a:xfrm>
             <a:off x="560880" y="971280"/>
-            <a:ext cx="9474480" cy="285840"/>
+            <a:ext cx="9473400" cy="284760"/>
           </a:xfrm>
           <a:prstGeom prst="rect">
             <a:avLst/>
@@ -31732,7 +31732,7 @@
         <p:spPr>
           <a:xfrm>
             <a:off x="2742840" y="6538320"/>
-            <a:ext cx="1395720" cy="316800"/>
+            <a:ext cx="1394640" cy="315720"/>
           </a:xfrm>
           <a:prstGeom prst="rect">
             <a:avLst/>
@@ -31786,7 +31786,7 @@
         <p:spPr>
           <a:xfrm>
             <a:off x="11412000" y="6538320"/>
-            <a:ext cx="754560" cy="316800"/>
+            <a:ext cx="753480" cy="315720"/>
           </a:xfrm>
           <a:prstGeom prst="rect">
             <a:avLst/>
@@ -31840,7 +31840,7 @@
         <p:spPr>
           <a:xfrm>
             <a:off x="540000" y="1703880"/>
-            <a:ext cx="2159640" cy="923760"/>
+            <a:ext cx="2158560" cy="922680"/>
           </a:xfrm>
           <a:prstGeom prst="roundRect">
             <a:avLst>
@@ -31956,7 +31956,7 @@
         <p:spPr>
           <a:xfrm>
             <a:off x="612000" y="1882800"/>
-            <a:ext cx="1727640" cy="384840"/>
+            <a:ext cx="1726560" cy="383760"/>
           </a:xfrm>
           <a:prstGeom prst="rect">
             <a:avLst/>
@@ -32020,7 +32020,7 @@
         <p:spPr>
           <a:xfrm>
             <a:off x="612000" y="2196000"/>
-            <a:ext cx="1907640" cy="725400"/>
+            <a:ext cx="1906560" cy="724320"/>
           </a:xfrm>
           <a:prstGeom prst="rect">
             <a:avLst/>
@@ -32074,7 +32074,7 @@
         <p:spPr>
           <a:xfrm>
             <a:off x="1586520" y="5402520"/>
-            <a:ext cx="2337120" cy="717120"/>
+            <a:ext cx="2336040" cy="716040"/>
           </a:xfrm>
           <a:prstGeom prst="rect">
             <a:avLst/>
@@ -32119,7 +32119,7 @@
         <p:spPr>
           <a:xfrm>
             <a:off x="540000" y="3132000"/>
-            <a:ext cx="2159640" cy="899640"/>
+            <a:ext cx="2158560" cy="898560"/>
           </a:xfrm>
           <a:prstGeom prst="roundRect">
             <a:avLst>
@@ -32235,7 +32235,7 @@
         <p:spPr>
           <a:xfrm>
             <a:off x="612000" y="3346920"/>
-            <a:ext cx="1907640" cy="384840"/>
+            <a:ext cx="1906560" cy="383760"/>
           </a:xfrm>
           <a:prstGeom prst="rect">
             <a:avLst/>
@@ -32299,7 +32299,7 @@
         <p:spPr>
           <a:xfrm>
             <a:off x="612000" y="3660120"/>
-            <a:ext cx="2087640" cy="725400"/>
+            <a:ext cx="2086560" cy="724320"/>
           </a:xfrm>
           <a:prstGeom prst="rect">
             <a:avLst/>
@@ -32353,7 +32353,7 @@
         <p:spPr>
           <a:xfrm>
             <a:off x="540000" y="4578120"/>
-            <a:ext cx="2159640" cy="1181520"/>
+            <a:ext cx="2158560" cy="1180440"/>
           </a:xfrm>
           <a:prstGeom prst="roundRect">
             <a:avLst>
@@ -32469,7 +32469,7 @@
         <p:spPr>
           <a:xfrm>
             <a:off x="612000" y="4793040"/>
-            <a:ext cx="1547640" cy="384840"/>
+            <a:ext cx="1546560" cy="383760"/>
           </a:xfrm>
           <a:prstGeom prst="rect">
             <a:avLst/>
@@ -32543,7 +32543,7 @@
         <p:spPr>
           <a:xfrm>
             <a:off x="612000" y="5106240"/>
-            <a:ext cx="2087640" cy="725400"/>
+            <a:ext cx="2086560" cy="724320"/>
           </a:xfrm>
           <a:prstGeom prst="rect">
             <a:avLst/>
@@ -32634,7 +32634,7 @@
         <p:spPr>
           <a:xfrm>
             <a:off x="0" y="0"/>
-            <a:ext cx="12188520" cy="161280"/>
+            <a:ext cx="12187440" cy="160200"/>
           </a:xfrm>
           <a:prstGeom prst="rect">
             <a:avLst/>
@@ -32681,7 +32681,7 @@
         <p:spPr>
           <a:xfrm>
             <a:off x="0" y="6510600"/>
-            <a:ext cx="12188520" cy="362520"/>
+            <a:ext cx="12187440" cy="361440"/>
           </a:xfrm>
           <a:prstGeom prst="rect">
             <a:avLst/>
@@ -32728,7 +32728,7 @@
         <p:spPr>
           <a:xfrm>
             <a:off x="540000" y="388800"/>
-            <a:ext cx="6717600" cy="1048320"/>
+            <a:ext cx="6716520" cy="1047240"/>
           </a:xfrm>
           <a:prstGeom prst="rect">
             <a:avLst/>
@@ -32786,7 +32786,7 @@
         <p:spPr>
           <a:xfrm>
             <a:off x="540000" y="2195280"/>
-            <a:ext cx="11068920" cy="3564360"/>
+            <a:ext cx="11067840" cy="3563280"/>
           </a:xfrm>
           <a:prstGeom prst="rect">
             <a:avLst/>
@@ -32804,13 +32804,13 @@
         </p:nvPicPr>
         <p:blipFill>
           <a:blip r:embed="rId2"/>
-          <a:srcRect l="0" t="26241" r="0" b="23016"/>
+          <a:srcRect l="0" t="26247" r="0" b="23016"/>
           <a:stretch/>
         </p:blipFill>
         <p:spPr>
           <a:xfrm>
             <a:off x="10038240" y="288360"/>
-            <a:ext cx="1946880" cy="536760"/>
+            <a:ext cx="1945800" cy="535680"/>
           </a:xfrm>
           <a:prstGeom prst="rect">
             <a:avLst/>
@@ -32829,7 +32829,7 @@
         <p:spPr>
           <a:xfrm>
             <a:off x="168120" y="6538320"/>
-            <a:ext cx="2997000" cy="316800"/>
+            <a:ext cx="2995920" cy="315720"/>
           </a:xfrm>
           <a:prstGeom prst="rect">
             <a:avLst/>
@@ -32883,7 +32883,7 @@
         <p:spPr>
           <a:xfrm>
             <a:off x="560880" y="971280"/>
-            <a:ext cx="9474480" cy="285840"/>
+            <a:ext cx="9473400" cy="284760"/>
           </a:xfrm>
           <a:prstGeom prst="rect">
             <a:avLst/>
@@ -32943,7 +32943,7 @@
         <p:spPr>
           <a:xfrm>
             <a:off x="540000" y="2123280"/>
-            <a:ext cx="11159640" cy="3598560"/>
+            <a:ext cx="11158560" cy="3597480"/>
           </a:xfrm>
           <a:prstGeom prst="roundRect">
             <a:avLst>
@@ -33015,7 +33015,7 @@
         <p:spPr>
           <a:xfrm>
             <a:off x="2742840" y="6538320"/>
-            <a:ext cx="1395720" cy="316800"/>
+            <a:ext cx="1394640" cy="315720"/>
           </a:xfrm>
           <a:prstGeom prst="rect">
             <a:avLst/>
@@ -33069,7 +33069,7 @@
         <p:spPr>
           <a:xfrm>
             <a:off x="11412000" y="6538320"/>
-            <a:ext cx="754560" cy="316800"/>
+            <a:ext cx="753480" cy="315720"/>
           </a:xfrm>
           <a:prstGeom prst="rect">
             <a:avLst/>
@@ -33123,7 +33123,7 @@
         <p:spPr>
           <a:xfrm>
             <a:off x="720000" y="1830240"/>
-            <a:ext cx="4319640" cy="725400"/>
+            <a:ext cx="4318560" cy="724320"/>
           </a:xfrm>
           <a:prstGeom prst="rect">
             <a:avLst/>
@@ -33214,7 +33214,7 @@
         <p:spPr>
           <a:xfrm>
             <a:off x="0" y="0"/>
-            <a:ext cx="12188520" cy="161280"/>
+            <a:ext cx="12187440" cy="160200"/>
           </a:xfrm>
           <a:prstGeom prst="rect">
             <a:avLst/>
@@ -33261,7 +33261,7 @@
         <p:spPr>
           <a:xfrm>
             <a:off x="0" y="6510600"/>
-            <a:ext cx="12188520" cy="362520"/>
+            <a:ext cx="12187440" cy="361440"/>
           </a:xfrm>
           <a:prstGeom prst="rect">
             <a:avLst/>
@@ -33308,7 +33308,7 @@
         <p:spPr>
           <a:xfrm>
             <a:off x="540000" y="388800"/>
-            <a:ext cx="6717600" cy="1048320"/>
+            <a:ext cx="6716520" cy="1047240"/>
           </a:xfrm>
           <a:prstGeom prst="rect">
             <a:avLst/>
@@ -33361,13 +33361,13 @@
         </p:nvPicPr>
         <p:blipFill>
           <a:blip r:embed="rId1"/>
-          <a:srcRect l="0" t="26241" r="0" b="23016"/>
+          <a:srcRect l="0" t="26247" r="0" b="23016"/>
           <a:stretch/>
         </p:blipFill>
         <p:spPr>
           <a:xfrm>
             <a:off x="10038240" y="288360"/>
-            <a:ext cx="1946880" cy="536760"/>
+            <a:ext cx="1945800" cy="535680"/>
           </a:xfrm>
           <a:prstGeom prst="rect">
             <a:avLst/>
@@ -33390,7 +33390,7 @@
         <p:spPr>
           <a:xfrm>
             <a:off x="540000" y="2152800"/>
-            <a:ext cx="10979640" cy="3572280"/>
+            <a:ext cx="10978560" cy="3571200"/>
           </a:xfrm>
           <a:prstGeom prst="rect">
             <a:avLst/>
@@ -33400,16 +33400,39 @@
           </a:ln>
         </p:spPr>
       </p:pic>
-      <p:sp>
-        <p:nvSpPr>
-          <p:cNvPr id="114" name="Text 106"/>
+      <p:pic>
+        <p:nvPicPr>
+          <p:cNvPr id="114" name="" descr=""/>
+          <p:cNvPicPr/>
+          <p:nvPr/>
+        </p:nvPicPr>
+        <p:blipFill>
+          <a:blip r:embed="rId3"/>
+          <a:stretch/>
+        </p:blipFill>
+        <p:spPr>
+          <a:xfrm>
+            <a:off x="557280" y="2160000"/>
+            <a:ext cx="10886760" cy="3636000"/>
+          </a:xfrm>
+          <a:prstGeom prst="rect">
+            <a:avLst/>
+          </a:prstGeom>
+          <a:ln w="0">
+            <a:noFill/>
+          </a:ln>
+        </p:spPr>
+      </p:pic>
+      <p:sp>
+        <p:nvSpPr>
+          <p:cNvPr id="115" name="Text 106"/>
           <p:cNvSpPr/>
           <p:nvPr/>
         </p:nvSpPr>
         <p:spPr>
           <a:xfrm>
             <a:off x="168120" y="6538320"/>
-            <a:ext cx="2997000" cy="316800"/>
+            <a:ext cx="2995920" cy="315720"/>
           </a:xfrm>
           <a:prstGeom prst="rect">
             <a:avLst/>
@@ -33456,14 +33479,14 @@
       </p:sp>
       <p:sp>
         <p:nvSpPr>
-          <p:cNvPr id="115" name=""/>
+          <p:cNvPr id="116" name=""/>
           <p:cNvSpPr/>
           <p:nvPr/>
         </p:nvSpPr>
         <p:spPr>
           <a:xfrm>
             <a:off x="560880" y="971280"/>
-            <a:ext cx="9474480" cy="285840"/>
+            <a:ext cx="9473400" cy="284760"/>
           </a:xfrm>
           <a:prstGeom prst="rect">
             <a:avLst/>
@@ -33516,14 +33539,14 @@
       </p:sp>
       <p:sp>
         <p:nvSpPr>
-          <p:cNvPr id="116" name="Shape 170"/>
+          <p:cNvPr id="117" name="Shape 170"/>
           <p:cNvSpPr/>
           <p:nvPr/>
         </p:nvSpPr>
         <p:spPr>
           <a:xfrm>
             <a:off x="540000" y="2123280"/>
-            <a:ext cx="11159640" cy="3598560"/>
+            <a:ext cx="11158560" cy="3597480"/>
           </a:xfrm>
           <a:prstGeom prst="roundRect">
             <a:avLst>
@@ -33588,14 +33611,14 @@
       </p:sp>
       <p:sp>
         <p:nvSpPr>
-          <p:cNvPr id="117" name="Text 107"/>
+          <p:cNvPr id="118" name="Text 107"/>
           <p:cNvSpPr/>
           <p:nvPr/>
         </p:nvSpPr>
         <p:spPr>
           <a:xfrm>
             <a:off x="2742840" y="6538320"/>
-            <a:ext cx="1395720" cy="316800"/>
+            <a:ext cx="1394640" cy="315720"/>
           </a:xfrm>
           <a:prstGeom prst="rect">
             <a:avLst/>
@@ -33642,14 +33665,14 @@
       </p:sp>
       <p:sp>
         <p:nvSpPr>
-          <p:cNvPr id="118" name="Text 108"/>
+          <p:cNvPr id="119" name="Text 108"/>
           <p:cNvSpPr/>
           <p:nvPr/>
         </p:nvSpPr>
         <p:spPr>
           <a:xfrm>
             <a:off x="11412000" y="6538320"/>
-            <a:ext cx="754560" cy="316800"/>
+            <a:ext cx="753480" cy="315720"/>
           </a:xfrm>
           <a:prstGeom prst="rect">
             <a:avLst/>
@@ -33696,14 +33719,14 @@
       </p:sp>
       <p:sp>
         <p:nvSpPr>
-          <p:cNvPr id="119" name=""/>
+          <p:cNvPr id="120" name=""/>
           <p:cNvSpPr/>
           <p:nvPr/>
         </p:nvSpPr>
         <p:spPr>
           <a:xfrm>
             <a:off x="720000" y="1830240"/>
-            <a:ext cx="4319640" cy="725400"/>
+            <a:ext cx="4318560" cy="724320"/>
           </a:xfrm>
           <a:prstGeom prst="rect">
             <a:avLst/>
@@ -33787,14 +33810,14 @@
       </p:grpSpPr>
       <p:sp>
         <p:nvSpPr>
-          <p:cNvPr id="120" name="Shape 165"/>
+          <p:cNvPr id="121" name="Shape 165"/>
           <p:cNvSpPr/>
           <p:nvPr/>
         </p:nvSpPr>
         <p:spPr>
           <a:xfrm>
             <a:off x="0" y="0"/>
-            <a:ext cx="12188520" cy="161280"/>
+            <a:ext cx="12187440" cy="160200"/>
           </a:xfrm>
           <a:prstGeom prst="rect">
             <a:avLst/>
@@ -33834,14 +33857,14 @@
       </p:sp>
       <p:sp>
         <p:nvSpPr>
-          <p:cNvPr id="121" name="Shape 166"/>
+          <p:cNvPr id="122" name="Shape 166"/>
           <p:cNvSpPr/>
           <p:nvPr/>
         </p:nvSpPr>
         <p:spPr>
           <a:xfrm>
             <a:off x="0" y="6510600"/>
-            <a:ext cx="12188520" cy="362520"/>
+            <a:ext cx="12187440" cy="361440"/>
           </a:xfrm>
           <a:prstGeom prst="rect">
             <a:avLst/>
@@ -33881,14 +33904,14 @@
       </p:sp>
       <p:sp>
         <p:nvSpPr>
-          <p:cNvPr id="122" name="Text 101"/>
+          <p:cNvPr id="123" name="Text 101"/>
           <p:cNvSpPr/>
           <p:nvPr/>
         </p:nvSpPr>
         <p:spPr>
           <a:xfrm>
             <a:off x="540000" y="388800"/>
-            <a:ext cx="6717600" cy="1048320"/>
+            <a:ext cx="6716520" cy="1047240"/>
           </a:xfrm>
           <a:prstGeom prst="rect">
             <a:avLst/>
@@ -33935,19 +33958,19 @@
       </p:sp>
       <p:pic>
         <p:nvPicPr>
-          <p:cNvPr id="123" name="" descr=""/>
+          <p:cNvPr id="124" name="" descr=""/>
           <p:cNvPicPr/>
           <p:nvPr/>
         </p:nvPicPr>
         <p:blipFill>
           <a:blip r:embed="rId1"/>
-          <a:srcRect l="0" t="26241" r="0" b="23016"/>
+          <a:srcRect l="0" t="26247" r="0" b="23016"/>
           <a:stretch/>
         </p:blipFill>
         <p:spPr>
           <a:xfrm>
             <a:off x="10038240" y="288360"/>
-            <a:ext cx="1946880" cy="536760"/>
+            <a:ext cx="1945800" cy="535680"/>
           </a:xfrm>
           <a:prstGeom prst="rect">
             <a:avLst/>
@@ -33959,14 +33982,14 @@
       </p:pic>
       <p:sp>
         <p:nvSpPr>
-          <p:cNvPr id="124" name="Text 102"/>
+          <p:cNvPr id="125" name="Text 102"/>
           <p:cNvSpPr/>
           <p:nvPr/>
         </p:nvSpPr>
         <p:spPr>
           <a:xfrm>
             <a:off x="168120" y="6538320"/>
-            <a:ext cx="2997000" cy="316800"/>
+            <a:ext cx="2995920" cy="315720"/>
           </a:xfrm>
           <a:prstGeom prst="rect">
             <a:avLst/>
@@ -34013,14 +34036,14 @@
       </p:sp>
       <p:sp>
         <p:nvSpPr>
-          <p:cNvPr id="125" name=""/>
+          <p:cNvPr id="126" name=""/>
           <p:cNvSpPr/>
           <p:nvPr/>
         </p:nvSpPr>
         <p:spPr>
           <a:xfrm>
             <a:off x="560880" y="971280"/>
-            <a:ext cx="9474480" cy="285840"/>
+            <a:ext cx="9473400" cy="284760"/>
           </a:xfrm>
           <a:prstGeom prst="rect">
             <a:avLst/>
@@ -34067,14 +34090,14 @@
       </p:sp>
       <p:sp>
         <p:nvSpPr>
-          <p:cNvPr id="126" name="Shape 167"/>
+          <p:cNvPr id="127" name="Shape 167"/>
           <p:cNvSpPr/>
           <p:nvPr/>
         </p:nvSpPr>
         <p:spPr>
           <a:xfrm>
             <a:off x="540000" y="1439280"/>
-            <a:ext cx="10977840" cy="3598560"/>
+            <a:ext cx="10976760" cy="3597480"/>
           </a:xfrm>
           <a:prstGeom prst="roundRect">
             <a:avLst>
@@ -34141,7 +34164,7 @@
       </p:sp>
       <p:pic>
         <p:nvPicPr>
-          <p:cNvPr id="127" name="" descr=""/>
+          <p:cNvPr id="128" name="" descr=""/>
           <p:cNvPicPr/>
           <p:nvPr/>
         </p:nvPicPr>
@@ -34152,7 +34175,7 @@
         <p:spPr>
           <a:xfrm>
             <a:off x="587880" y="1587960"/>
-            <a:ext cx="10677960" cy="3380760"/>
+            <a:ext cx="10676880" cy="3379680"/>
           </a:xfrm>
           <a:prstGeom prst="rect">
             <a:avLst/>
@@ -34164,14 +34187,14 @@
       </p:pic>
       <p:sp>
         <p:nvSpPr>
-          <p:cNvPr id="128" name="Shape 168"/>
+          <p:cNvPr id="129" name="Shape 168"/>
           <p:cNvSpPr/>
           <p:nvPr/>
         </p:nvSpPr>
         <p:spPr>
           <a:xfrm>
             <a:off x="540000" y="5400000"/>
-            <a:ext cx="8637840" cy="717840"/>
+            <a:ext cx="8636760" cy="716760"/>
           </a:xfrm>
           <a:prstGeom prst="roundRect">
             <a:avLst>
@@ -34271,14 +34294,14 @@
       </p:sp>
       <p:sp>
         <p:nvSpPr>
-          <p:cNvPr id="129" name="Text 103"/>
+          <p:cNvPr id="130" name="Text 103"/>
           <p:cNvSpPr/>
           <p:nvPr/>
         </p:nvSpPr>
         <p:spPr>
           <a:xfrm>
             <a:off x="2742840" y="6538320"/>
-            <a:ext cx="1395720" cy="316800"/>
+            <a:ext cx="1394640" cy="315720"/>
           </a:xfrm>
           <a:prstGeom prst="rect">
             <a:avLst/>
@@ -34325,14 +34348,14 @@
       </p:sp>
       <p:sp>
         <p:nvSpPr>
-          <p:cNvPr id="130" name="Text 104"/>
+          <p:cNvPr id="131" name="Text 104"/>
           <p:cNvSpPr/>
           <p:nvPr/>
         </p:nvSpPr>
         <p:spPr>
           <a:xfrm>
             <a:off x="11412000" y="6538320"/>
-            <a:ext cx="754560" cy="316800"/>
+            <a:ext cx="753480" cy="315720"/>
           </a:xfrm>
           <a:prstGeom prst="rect">
             <a:avLst/>
@@ -34416,14 +34439,14 @@
       </p:grpSpPr>
       <p:sp>
         <p:nvSpPr>
-          <p:cNvPr id="131" name="Shape 140"/>
+          <p:cNvPr id="132" name="Shape 140"/>
           <p:cNvSpPr/>
           <p:nvPr/>
         </p:nvSpPr>
         <p:spPr>
           <a:xfrm>
             <a:off x="8640000" y="1440000"/>
-            <a:ext cx="3057840" cy="2877840"/>
+            <a:ext cx="3056760" cy="2876760"/>
           </a:xfrm>
           <a:prstGeom prst="roundRect">
             <a:avLst>
@@ -34582,14 +34605,14 @@
       </p:sp>
       <p:sp>
         <p:nvSpPr>
-          <p:cNvPr id="132" name="Shape 135"/>
+          <p:cNvPr id="133" name="Shape 135"/>
           <p:cNvSpPr/>
           <p:nvPr/>
         </p:nvSpPr>
         <p:spPr>
           <a:xfrm>
             <a:off x="0" y="0"/>
-            <a:ext cx="12188520" cy="161280"/>
+            <a:ext cx="12187440" cy="160200"/>
           </a:xfrm>
           <a:prstGeom prst="rect">
             <a:avLst/>
@@ -34629,14 +34652,14 @@
       </p:sp>
       <p:sp>
         <p:nvSpPr>
-          <p:cNvPr id="133" name="Shape 136"/>
+          <p:cNvPr id="134" name="Shape 136"/>
           <p:cNvSpPr/>
           <p:nvPr/>
         </p:nvSpPr>
         <p:spPr>
           <a:xfrm>
             <a:off x="0" y="6510600"/>
-            <a:ext cx="12188520" cy="362520"/>
+            <a:ext cx="12187440" cy="361440"/>
           </a:xfrm>
           <a:prstGeom prst="rect">
             <a:avLst/>
@@ -34676,14 +34699,14 @@
       </p:sp>
       <p:sp>
         <p:nvSpPr>
-          <p:cNvPr id="134" name="Text 77"/>
+          <p:cNvPr id="135" name="Text 77"/>
           <p:cNvSpPr/>
           <p:nvPr/>
         </p:nvSpPr>
         <p:spPr>
           <a:xfrm>
             <a:off x="540000" y="388800"/>
-            <a:ext cx="6717600" cy="1048320"/>
+            <a:ext cx="6716520" cy="1047240"/>
           </a:xfrm>
           <a:prstGeom prst="rect">
             <a:avLst/>
@@ -34730,19 +34753,19 @@
       </p:sp>
       <p:pic>
         <p:nvPicPr>
-          <p:cNvPr id="135" name="" descr=""/>
+          <p:cNvPr id="136" name="" descr=""/>
           <p:cNvPicPr/>
           <p:nvPr/>
         </p:nvPicPr>
         <p:blipFill>
           <a:blip r:embed="rId1"/>
-          <a:srcRect l="0" t="26241" r="0" b="23016"/>
+          <a:srcRect l="0" t="26247" r="0" b="23016"/>
           <a:stretch/>
         </p:blipFill>
         <p:spPr>
           <a:xfrm>
             <a:off x="10038240" y="288360"/>
-            <a:ext cx="1946880" cy="536760"/>
+            <a:ext cx="1945800" cy="535680"/>
           </a:xfrm>
           <a:prstGeom prst="rect">
             <a:avLst/>
@@ -34754,14 +34777,14 @@
       </p:pic>
       <p:sp>
         <p:nvSpPr>
-          <p:cNvPr id="136" name="Text 79"/>
+          <p:cNvPr id="137" name="Text 79"/>
           <p:cNvSpPr/>
           <p:nvPr/>
         </p:nvSpPr>
         <p:spPr>
           <a:xfrm>
             <a:off x="168120" y="6538320"/>
-            <a:ext cx="2997000" cy="316800"/>
+            <a:ext cx="2995920" cy="315720"/>
           </a:xfrm>
           <a:prstGeom prst="rect">
             <a:avLst/>
@@ -34808,14 +34831,14 @@
       </p:sp>
       <p:sp>
         <p:nvSpPr>
-          <p:cNvPr id="137" name=""/>
+          <p:cNvPr id="138" name=""/>
           <p:cNvSpPr/>
           <p:nvPr/>
         </p:nvSpPr>
         <p:spPr>
           <a:xfrm>
             <a:off x="560880" y="971280"/>
-            <a:ext cx="9474480" cy="285840"/>
+            <a:ext cx="9473400" cy="284760"/>
           </a:xfrm>
           <a:prstGeom prst="rect">
             <a:avLst/>
@@ -34862,7 +34885,7 @@
       </p:sp>
       <p:pic>
         <p:nvPicPr>
-          <p:cNvPr id="138" name="" descr=""/>
+          <p:cNvPr id="139" name="" descr=""/>
           <p:cNvPicPr/>
           <p:nvPr/>
         </p:nvPicPr>
@@ -34873,7 +34896,7 @@
         <p:spPr>
           <a:xfrm>
             <a:off x="663840" y="1479960"/>
-            <a:ext cx="7074000" cy="4709880"/>
+            <a:ext cx="7072920" cy="4708800"/>
           </a:xfrm>
           <a:prstGeom prst="rect">
             <a:avLst/>
@@ -34885,14 +34908,14 @@
       </p:pic>
       <p:sp>
         <p:nvSpPr>
-          <p:cNvPr id="139" name="Shape 137"/>
+          <p:cNvPr id="140" name="Shape 137"/>
           <p:cNvSpPr/>
           <p:nvPr/>
         </p:nvSpPr>
         <p:spPr>
           <a:xfrm>
             <a:off x="540000" y="1440000"/>
-            <a:ext cx="7917840" cy="4857840"/>
+            <a:ext cx="7916760" cy="4856760"/>
           </a:xfrm>
           <a:prstGeom prst="roundRect">
             <a:avLst>
@@ -34957,14 +34980,14 @@
       </p:sp>
       <p:sp>
         <p:nvSpPr>
-          <p:cNvPr id="140" name="Text 35"/>
+          <p:cNvPr id="141" name="Text 35"/>
           <p:cNvSpPr/>
           <p:nvPr/>
         </p:nvSpPr>
         <p:spPr>
           <a:xfrm>
             <a:off x="2742840" y="6538320"/>
-            <a:ext cx="1395720" cy="316800"/>
+            <a:ext cx="1394640" cy="315720"/>
           </a:xfrm>
           <a:prstGeom prst="rect">
             <a:avLst/>
@@ -35011,14 +35034,14 @@
       </p:sp>
       <p:sp>
         <p:nvSpPr>
-          <p:cNvPr id="141" name="Text 78"/>
+          <p:cNvPr id="142" name="Text 78"/>
           <p:cNvSpPr/>
           <p:nvPr/>
         </p:nvSpPr>
         <p:spPr>
           <a:xfrm>
             <a:off x="11412000" y="6538320"/>
-            <a:ext cx="754560" cy="316800"/>
+            <a:ext cx="753480" cy="315720"/>
           </a:xfrm>
           <a:prstGeom prst="rect">
             <a:avLst/>
@@ -35102,14 +35125,14 @@
       </p:grpSpPr>
       <p:sp>
         <p:nvSpPr>
-          <p:cNvPr id="142" name="Shape 142"/>
+          <p:cNvPr id="143" name="Shape 142"/>
           <p:cNvSpPr/>
           <p:nvPr/>
         </p:nvSpPr>
         <p:spPr>
           <a:xfrm>
             <a:off x="8820000" y="1440000"/>
-            <a:ext cx="2877840" cy="2517840"/>
+            <a:ext cx="2876760" cy="2516760"/>
           </a:xfrm>
           <a:prstGeom prst="roundRect">
             <a:avLst>
@@ -35209,14 +35232,14 @@
       </p:sp>
       <p:sp>
         <p:nvSpPr>
-          <p:cNvPr id="143" name="Shape 143"/>
+          <p:cNvPr id="144" name="Shape 143"/>
           <p:cNvSpPr/>
           <p:nvPr/>
         </p:nvSpPr>
         <p:spPr>
           <a:xfrm>
             <a:off x="0" y="0"/>
-            <a:ext cx="12188520" cy="161280"/>
+            <a:ext cx="12187440" cy="160200"/>
           </a:xfrm>
           <a:prstGeom prst="rect">
             <a:avLst/>
@@ -35256,14 +35279,14 @@
       </p:sp>
       <p:sp>
         <p:nvSpPr>
-          <p:cNvPr id="144" name="Shape 144"/>
+          <p:cNvPr id="145" name="Shape 144"/>
           <p:cNvSpPr/>
           <p:nvPr/>
         </p:nvSpPr>
         <p:spPr>
           <a:xfrm>
             <a:off x="0" y="6510600"/>
-            <a:ext cx="12188520" cy="362520"/>
+            <a:ext cx="12187440" cy="361440"/>
           </a:xfrm>
           <a:prstGeom prst="rect">
             <a:avLst/>
@@ -35303,14 +35326,14 @@
       </p:sp>
       <p:sp>
         <p:nvSpPr>
-          <p:cNvPr id="145" name="Text 83"/>
+          <p:cNvPr id="146" name="Text 83"/>
           <p:cNvSpPr/>
           <p:nvPr/>
         </p:nvSpPr>
         <p:spPr>
           <a:xfrm>
             <a:off x="540000" y="388800"/>
-            <a:ext cx="6717600" cy="1048320"/>
+            <a:ext cx="6716520" cy="1047240"/>
           </a:xfrm>
           <a:prstGeom prst="rect">
             <a:avLst/>
@@ -35357,19 +35380,19 @@
       </p:sp>
       <p:pic>
         <p:nvPicPr>
-          <p:cNvPr id="146" name="" descr=""/>
+          <p:cNvPr id="147" name="" descr=""/>
           <p:cNvPicPr/>
           <p:nvPr/>
         </p:nvPicPr>
         <p:blipFill>
           <a:blip r:embed="rId1"/>
-          <a:srcRect l="0" t="26241" r="0" b="23016"/>
+          <a:srcRect l="0" t="26247" r="0" b="23016"/>
           <a:stretch/>
         </p:blipFill>
         <p:spPr>
           <a:xfrm>
             <a:off x="10038240" y="288360"/>
-            <a:ext cx="1946880" cy="536760"/>
+            <a:ext cx="1945800" cy="535680"/>
           </a:xfrm>
           <a:prstGeom prst="rect">
             <a:avLst/>
@@ -35381,14 +35404,14 @@
       </p:pic>
       <p:sp>
         <p:nvSpPr>
-          <p:cNvPr id="147" name="Text 85"/>
+          <p:cNvPr id="148" name="Text 85"/>
           <p:cNvSpPr/>
           <p:nvPr/>
         </p:nvSpPr>
         <p:spPr>
           <a:xfrm>
             <a:off x="168120" y="6538320"/>
-            <a:ext cx="2997000" cy="316800"/>
+            <a:ext cx="2995920" cy="315720"/>
           </a:xfrm>
           <a:prstGeom prst="rect">
             <a:avLst/>
@@ -35435,14 +35458,14 @@
       </p:sp>
       <p:sp>
         <p:nvSpPr>
-          <p:cNvPr id="148" name=""/>
+          <p:cNvPr id="149" name=""/>
           <p:cNvSpPr/>
           <p:nvPr/>
         </p:nvSpPr>
         <p:spPr>
           <a:xfrm>
             <a:off x="560880" y="971280"/>
-            <a:ext cx="9474480" cy="285840"/>
+            <a:ext cx="9473400" cy="284760"/>
           </a:xfrm>
           <a:prstGeom prst="rect">
             <a:avLst/>
@@ -35489,14 +35512,14 @@
       </p:sp>
       <p:sp>
         <p:nvSpPr>
-          <p:cNvPr id="149" name="Shape 145"/>
+          <p:cNvPr id="150" name="Shape 145"/>
           <p:cNvSpPr/>
           <p:nvPr/>
         </p:nvSpPr>
         <p:spPr>
           <a:xfrm>
             <a:off x="540000" y="1440000"/>
-            <a:ext cx="7917840" cy="4857840"/>
+            <a:ext cx="7916760" cy="4856760"/>
           </a:xfrm>
           <a:prstGeom prst="roundRect">
             <a:avLst>
@@ -35563,7 +35586,7 @@
       </p:sp>
       <p:pic>
         <p:nvPicPr>
-          <p:cNvPr id="150" name="" descr=""/>
+          <p:cNvPr id="151" name="" descr=""/>
           <p:cNvPicPr/>
           <p:nvPr/>
         </p:nvPicPr>
@@ -35574,7 +35597,7 @@
         <p:spPr>
           <a:xfrm>
             <a:off x="1080000" y="1620000"/>
-            <a:ext cx="6453000" cy="4478040"/>
+            <a:ext cx="6451920" cy="4476960"/>
           </a:xfrm>
           <a:prstGeom prst="rect">
             <a:avLst/>
@@ -35586,14 +35609,14 @@
       </p:pic>
       <p:sp>
         <p:nvSpPr>
-          <p:cNvPr id="151" name="Text 40"/>
+          <p:cNvPr id="152" name="Text 40"/>
           <p:cNvSpPr/>
           <p:nvPr/>
         </p:nvSpPr>
         <p:spPr>
           <a:xfrm>
             <a:off x="2742840" y="6538320"/>
-            <a:ext cx="1395720" cy="316800"/>
+            <a:ext cx="1394640" cy="315720"/>
           </a:xfrm>
           <a:prstGeom prst="rect">
             <a:avLst/>
@@ -35640,14 +35663,14 @@
       </p:sp>
       <p:sp>
         <p:nvSpPr>
-          <p:cNvPr id="152" name="Text 84"/>
+          <p:cNvPr id="153" name="Text 84"/>
           <p:cNvSpPr/>
           <p:nvPr/>
         </p:nvSpPr>
         <p:spPr>
           <a:xfrm>
             <a:off x="11412000" y="6538320"/>
-            <a:ext cx="754560" cy="316800"/>
+            <a:ext cx="753480" cy="315720"/>
           </a:xfrm>
           <a:prstGeom prst="rect">
             <a:avLst/>
